--- a/0330_additional/0330_DH_Steel_IBA_Analysis_Report.pptx
+++ b/0330_additional/0330_DH_Steel_IBA_Analysis_Report.pptx
@@ -3121,7 +3121,7 @@
         <p:spPr>
           <a:xfrm>
             <a:off x="914400" y="1371600"/>
-            <a:ext cx="10058400" cy="1371600"/>
+            <a:ext cx="10058400" cy="1097280"/>
           </a:xfrm>
           <a:prstGeom prst="rect">
             <a:avLst/>
@@ -3156,41 +3156,6 @@
         <p:spPr>
           <a:xfrm>
             <a:off x="914400" y="2743200"/>
-            <a:ext cx="10058400" cy="914400"/>
-          </a:xfrm>
-          <a:prstGeom prst="rect">
-            <a:avLst/>
-          </a:prstGeom>
-          <a:noFill/>
-        </p:spPr>
-        <p:txBody>
-          <a:bodyPr wrap="square">
-            <a:spAutoFit/>
-          </a:bodyPr>
-          <a:lstStyle/>
-          <a:p>
-            <a:pPr algn="ctr">
-              <a:defRPr sz="2400" b="0">
-                <a:solidFill>
-                  <a:srgbClr val="BDC3C7"/>
-                </a:solidFill>
-              </a:defRPr>
-            </a:pPr>
-            <a:r>
-              <a:t>Process-Defect Correlation Analysis Report</a:t>
-            </a:r>
-          </a:p>
-        </p:txBody>
-      </p:sp>
-      <p:sp>
-        <p:nvSpPr>
-          <p:cNvPr id="4" name="TextBox 3"/>
-          <p:cNvSpPr txBox="1"/>
-          <p:nvPr/>
-        </p:nvSpPr>
-        <p:spPr>
-          <a:xfrm>
-            <a:off x="914400" y="4114800"/>
             <a:ext cx="10058400" cy="731520"/>
           </a:xfrm>
           <a:prstGeom prst="rect">
@@ -3205,28 +3170,28 @@
           <a:lstStyle/>
           <a:p>
             <a:pPr algn="ctr">
-              <a:defRPr sz="1600" b="0">
+              <a:defRPr sz="2400" b="0">
                 <a:solidFill>
-                  <a:srgbClr val="95A5A6"/>
+                  <a:srgbClr val="BDC3C7"/>
                 </a:solidFill>
               </a:defRPr>
             </a:pPr>
             <a:r>
-              <a:t>2026.03.31 | Analysis Period: 2025.05~08 + 2026.01~02</a:t>
+              <a:t>Process-Defect Correlation Analysis Report</a:t>
             </a:r>
           </a:p>
         </p:txBody>
       </p:sp>
       <p:sp>
         <p:nvSpPr>
-          <p:cNvPr id="5" name="TextBox 4"/>
+          <p:cNvPr id="4" name="TextBox 3"/>
           <p:cNvSpPr txBox="1"/>
           <p:nvPr/>
         </p:nvSpPr>
         <p:spPr>
           <a:xfrm>
-            <a:off x="914400" y="5029200"/>
-            <a:ext cx="10058400" cy="731520"/>
+            <a:off x="914400" y="3931920"/>
+            <a:ext cx="10058400" cy="548640"/>
           </a:xfrm>
           <a:prstGeom prst="rect">
             <a:avLst/>
@@ -3240,6 +3205,41 @@
           <a:lstStyle/>
           <a:p>
             <a:pPr algn="ctr">
+              <a:defRPr sz="1600" b="0">
+                <a:solidFill>
+                  <a:srgbClr val="95A5A6"/>
+                </a:solidFill>
+              </a:defRPr>
+            </a:pPr>
+            <a:r>
+              <a:t>2026.03.31  |  Analysis: 2025.05~08 + 2026.01~02</a:t>
+            </a:r>
+          </a:p>
+        </p:txBody>
+      </p:sp>
+      <p:sp>
+        <p:nvSpPr>
+          <p:cNvPr id="5" name="TextBox 4"/>
+          <p:cNvSpPr txBox="1"/>
+          <p:nvPr/>
+        </p:nvSpPr>
+        <p:spPr>
+          <a:xfrm>
+            <a:off x="914400" y="4846320"/>
+            <a:ext cx="10058400" cy="548640"/>
+          </a:xfrm>
+          <a:prstGeom prst="rect">
+            <a:avLst/>
+          </a:prstGeom>
+          <a:noFill/>
+        </p:spPr>
+        <p:txBody>
+          <a:bodyPr wrap="square">
+            <a:spAutoFit/>
+          </a:bodyPr>
+          <a:lstStyle/>
+          <a:p>
+            <a:pPr algn="ctr">
               <a:defRPr sz="1800" b="0">
                 <a:solidFill>
                   <a:srgbClr val="FFFFFF"/>
@@ -3247,7 +3247,7 @@
               </a:defRPr>
             </a:pPr>
             <a:r>
-              <a:t>Customer Requirements Analysis (5 Items) + Additional Requests</a:t>
+              <a:t>Customer Requirements (5 Items) + Additional Requests</a:t>
             </a:r>
           </a:p>
         </p:txBody>
@@ -3314,37 +3314,37 @@
           </a:fontRef>
         </p:style>
         <p:txBody>
-          <a:bodyPr rtlCol="0" anchor="ctr" wrap="square" lIns="457200" tIns="137160"/>
+          <a:bodyPr rtlCol="0" anchor="ctr" wrap="square" lIns="457200" tIns="109728"/>
           <a:lstStyle/>
           <a:p>
             <a:pPr algn="l">
-              <a:defRPr sz="2800" b="1">
+              <a:defRPr sz="2600" b="1">
                 <a:solidFill>
                   <a:srgbClr val="FFFFFF"/>
                 </a:solidFill>
               </a:defRPr>
             </a:pPr>
             <a:r>
-              <a:t>Q1+Q2: Process Flow — Furnace Impact Propagation</a:t>
-            </a:r>
-          </a:p>
-          <a:p>
-            <a:pPr algn="l">
-              <a:defRPr sz="1600">
+              <a:t>Q1+Q2: Process Flow — Furnace Leads</a:t>
+            </a:r>
+          </a:p>
+          <a:p>
+            <a:pPr>
+              <a:defRPr sz="1400">
                 <a:solidFill>
                   <a:srgbClr val="BDC3C7"/>
                 </a:solidFill>
               </a:defRPr>
             </a:pPr>
             <a:r>
-              <a:t>Stand 8 vs Furnace Pressure: rho=-0.722</a:t>
+              <a:t>Stand 8 vs Furnace Pressure: rho = -0.722 (p&lt;0.001)</a:t>
             </a:r>
           </a:p>
         </p:txBody>
       </p:sp>
       <p:pic>
         <p:nvPicPr>
-          <p:cNvPr id="3" name="Picture 2" descr="chart1_process_flow_map.png"/>
+          <p:cNvPr id="3" name="Picture 2" descr="chart2_ccf_comparison.png"/>
           <p:cNvPicPr>
             <a:picLocks noChangeAspect="1"/>
           </p:cNvPicPr>
@@ -3358,8 +3358,8 @@
         </p:blipFill>
         <p:spPr>
           <a:xfrm>
-            <a:off x="274320" y="1280160"/>
-            <a:ext cx="5760720" cy="2497520"/>
+            <a:off x="688899" y="1280160"/>
+            <a:ext cx="4840120" cy="2743200"/>
           </a:xfrm>
           <a:prstGeom prst="rect">
             <a:avLst/>
@@ -3382,8 +3382,8 @@
         </p:blipFill>
         <p:spPr>
           <a:xfrm>
-            <a:off x="6217920" y="1280160"/>
-            <a:ext cx="5760720" cy="2743200"/>
+            <a:off x="274320" y="4206240"/>
+            <a:ext cx="5669280" cy="1954559"/>
           </a:xfrm>
           <a:prstGeom prst="rect">
             <a:avLst/>
@@ -3398,8 +3398,8 @@
         </p:nvSpPr>
         <p:spPr>
           <a:xfrm>
-            <a:off x="6217920" y="4206240"/>
-            <a:ext cx="5486400" cy="2286000"/>
+            <a:off x="6217920" y="1371600"/>
+            <a:ext cx="5486400" cy="5029200"/>
           </a:xfrm>
           <a:prstGeom prst="rect">
             <a:avLst/>
@@ -3413,7 +3413,7 @@
           <a:lstStyle/>
           <a:p>
             <a:pPr algn="l">
-              <a:defRPr sz="1300" b="0">
+              <a:defRPr sz="1200" b="0">
                 <a:solidFill>
                   <a:srgbClr val="34495E"/>
                 </a:solidFill>
@@ -3433,6 +3433,48 @@
             </a:r>
           </a:p>
           <a:p>
+            <a:pPr lvl="1">
+              <a:defRPr sz="1200" b="0">
+                <a:solidFill>
+                  <a:srgbClr val="34495E"/>
+                </a:solidFill>
+              </a:defRPr>
+            </a:pPr>
+            <a:r>
+              <a:t>  Furnace pressure down -&gt; Stand 8 torque up</a:t>
+            </a:r>
+          </a:p>
+          <a:p>
+            <a:pPr>
+              <a:defRPr sz="800" b="0">
+                <a:solidFill>
+                  <a:srgbClr val="34495E"/>
+                </a:solidFill>
+              </a:defRPr>
+            </a:pPr>
+          </a:p>
+          <a:p>
+            <a:pPr>
+              <a:defRPr sz="1300" b="1">
+                <a:solidFill>
+                  <a:srgbClr val="34495E"/>
+                </a:solidFill>
+              </a:defRPr>
+            </a:pPr>
+            <a:r>
+              <a:t>Furnace Pressure vs Defect: rho=-0.263 (p=0.003)</a:t>
+            </a:r>
+          </a:p>
+          <a:p>
+            <a:pPr>
+              <a:defRPr sz="800" b="0">
+                <a:solidFill>
+                  <a:srgbClr val="34495E"/>
+                </a:solidFill>
+              </a:defRPr>
+            </a:pPr>
+          </a:p>
+          <a:p>
             <a:pPr>
               <a:defRPr sz="1300" b="0">
                 <a:solidFill>
@@ -3441,23 +3483,11 @@
               </a:defRPr>
             </a:pPr>
             <a:r>
-              <a:t>Furnace Pressure vs Defect: rho=-0.263 (p=0.003)</a:t>
-            </a:r>
-          </a:p>
-          <a:p>
-            <a:pPr>
-              <a:defRPr sz="1300" b="0">
-                <a:solidFill>
-                  <a:srgbClr val="34495E"/>
-                </a:solidFill>
-              </a:defRPr>
-            </a:pPr>
-            <a:r>
-              <a:t>All 10 CCF pairs significant — but lag=0 (daily aggregation limit)</a:t>
-            </a:r>
-          </a:p>
-          <a:p>
-            <a:pPr>
+              <a:t>Cross-Correlation 10 pairs: all significant</a:t>
+            </a:r>
+          </a:p>
+          <a:p>
+            <a:pPr lvl="1">
               <a:defRPr sz="1200" b="0">
                 <a:solidFill>
                   <a:srgbClr val="7F8C8D"/>
@@ -3465,7 +3495,76 @@
               </a:defRPr>
             </a:pPr>
             <a:r>
-              <a:t>Physical lag estimate: ~1-2 min (furnace to pinchroll)</a:t>
+              <a:t>  But lag=0 (daily aggregation limitation)</a:t>
+            </a:r>
+          </a:p>
+          <a:p>
+            <a:pPr lvl="1">
+              <a:defRPr sz="1200" b="0">
+                <a:solidFill>
+                  <a:srgbClr val="7F8C8D"/>
+                </a:solidFill>
+              </a:defRPr>
+            </a:pPr>
+            <a:r>
+              <a:t>  Physical lag estimate: ~1-2 min</a:t>
+            </a:r>
+          </a:p>
+          <a:p>
+            <a:pPr>
+              <a:defRPr sz="800" b="0">
+                <a:solidFill>
+                  <a:srgbClr val="34495E"/>
+                </a:solidFill>
+              </a:defRPr>
+            </a:pPr>
+          </a:p>
+          <a:p>
+            <a:pPr>
+              <a:defRPr sz="1400" b="1">
+                <a:solidFill>
+                  <a:srgbClr val="2C7BE5"/>
+                </a:solidFill>
+              </a:defRPr>
+            </a:pPr>
+            <a:r>
+              <a:t>Priority actions:</a:t>
+            </a:r>
+          </a:p>
+          <a:p>
+            <a:pPr lvl="1">
+              <a:defRPr sz="1200" b="0">
+                <a:solidFill>
+                  <a:srgbClr val="34495E"/>
+                </a:solidFill>
+              </a:defRPr>
+            </a:pPr>
+            <a:r>
+              <a:t>1. Furnace pressure &lt;= 0.48: ALERT (all grades)</a:t>
+            </a:r>
+          </a:p>
+          <a:p>
+            <a:pPr lvl="1">
+              <a:defRPr sz="1200" b="0">
+                <a:solidFill>
+                  <a:srgbClr val="34495E"/>
+                </a:solidFill>
+              </a:defRPr>
+            </a:pPr>
+            <a:r>
+              <a:t>2. MAIN_GAS_FLOW management (D4: Gap -75%)</a:t>
+            </a:r>
+          </a:p>
+          <a:p>
+            <a:pPr lvl="1">
+              <a:defRPr sz="1200" b="0">
+                <a:solidFill>
+                  <a:srgbClr val="34495E"/>
+                </a:solidFill>
+              </a:defRPr>
+            </a:pPr>
+            <a:r>
+              <a:t>3. PR3 Torque &lt; 10: ALERT (D5-D10)</a:t>
             </a:r>
           </a:p>
         </p:txBody>
@@ -3532,11 +3631,11 @@
           </a:fontRef>
         </p:style>
         <p:txBody>
-          <a:bodyPr rtlCol="0" anchor="ctr" wrap="square" lIns="457200" tIns="137160"/>
+          <a:bodyPr rtlCol="0" anchor="ctr" wrap="square" lIns="457200" tIns="109728"/>
           <a:lstStyle/>
           <a:p>
             <a:pPr algn="l">
-              <a:defRPr sz="2800" b="1">
+              <a:defRPr sz="2600" b="1">
                 <a:solidFill>
                   <a:srgbClr val="FFFFFF"/>
                 </a:solidFill>
@@ -3547,15 +3646,15 @@
             </a:r>
           </a:p>
           <a:p>
-            <a:pPr algn="l">
-              <a:defRPr sz="1600">
+            <a:pPr>
+              <a:defRPr sz="1400">
                 <a:solidFill>
                   <a:srgbClr val="BDC3C7"/>
                 </a:solidFill>
               </a:defRPr>
             </a:pPr>
             <a:r>
-              <a:t>"avg is NOT significant, but std IS significant"</a:t>
+              <a:t>"Average is NOT significant, but Variability IS significant"</a:t>
             </a:r>
           </a:p>
         </p:txBody>
@@ -3577,7 +3676,7 @@
         <p:spPr>
           <a:xfrm>
             <a:off x="274320" y="1280160"/>
-            <a:ext cx="5760720" cy="2551413"/>
+            <a:ext cx="5669280" cy="2510914"/>
           </a:xfrm>
           <a:prstGeom prst="rect">
             <a:avLst/>
@@ -3594,7 +3693,7 @@
         </p:nvGraphicFramePr>
         <p:xfrm>
           <a:off x="6217920" y="1371600"/>
-          <a:ext cx="5212080" cy="2926080"/>
+          <a:ext cx="4846320" cy="2560320"/>
         </p:xfrm>
         <a:graphic>
           <a:graphicData uri="http://schemas.openxmlformats.org/drawingml/2006/table">
@@ -3603,21 +3702,21 @@
                 <a:tableStyleId>{5C22544A-7EE6-4342-B048-85BDC9FD1C3A}</a:tableStyleId>
               </a:tblPr>
               <a:tblGrid>
-                <a:gridCol w="1371600"/>
+                <a:gridCol w="1188720"/>
                 <a:gridCol w="640080"/>
                 <a:gridCol w="731520"/>
                 <a:gridCol w="640080"/>
                 <a:gridCol w="914400"/>
-                <a:gridCol w="914400"/>
+                <a:gridCol w="731520"/>
               </a:tblGrid>
-              <a:tr h="585216">
+              <a:tr h="512064">
                 <a:tc>
                   <a:txBody>
                     <a:bodyPr/>
                     <a:lstStyle/>
                     <a:p>
                       <a:pPr algn="ctr">
-                        <a:defRPr sz="1100" b="1">
+                        <a:defRPr sz="1000" b="1">
                           <a:solidFill>
                             <a:srgbClr val="FFFFFF"/>
                           </a:solidFill>
@@ -3640,7 +3739,7 @@
                     <a:lstStyle/>
                     <a:p>
                       <a:pPr algn="ctr">
-                        <a:defRPr sz="1100" b="1">
+                        <a:defRPr sz="1000" b="1">
                           <a:solidFill>
                             <a:srgbClr val="FFFFFF"/>
                           </a:solidFill>
@@ -3663,7 +3762,7 @@
                     <a:lstStyle/>
                     <a:p>
                       <a:pPr algn="ctr">
-                        <a:defRPr sz="1100" b="1">
+                        <a:defRPr sz="1000" b="1">
                           <a:solidFill>
                             <a:srgbClr val="FFFFFF"/>
                           </a:solidFill>
@@ -3686,7 +3785,7 @@
                     <a:lstStyle/>
                     <a:p>
                       <a:pPr algn="ctr">
-                        <a:defRPr sz="1100" b="1">
+                        <a:defRPr sz="1000" b="1">
                           <a:solidFill>
                             <a:srgbClr val="FFFFFF"/>
                           </a:solidFill>
@@ -3709,7 +3808,7 @@
                     <a:lstStyle/>
                     <a:p>
                       <a:pPr algn="ctr">
-                        <a:defRPr sz="1100" b="1">
+                        <a:defRPr sz="1000" b="1">
                           <a:solidFill>
                             <a:srgbClr val="FFFFFF"/>
                           </a:solidFill>
@@ -3732,7 +3831,7 @@
                     <a:lstStyle/>
                     <a:p>
                       <a:pPr algn="ctr">
-                        <a:defRPr sz="1100" b="1">
+                        <a:defRPr sz="1000" b="1">
                           <a:solidFill>
                             <a:srgbClr val="FFFFFF"/>
                           </a:solidFill>
@@ -3750,21 +3849,21 @@
                   </a:tcPr>
                 </a:tc>
               </a:tr>
-              <a:tr h="585216">
-                <a:tc>
-                  <a:txBody>
-                    <a:bodyPr/>
-                    <a:lstStyle/>
-                    <a:p>
-                      <a:pPr>
-                        <a:defRPr sz="1100">
-                          <a:solidFill>
-                            <a:srgbClr val="34495E"/>
-                          </a:solidFill>
-                        </a:defRPr>
-                      </a:pPr>
-                      <a:r>
-                        <a:t>Stand 14 Torque</a:t>
+              <a:tr h="512064">
+                <a:tc>
+                  <a:txBody>
+                    <a:bodyPr/>
+                    <a:lstStyle/>
+                    <a:p>
+                      <a:pPr>
+                        <a:defRPr sz="1000">
+                          <a:solidFill>
+                            <a:srgbClr val="34495E"/>
+                          </a:solidFill>
+                        </a:defRPr>
+                      </a:pPr>
+                      <a:r>
+                        <a:t>Stand14 Torque</a:t>
                       </a:r>
                     </a:p>
                   </a:txBody>
@@ -3776,7 +3875,7 @@
                     <a:lstStyle/>
                     <a:p>
                       <a:pPr>
-                        <a:defRPr sz="1100">
+                        <a:defRPr sz="1000">
                           <a:solidFill>
                             <a:srgbClr val="34495E"/>
                           </a:solidFill>
@@ -3795,7 +3894,7 @@
                     <a:lstStyle/>
                     <a:p>
                       <a:pPr>
-                        <a:defRPr sz="1100">
+                        <a:defRPr sz="1000">
                           <a:solidFill>
                             <a:srgbClr val="34495E"/>
                           </a:solidFill>
@@ -3814,7 +3913,7 @@
                     <a:lstStyle/>
                     <a:p>
                       <a:pPr>
-                        <a:defRPr sz="1100">
+                        <a:defRPr sz="1000">
                           <a:solidFill>
                             <a:srgbClr val="34495E"/>
                           </a:solidFill>
@@ -3833,7 +3932,7 @@
                     <a:lstStyle/>
                     <a:p>
                       <a:pPr>
-                        <a:defRPr sz="1100">
+                        <a:defRPr sz="1000">
                           <a:solidFill>
                             <a:srgbClr val="34495E"/>
                           </a:solidFill>
@@ -3852,7 +3951,7 @@
                     <a:lstStyle/>
                     <a:p>
                       <a:pPr>
-                        <a:defRPr sz="1100">
+                        <a:defRPr sz="1000">
                           <a:solidFill>
                             <a:srgbClr val="34495E"/>
                           </a:solidFill>
@@ -3866,14 +3965,14 @@
                   <a:tcPr/>
                 </a:tc>
               </a:tr>
-              <a:tr h="585216">
-                <a:tc>
-                  <a:txBody>
-                    <a:bodyPr/>
-                    <a:lstStyle/>
-                    <a:p>
-                      <a:pPr>
-                        <a:defRPr sz="1100">
+              <a:tr h="512064">
+                <a:tc>
+                  <a:txBody>
+                    <a:bodyPr/>
+                    <a:lstStyle/>
+                    <a:p>
+                      <a:pPr>
+                        <a:defRPr sz="1000">
                           <a:solidFill>
                             <a:srgbClr val="34495E"/>
                           </a:solidFill>
@@ -3896,7 +3995,7 @@
                     <a:lstStyle/>
                     <a:p>
                       <a:pPr>
-                        <a:defRPr sz="1100">
+                        <a:defRPr sz="1000">
                           <a:solidFill>
                             <a:srgbClr val="34495E"/>
                           </a:solidFill>
@@ -3919,7 +4018,7 @@
                     <a:lstStyle/>
                     <a:p>
                       <a:pPr>
-                        <a:defRPr sz="1100">
+                        <a:defRPr sz="1000">
                           <a:solidFill>
                             <a:srgbClr val="34495E"/>
                           </a:solidFill>
@@ -3942,7 +4041,7 @@
                     <a:lstStyle/>
                     <a:p>
                       <a:pPr>
-                        <a:defRPr sz="1100">
+                        <a:defRPr sz="1000">
                           <a:solidFill>
                             <a:srgbClr val="34495E"/>
                           </a:solidFill>
@@ -3965,7 +4064,7 @@
                     <a:lstStyle/>
                     <a:p>
                       <a:pPr>
-                        <a:defRPr sz="1100">
+                        <a:defRPr sz="1000">
                           <a:solidFill>
                             <a:srgbClr val="34495E"/>
                           </a:solidFill>
@@ -3988,14 +4087,14 @@
                     <a:lstStyle/>
                     <a:p>
                       <a:pPr>
-                        <a:defRPr sz="1100">
-                          <a:solidFill>
-                            <a:srgbClr val="34495E"/>
-                          </a:solidFill>
-                        </a:defRPr>
-                      </a:pPr>
-                      <a:r>
-                        <a:t>ML #1 tag</a:t>
+                        <a:defRPr sz="1000">
+                          <a:solidFill>
+                            <a:srgbClr val="34495E"/>
+                          </a:solidFill>
+                        </a:defRPr>
+                      </a:pPr>
+                      <a:r>
+                        <a:t>ML #1</a:t>
                       </a:r>
                     </a:p>
                   </a:txBody>
@@ -4006,14 +4105,14 @@
                   </a:tcPr>
                 </a:tc>
               </a:tr>
-              <a:tr h="585216">
-                <a:tc>
-                  <a:txBody>
-                    <a:bodyPr/>
-                    <a:lstStyle/>
-                    <a:p>
-                      <a:pPr>
-                        <a:defRPr sz="1100">
+              <a:tr h="512064">
+                <a:tc>
+                  <a:txBody>
+                    <a:bodyPr/>
+                    <a:lstStyle/>
+                    <a:p>
+                      <a:pPr>
+                        <a:defRPr sz="1000">
                           <a:solidFill>
                             <a:srgbClr val="34495E"/>
                           </a:solidFill>
@@ -4032,7 +4131,7 @@
                     <a:lstStyle/>
                     <a:p>
                       <a:pPr>
-                        <a:defRPr sz="1100">
+                        <a:defRPr sz="1000">
                           <a:solidFill>
                             <a:srgbClr val="34495E"/>
                           </a:solidFill>
@@ -4051,7 +4150,7 @@
                     <a:lstStyle/>
                     <a:p>
                       <a:pPr>
-                        <a:defRPr sz="1100">
+                        <a:defRPr sz="1000">
                           <a:solidFill>
                             <a:srgbClr val="34495E"/>
                           </a:solidFill>
@@ -4070,7 +4169,7 @@
                     <a:lstStyle/>
                     <a:p>
                       <a:pPr>
-                        <a:defRPr sz="1100">
+                        <a:defRPr sz="1000">
                           <a:solidFill>
                             <a:srgbClr val="34495E"/>
                           </a:solidFill>
@@ -4089,7 +4188,7 @@
                     <a:lstStyle/>
                     <a:p>
                       <a:pPr>
-                        <a:defRPr sz="1100">
+                        <a:defRPr sz="1000">
                           <a:solidFill>
                             <a:srgbClr val="34495E"/>
                           </a:solidFill>
@@ -4108,35 +4207,35 @@
                     <a:lstStyle/>
                     <a:p>
                       <a:pPr>
-                        <a:defRPr sz="1100">
-                          <a:solidFill>
-                            <a:srgbClr val="34495E"/>
-                          </a:solidFill>
-                        </a:defRPr>
-                      </a:pPr>
-                      <a:r>
-                        <a:t>Both sig.</a:t>
+                        <a:defRPr sz="1000">
+                          <a:solidFill>
+                            <a:srgbClr val="34495E"/>
+                          </a:solidFill>
+                        </a:defRPr>
+                      </a:pPr>
+                      <a:r>
+                        <a:t>Both</a:t>
                       </a:r>
                     </a:p>
                   </a:txBody>
                   <a:tcPr/>
                 </a:tc>
               </a:tr>
-              <a:tr h="585216">
-                <a:tc>
-                  <a:txBody>
-                    <a:bodyPr/>
-                    <a:lstStyle/>
-                    <a:p>
-                      <a:pPr>
-                        <a:defRPr sz="1100">
-                          <a:solidFill>
-                            <a:srgbClr val="34495E"/>
-                          </a:solidFill>
-                        </a:defRPr>
-                      </a:pPr>
-                      <a:r>
-                        <a:t>Stand 14 Speed</a:t>
+              <a:tr h="512064">
+                <a:tc>
+                  <a:txBody>
+                    <a:bodyPr/>
+                    <a:lstStyle/>
+                    <a:p>
+                      <a:pPr>
+                        <a:defRPr sz="1000">
+                          <a:solidFill>
+                            <a:srgbClr val="34495E"/>
+                          </a:solidFill>
+                        </a:defRPr>
+                      </a:pPr>
+                      <a:r>
+                        <a:t>Stand14 Speed</a:t>
                       </a:r>
                     </a:p>
                   </a:txBody>
@@ -4152,7 +4251,7 @@
                     <a:lstStyle/>
                     <a:p>
                       <a:pPr>
-                        <a:defRPr sz="1100">
+                        <a:defRPr sz="1000">
                           <a:solidFill>
                             <a:srgbClr val="34495E"/>
                           </a:solidFill>
@@ -4175,7 +4274,7 @@
                     <a:lstStyle/>
                     <a:p>
                       <a:pPr>
-                        <a:defRPr sz="1100">
+                        <a:defRPr sz="1000">
                           <a:solidFill>
                             <a:srgbClr val="34495E"/>
                           </a:solidFill>
@@ -4198,7 +4297,7 @@
                     <a:lstStyle/>
                     <a:p>
                       <a:pPr>
-                        <a:defRPr sz="1100">
+                        <a:defRPr sz="1000">
                           <a:solidFill>
                             <a:srgbClr val="34495E"/>
                           </a:solidFill>
@@ -4221,7 +4320,7 @@
                     <a:lstStyle/>
                     <a:p>
                       <a:pPr>
-                        <a:defRPr sz="1100">
+                        <a:defRPr sz="1000">
                           <a:solidFill>
                             <a:srgbClr val="34495E"/>
                           </a:solidFill>
@@ -4244,14 +4343,14 @@
                     <a:lstStyle/>
                     <a:p>
                       <a:pPr>
-                        <a:defRPr sz="1100">
-                          <a:solidFill>
-                            <a:srgbClr val="34495E"/>
-                          </a:solidFill>
-                        </a:defRPr>
-                      </a:pPr>
-                      <a:r>
-                        <a:t>std stronger</a:t>
+                        <a:defRPr sz="1000">
+                          <a:solidFill>
+                            <a:srgbClr val="34495E"/>
+                          </a:solidFill>
+                        </a:defRPr>
+                      </a:pPr>
+                      <a:r>
+                        <a:t>std &gt; avg</a:t>
                       </a:r>
                     </a:p>
                   </a:txBody>
@@ -4274,8 +4373,8 @@
         </p:nvSpPr>
         <p:spPr>
           <a:xfrm>
-            <a:off x="6217920" y="4572000"/>
-            <a:ext cx="5486400" cy="2103120"/>
+            <a:off x="6217920" y="4114800"/>
+            <a:ext cx="5486400" cy="2468880"/>
           </a:xfrm>
           <a:prstGeom prst="rect">
             <a:avLst/>
@@ -4289,7 +4388,7 @@
           <a:lstStyle/>
           <a:p>
             <a:pPr algn="l">
-              <a:defRPr sz="1300" b="0">
+              <a:defRPr sz="1200" b="0">
                 <a:solidFill>
                   <a:srgbClr val="34495E"/>
                 </a:solidFill>
@@ -4305,7 +4404,7 @@
               </a:defRPr>
             </a:pPr>
             <a:r>
-              <a:t>Previous finding "small signal" was based on avg only</a:t>
+              <a:t>"Small signal" was because avg was used</a:t>
             </a:r>
           </a:p>
           <a:p>
@@ -4317,19 +4416,31 @@
               </a:defRPr>
             </a:pPr>
             <a:r>
-              <a:t>Variability (std) is the real indicator of process instability</a:t>
+              <a:t>Variability (std) = real indicator of instability</a:t>
             </a:r>
           </a:p>
           <a:p>
             <a:pPr>
-              <a:defRPr sz="1300" b="0">
+              <a:defRPr sz="1200" b="0">
                 <a:solidFill>
                   <a:srgbClr val="34495E"/>
                 </a:solidFill>
               </a:defRPr>
             </a:pPr>
             <a:r>
-              <a:t>FB Slave Torque std = ML #1 + Spearman rho=0.491</a:t>
+              <a:t>FB Slave Torque std = ML #1 + rho=0.491</a:t>
+            </a:r>
+          </a:p>
+          <a:p>
+            <a:pPr>
+              <a:defRPr sz="1200" b="1">
+                <a:solidFill>
+                  <a:srgbClr val="E74C3C"/>
+                </a:solidFill>
+              </a:defRPr>
+            </a:pPr>
+            <a:r>
+              <a:t>Previous "weak signal" verdict must be REVISED</a:t>
             </a:r>
           </a:p>
         </p:txBody>
@@ -4396,30 +4507,30 @@
           </a:fontRef>
         </p:style>
         <p:txBody>
-          <a:bodyPr rtlCol="0" anchor="ctr" wrap="square" lIns="457200" tIns="137160"/>
+          <a:bodyPr rtlCol="0" anchor="ctr" wrap="square" lIns="457200" tIns="109728"/>
           <a:lstStyle/>
           <a:p>
             <a:pPr algn="l">
-              <a:defRPr sz="2800" b="1">
+              <a:defRPr sz="2600" b="1">
                 <a:solidFill>
                   <a:srgbClr val="FFFFFF"/>
                 </a:solidFill>
               </a:defRPr>
             </a:pPr>
             <a:r>
-              <a:t>Q4: Defect Type Analysis — Stand 14 &amp; Block Mill</a:t>
-            </a:r>
-          </a:p>
-          <a:p>
-            <a:pPr algn="l">
-              <a:defRPr sz="1600">
+              <a:t>Q4: Defect Type Breakdown — Stand 14 &amp; Block Mill</a:t>
+            </a:r>
+          </a:p>
+          <a:p>
+            <a:pPr>
+              <a:defRPr sz="1400">
                 <a:solidFill>
                   <a:srgbClr val="BDC3C7"/>
                 </a:solidFill>
               </a:defRPr>
             </a:pPr>
             <a:r>
-              <a:t>FB Slave Torque std significant across ALL defect types</a:t>
+              <a:t>FB Slave Torque std: significant across ALL defect types</a:t>
             </a:r>
           </a:p>
         </p:txBody>
@@ -4440,8 +4551,8 @@
         </p:blipFill>
         <p:spPr>
           <a:xfrm>
-            <a:off x="457200" y="1371600"/>
-            <a:ext cx="10972800" cy="6350085"/>
+            <a:off x="1419577" y="1280160"/>
+            <a:ext cx="9322365" cy="5394959"/>
           </a:xfrm>
           <a:prstGeom prst="rect">
             <a:avLst/>
@@ -4510,11 +4621,11 @@
           </a:fontRef>
         </p:style>
         <p:txBody>
-          <a:bodyPr rtlCol="0" anchor="ctr" wrap="square" lIns="457200" tIns="137160"/>
+          <a:bodyPr rtlCol="0" anchor="ctr" wrap="square" lIns="457200" tIns="109728"/>
           <a:lstStyle/>
           <a:p>
             <a:pPr algn="l">
-              <a:defRPr sz="2800" b="1">
+              <a:defRPr sz="2600" b="1">
                 <a:solidFill>
                   <a:srgbClr val="FFFFFF"/>
                 </a:solidFill>
@@ -4525,15 +4636,15 @@
             </a:r>
           </a:p>
           <a:p>
-            <a:pPr algn="l">
-              <a:defRPr sz="1600">
+            <a:pPr>
+              <a:defRPr sz="1400">
                 <a:solidFill>
                   <a:srgbClr val="BDC3C7"/>
                 </a:solidFill>
               </a:defRPr>
             </a:pPr>
             <a:r>
-              <a:t>Measurement-based provisional standards (Setpoint data not yet available)</a:t>
+              <a:t>Measurement-based (Setpoint data not yet available)</a:t>
             </a:r>
           </a:p>
         </p:txBody>
@@ -4548,7 +4659,7 @@
         </p:nvGraphicFramePr>
         <p:xfrm>
           <a:off x="274320" y="1371600"/>
-          <a:ext cx="10058400" cy="3840480"/>
+          <a:ext cx="9509760" cy="3474720"/>
         </p:xfrm>
         <a:graphic>
           <a:graphicData uri="http://schemas.openxmlformats.org/drawingml/2006/table">
@@ -4559,19 +4670,19 @@
               <a:tblGrid>
                 <a:gridCol w="2286000"/>
                 <a:gridCol w="731520"/>
-                <a:gridCol w="2286000"/>
-                <a:gridCol w="1371600"/>
+                <a:gridCol w="2011680"/>
+                <a:gridCol w="1097280"/>
                 <a:gridCol w="1097280"/>
                 <a:gridCol w="2286000"/>
               </a:tblGrid>
-              <a:tr h="548640">
+              <a:tr h="496388">
                 <a:tc>
                   <a:txBody>
                     <a:bodyPr/>
                     <a:lstStyle/>
                     <a:p>
                       <a:pPr algn="ctr">
-                        <a:defRPr sz="1100" b="1">
+                        <a:defRPr sz="1000" b="1">
                           <a:solidFill>
                             <a:srgbClr val="FFFFFF"/>
                           </a:solidFill>
@@ -4594,7 +4705,7 @@
                     <a:lstStyle/>
                     <a:p>
                       <a:pPr algn="ctr">
-                        <a:defRPr sz="1100" b="1">
+                        <a:defRPr sz="1000" b="1">
                           <a:solidFill>
                             <a:srgbClr val="FFFFFF"/>
                           </a:solidFill>
@@ -4617,14 +4728,26 @@
                     <a:lstStyle/>
                     <a:p>
                       <a:pPr algn="ctr">
-                        <a:defRPr sz="1100" b="1">
+                        <a:defRPr sz="1000" b="1">
                           <a:solidFill>
                             <a:srgbClr val="FFFFFF"/>
                           </a:solidFill>
                         </a:defRPr>
                       </a:pPr>
                       <a:r>
-                        <a:t>Normal (Q10~Q90)</a:t>
+                        <a:t>Normal</a:t>
+                      </a:r>
+                    </a:p>
+                    <a:p>
+                      <a:pPr algn="ctr">
+                        <a:defRPr sz="1000" b="1">
+                          <a:solidFill>
+                            <a:srgbClr val="FFFFFF"/>
+                          </a:solidFill>
+                        </a:defRPr>
+                      </a:pPr>
+                      <a:r>
+                        <a:t>(Q10~Q90)</a:t>
                       </a:r>
                     </a:p>
                   </a:txBody>
@@ -4640,14 +4763,26 @@
                     <a:lstStyle/>
                     <a:p>
                       <a:pPr algn="ctr">
-                        <a:defRPr sz="1100" b="1">
+                        <a:defRPr sz="1000" b="1">
                           <a:solidFill>
                             <a:srgbClr val="FFFFFF"/>
                           </a:solidFill>
                         </a:defRPr>
                       </a:pPr>
                       <a:r>
-                        <a:t>Defect Mean</a:t>
+                        <a:t>Defect</a:t>
+                      </a:r>
+                    </a:p>
+                    <a:p>
+                      <a:pPr algn="ctr">
+                        <a:defRPr sz="1000" b="1">
+                          <a:solidFill>
+                            <a:srgbClr val="FFFFFF"/>
+                          </a:solidFill>
+                        </a:defRPr>
+                      </a:pPr>
+                      <a:r>
+                        <a:t>Mean</a:t>
                       </a:r>
                     </a:p>
                   </a:txBody>
@@ -4663,7 +4798,7 @@
                     <a:lstStyle/>
                     <a:p>
                       <a:pPr algn="ctr">
-                        <a:defRPr sz="1100" b="1">
+                        <a:defRPr sz="1000" b="1">
                           <a:solidFill>
                             <a:srgbClr val="FFFFFF"/>
                           </a:solidFill>
@@ -4686,7 +4821,7 @@
                     <a:lstStyle/>
                     <a:p>
                       <a:pPr algn="ctr">
-                        <a:defRPr sz="1100" b="1">
+                        <a:defRPr sz="1000" b="1">
                           <a:solidFill>
                             <a:srgbClr val="FFFFFF"/>
                           </a:solidFill>
@@ -4704,14 +4839,14 @@
                   </a:tcPr>
                 </a:tc>
               </a:tr>
-              <a:tr h="548640">
-                <a:tc>
-                  <a:txBody>
-                    <a:bodyPr/>
-                    <a:lstStyle/>
-                    <a:p>
-                      <a:pPr>
-                        <a:defRPr sz="1100">
+              <a:tr h="496388">
+                <a:tc>
+                  <a:txBody>
+                    <a:bodyPr/>
+                    <a:lstStyle/>
+                    <a:p>
+                      <a:pPr>
+                        <a:defRPr sz="1000">
                           <a:solidFill>
                             <a:srgbClr val="34495E"/>
                           </a:solidFill>
@@ -4730,7 +4865,7 @@
                     <a:lstStyle/>
                     <a:p>
                       <a:pPr>
-                        <a:defRPr sz="1100">
+                        <a:defRPr sz="1000">
                           <a:solidFill>
                             <a:srgbClr val="34495E"/>
                           </a:solidFill>
@@ -4749,14 +4884,14 @@
                     <a:lstStyle/>
                     <a:p>
                       <a:pPr>
-                        <a:defRPr sz="1100">
-                          <a:solidFill>
-                            <a:srgbClr val="34495E"/>
-                          </a:solidFill>
-                        </a:defRPr>
-                      </a:pPr>
-                      <a:r>
-                        <a:t>701 ~ 2,680</a:t>
+                        <a:defRPr sz="1000">
+                          <a:solidFill>
+                            <a:srgbClr val="34495E"/>
+                          </a:solidFill>
+                        </a:defRPr>
+                      </a:pPr>
+                      <a:r>
+                        <a:t>701~2,680</a:t>
                       </a:r>
                     </a:p>
                   </a:txBody>
@@ -4768,7 +4903,7 @@
                     <a:lstStyle/>
                     <a:p>
                       <a:pPr>
-                        <a:defRPr sz="1100">
+                        <a:defRPr sz="1000">
                           <a:solidFill>
                             <a:srgbClr val="34495E"/>
                           </a:solidFill>
@@ -4787,7 +4922,7 @@
                     <a:lstStyle/>
                     <a:p>
                       <a:pPr>
-                        <a:defRPr sz="1100">
+                        <a:defRPr sz="1000">
                           <a:solidFill>
                             <a:srgbClr val="34495E"/>
                           </a:solidFill>
@@ -4806,7 +4941,7 @@
                     <a:lstStyle/>
                     <a:p>
                       <a:pPr>
-                        <a:defRPr sz="1100">
+                        <a:defRPr sz="1000">
                           <a:solidFill>
                             <a:srgbClr val="34495E"/>
                           </a:solidFill>
@@ -4820,14 +4955,14 @@
                   <a:tcPr/>
                 </a:tc>
               </a:tr>
-              <a:tr h="548640">
-                <a:tc>
-                  <a:txBody>
-                    <a:bodyPr/>
-                    <a:lstStyle/>
-                    <a:p>
-                      <a:pPr>
-                        <a:defRPr sz="1100">
+              <a:tr h="496388">
+                <a:tc>
+                  <a:txBody>
+                    <a:bodyPr/>
+                    <a:lstStyle/>
+                    <a:p>
+                      <a:pPr>
+                        <a:defRPr sz="1000">
                           <a:solidFill>
                             <a:srgbClr val="34495E"/>
                           </a:solidFill>
@@ -4850,7 +4985,7 @@
                     <a:lstStyle/>
                     <a:p>
                       <a:pPr>
-                        <a:defRPr sz="1100">
+                        <a:defRPr sz="1000">
                           <a:solidFill>
                             <a:srgbClr val="34495E"/>
                           </a:solidFill>
@@ -4873,14 +5008,14 @@
                     <a:lstStyle/>
                     <a:p>
                       <a:pPr>
-                        <a:defRPr sz="1100">
-                          <a:solidFill>
-                            <a:srgbClr val="34495E"/>
-                          </a:solidFill>
-                        </a:defRPr>
-                      </a:pPr>
-                      <a:r>
-                        <a:t>1,191 ~ 2,932</a:t>
+                        <a:defRPr sz="1000">
+                          <a:solidFill>
+                            <a:srgbClr val="34495E"/>
+                          </a:solidFill>
+                        </a:defRPr>
+                      </a:pPr>
+                      <a:r>
+                        <a:t>1,191~2,932</a:t>
                       </a:r>
                     </a:p>
                   </a:txBody>
@@ -4896,7 +5031,7 @@
                     <a:lstStyle/>
                     <a:p>
                       <a:pPr>
-                        <a:defRPr sz="1100">
+                        <a:defRPr sz="1000">
                           <a:solidFill>
                             <a:srgbClr val="34495E"/>
                           </a:solidFill>
@@ -4919,7 +5054,7 @@
                     <a:lstStyle/>
                     <a:p>
                       <a:pPr>
-                        <a:defRPr sz="1100">
+                        <a:defRPr sz="1000">
                           <a:solidFill>
                             <a:srgbClr val="34495E"/>
                           </a:solidFill>
@@ -4942,7 +5077,7 @@
                     <a:lstStyle/>
                     <a:p>
                       <a:pPr>
-                        <a:defRPr sz="1100">
+                        <a:defRPr sz="1000">
                           <a:solidFill>
                             <a:srgbClr val="34495E"/>
                           </a:solidFill>
@@ -4960,14 +5095,14 @@
                   </a:tcPr>
                 </a:tc>
               </a:tr>
-              <a:tr h="548640">
-                <a:tc>
-                  <a:txBody>
-                    <a:bodyPr/>
-                    <a:lstStyle/>
-                    <a:p>
-                      <a:pPr>
-                        <a:defRPr sz="1100">
+              <a:tr h="496388">
+                <a:tc>
+                  <a:txBody>
+                    <a:bodyPr/>
+                    <a:lstStyle/>
+                    <a:p>
+                      <a:pPr>
+                        <a:defRPr sz="1000">
                           <a:solidFill>
                             <a:srgbClr val="34495E"/>
                           </a:solidFill>
@@ -4986,7 +5121,7 @@
                     <a:lstStyle/>
                     <a:p>
                       <a:pPr>
-                        <a:defRPr sz="1100">
+                        <a:defRPr sz="1000">
                           <a:solidFill>
                             <a:srgbClr val="34495E"/>
                           </a:solidFill>
@@ -5005,14 +5140,14 @@
                     <a:lstStyle/>
                     <a:p>
                       <a:pPr>
-                        <a:defRPr sz="1100">
-                          <a:solidFill>
-                            <a:srgbClr val="34495E"/>
-                          </a:solidFill>
-                        </a:defRPr>
-                      </a:pPr>
-                      <a:r>
-                        <a:t>25 ~ 100</a:t>
+                        <a:defRPr sz="1000">
+                          <a:solidFill>
+                            <a:srgbClr val="34495E"/>
+                          </a:solidFill>
+                        </a:defRPr>
+                      </a:pPr>
+                      <a:r>
+                        <a:t>25~100</a:t>
                       </a:r>
                     </a:p>
                   </a:txBody>
@@ -5024,7 +5159,7 @@
                     <a:lstStyle/>
                     <a:p>
                       <a:pPr>
-                        <a:defRPr sz="1100">
+                        <a:defRPr sz="1000">
                           <a:solidFill>
                             <a:srgbClr val="34495E"/>
                           </a:solidFill>
@@ -5043,7 +5178,7 @@
                     <a:lstStyle/>
                     <a:p>
                       <a:pPr>
-                        <a:defRPr sz="1100">
+                        <a:defRPr sz="1000">
                           <a:solidFill>
                             <a:srgbClr val="34495E"/>
                           </a:solidFill>
@@ -5062,28 +5197,28 @@
                     <a:lstStyle/>
                     <a:p>
                       <a:pPr>
-                        <a:defRPr sz="1100">
-                          <a:solidFill>
-                            <a:srgbClr val="34495E"/>
-                          </a:solidFill>
-                        </a:defRPr>
-                      </a:pPr>
-                      <a:r>
-                        <a:t>Excessive torque</a:t>
+                        <a:defRPr sz="1000">
+                          <a:solidFill>
+                            <a:srgbClr val="34495E"/>
+                          </a:solidFill>
+                        </a:defRPr>
+                      </a:pPr>
+                      <a:r>
+                        <a:t>Excessive</a:t>
                       </a:r>
                     </a:p>
                   </a:txBody>
                   <a:tcPr/>
                 </a:tc>
               </a:tr>
-              <a:tr h="548640">
-                <a:tc>
-                  <a:txBody>
-                    <a:bodyPr/>
-                    <a:lstStyle/>
-                    <a:p>
-                      <a:pPr>
-                        <a:defRPr sz="1100">
+              <a:tr h="496388">
+                <a:tc>
+                  <a:txBody>
+                    <a:bodyPr/>
+                    <a:lstStyle/>
+                    <a:p>
+                      <a:pPr>
+                        <a:defRPr sz="1000">
                           <a:solidFill>
                             <a:srgbClr val="34495E"/>
                           </a:solidFill>
@@ -5106,7 +5241,7 @@
                     <a:lstStyle/>
                     <a:p>
                       <a:pPr>
-                        <a:defRPr sz="1100">
+                        <a:defRPr sz="1000">
                           <a:solidFill>
                             <a:srgbClr val="34495E"/>
                           </a:solidFill>
@@ -5129,14 +5264,14 @@
                     <a:lstStyle/>
                     <a:p>
                       <a:pPr>
-                        <a:defRPr sz="1100">
-                          <a:solidFill>
-                            <a:srgbClr val="34495E"/>
-                          </a:solidFill>
-                        </a:defRPr>
-                      </a:pPr>
-                      <a:r>
-                        <a:t>35 ~ 100</a:t>
+                        <a:defRPr sz="1000">
+                          <a:solidFill>
+                            <a:srgbClr val="34495E"/>
+                          </a:solidFill>
+                        </a:defRPr>
+                      </a:pPr>
+                      <a:r>
+                        <a:t>35~100</a:t>
                       </a:r>
                     </a:p>
                   </a:txBody>
@@ -5152,7 +5287,7 @@
                     <a:lstStyle/>
                     <a:p>
                       <a:pPr>
-                        <a:defRPr sz="1100">
+                        <a:defRPr sz="1000">
                           <a:solidFill>
                             <a:srgbClr val="34495E"/>
                           </a:solidFill>
@@ -5175,7 +5310,7 @@
                     <a:lstStyle/>
                     <a:p>
                       <a:pPr>
-                        <a:defRPr sz="1100">
+                        <a:defRPr sz="1000">
                           <a:solidFill>
                             <a:srgbClr val="34495E"/>
                           </a:solidFill>
@@ -5198,14 +5333,14 @@
                     <a:lstStyle/>
                     <a:p>
                       <a:pPr>
-                        <a:defRPr sz="1100">
-                          <a:solidFill>
-                            <a:srgbClr val="34495E"/>
-                          </a:solidFill>
-                        </a:defRPr>
-                      </a:pPr>
-                      <a:r>
-                        <a:t>High torque</a:t>
+                        <a:defRPr sz="1000">
+                          <a:solidFill>
+                            <a:srgbClr val="34495E"/>
+                          </a:solidFill>
+                        </a:defRPr>
+                      </a:pPr>
+                      <a:r>
+                        <a:t>High</a:t>
                       </a:r>
                     </a:p>
                   </a:txBody>
@@ -5216,14 +5351,14 @@
                   </a:tcPr>
                 </a:tc>
               </a:tr>
-              <a:tr h="548640">
-                <a:tc>
-                  <a:txBody>
-                    <a:bodyPr/>
-                    <a:lstStyle/>
-                    <a:p>
-                      <a:pPr>
-                        <a:defRPr sz="1100">
+              <a:tr h="496388">
+                <a:tc>
+                  <a:txBody>
+                    <a:bodyPr/>
+                    <a:lstStyle/>
+                    <a:p>
+                      <a:pPr>
+                        <a:defRPr sz="1000">
                           <a:solidFill>
                             <a:srgbClr val="34495E"/>
                           </a:solidFill>
@@ -5242,7 +5377,7 @@
                     <a:lstStyle/>
                     <a:p>
                       <a:pPr>
-                        <a:defRPr sz="1100">
+                        <a:defRPr sz="1000">
                           <a:solidFill>
                             <a:srgbClr val="34495E"/>
                           </a:solidFill>
@@ -5261,14 +5396,14 @@
                     <a:lstStyle/>
                     <a:p>
                       <a:pPr>
-                        <a:defRPr sz="1100">
-                          <a:solidFill>
-                            <a:srgbClr val="34495E"/>
-                          </a:solidFill>
-                        </a:defRPr>
-                      </a:pPr>
-                      <a:r>
-                        <a:t>2.7 ~ 45.5</a:t>
+                        <a:defRPr sz="1000">
+                          <a:solidFill>
+                            <a:srgbClr val="34495E"/>
+                          </a:solidFill>
+                        </a:defRPr>
+                      </a:pPr>
+                      <a:r>
+                        <a:t>2.7~45.5</a:t>
                       </a:r>
                     </a:p>
                   </a:txBody>
@@ -5280,7 +5415,7 @@
                     <a:lstStyle/>
                     <a:p>
                       <a:pPr>
-                        <a:defRPr sz="1100">
+                        <a:defRPr sz="1000">
                           <a:solidFill>
                             <a:srgbClr val="34495E"/>
                           </a:solidFill>
@@ -5299,7 +5434,7 @@
                     <a:lstStyle/>
                     <a:p>
                       <a:pPr>
-                        <a:defRPr sz="1100">
+                        <a:defRPr sz="1000">
                           <a:solidFill>
                             <a:srgbClr val="34495E"/>
                           </a:solidFill>
@@ -5318,28 +5453,28 @@
                     <a:lstStyle/>
                     <a:p>
                       <a:pPr>
-                        <a:defRPr sz="1100">
-                          <a:solidFill>
-                            <a:srgbClr val="34495E"/>
-                          </a:solidFill>
-                        </a:defRPr>
-                      </a:pPr>
-                      <a:r>
-                        <a:t>Torque deficit</a:t>
+                        <a:defRPr sz="1000">
+                          <a:solidFill>
+                            <a:srgbClr val="34495E"/>
+                          </a:solidFill>
+                        </a:defRPr>
+                      </a:pPr>
+                      <a:r>
+                        <a:t>Deficit</a:t>
                       </a:r>
                     </a:p>
                   </a:txBody>
                   <a:tcPr/>
                 </a:tc>
               </a:tr>
-              <a:tr h="548640">
-                <a:tc>
-                  <a:txBody>
-                    <a:bodyPr/>
-                    <a:lstStyle/>
-                    <a:p>
-                      <a:pPr>
-                        <a:defRPr sz="1100">
+              <a:tr h="496392">
+                <a:tc>
+                  <a:txBody>
+                    <a:bodyPr/>
+                    <a:lstStyle/>
+                    <a:p>
+                      <a:pPr>
+                        <a:defRPr sz="1000">
                           <a:solidFill>
                             <a:srgbClr val="34495E"/>
                           </a:solidFill>
@@ -5362,7 +5497,7 @@
                     <a:lstStyle/>
                     <a:p>
                       <a:pPr>
-                        <a:defRPr sz="1100">
+                        <a:defRPr sz="1000">
                           <a:solidFill>
                             <a:srgbClr val="34495E"/>
                           </a:solidFill>
@@ -5385,14 +5520,14 @@
                     <a:lstStyle/>
                     <a:p>
                       <a:pPr>
-                        <a:defRPr sz="1100">
-                          <a:solidFill>
-                            <a:srgbClr val="34495E"/>
-                          </a:solidFill>
-                        </a:defRPr>
-                      </a:pPr>
-                      <a:r>
-                        <a:t>1,052 ~ 1,156</a:t>
+                        <a:defRPr sz="1000">
+                          <a:solidFill>
+                            <a:srgbClr val="34495E"/>
+                          </a:solidFill>
+                        </a:defRPr>
+                      </a:pPr>
+                      <a:r>
+                        <a:t>1,052~1,156</a:t>
                       </a:r>
                     </a:p>
                   </a:txBody>
@@ -5408,7 +5543,7 @@
                     <a:lstStyle/>
                     <a:p>
                       <a:pPr>
-                        <a:defRPr sz="1100">
+                        <a:defRPr sz="1000">
                           <a:solidFill>
                             <a:srgbClr val="34495E"/>
                           </a:solidFill>
@@ -5431,7 +5566,7 @@
                     <a:lstStyle/>
                     <a:p>
                       <a:pPr>
-                        <a:defRPr sz="1100">
+                        <a:defRPr sz="1000">
                           <a:solidFill>
                             <a:srgbClr val="34495E"/>
                           </a:solidFill>
@@ -5454,14 +5589,14 @@
                     <a:lstStyle/>
                     <a:p>
                       <a:pPr>
-                        <a:defRPr sz="1100">
-                          <a:solidFill>
-                            <a:srgbClr val="34495E"/>
-                          </a:solidFill>
-                        </a:defRPr>
-                      </a:pPr>
-                      <a:r>
-                        <a:t>Low temp defect</a:t>
+                        <a:defRPr sz="1000">
+                          <a:solidFill>
+                            <a:srgbClr val="34495E"/>
+                          </a:solidFill>
+                        </a:defRPr>
+                      </a:pPr>
+                      <a:r>
+                        <a:t>Low temp</a:t>
                       </a:r>
                     </a:p>
                   </a:txBody>
@@ -5484,8 +5619,8 @@
         </p:nvSpPr>
         <p:spPr>
           <a:xfrm>
-            <a:off x="457200" y="5486400"/>
-            <a:ext cx="10972800" cy="1097280"/>
+            <a:off x="457200" y="5029200"/>
+            <a:ext cx="10972800" cy="1554480"/>
           </a:xfrm>
           <a:prstGeom prst="rect">
             <a:avLst/>
@@ -5515,7 +5650,7 @@
               </a:defRPr>
             </a:pPr>
             <a:r>
-              <a:t>Setpoint (SP) data needed from MES/Level 2 for Gap quantification</a:t>
+              <a:t>Setpoint (SP) data needed from MES/Level 2 for true Gap analysis</a:t>
             </a:r>
           </a:p>
           <a:p>
@@ -5527,7 +5662,19 @@
               </a:defRPr>
             </a:pPr>
             <a:r>
-              <a:t>Current: measurement-based (Alternative B) — normal coil Q10~Q90 as standard</a:t>
+              <a:t>Current: Alternative B — normal coil Q10~Q90 as provisional standard</a:t>
+            </a:r>
+          </a:p>
+          <a:p>
+            <a:pPr>
+              <a:defRPr sz="1200" b="0">
+                <a:solidFill>
+                  <a:srgbClr val="7F8C8D"/>
+                </a:solidFill>
+              </a:defRPr>
+            </a:pPr>
+            <a:r>
+              <a:t>Seasonal consideration: only winter (Jan-Feb) data — spring/summer comparison pending</a:t>
             </a:r>
           </a:p>
         </p:txBody>
@@ -5594,11 +5741,11 @@
           </a:fontRef>
         </p:style>
         <p:txBody>
-          <a:bodyPr rtlCol="0" anchor="ctr" wrap="square" lIns="457200" tIns="137160"/>
+          <a:bodyPr rtlCol="0" anchor="ctr" wrap="square" lIns="457200" tIns="109728"/>
           <a:lstStyle/>
           <a:p>
             <a:pPr algn="l">
-              <a:defRPr sz="2800" b="1">
+              <a:defRPr sz="2600" b="1">
                 <a:solidFill>
                   <a:srgbClr val="FFFFFF"/>
                 </a:solidFill>
@@ -5609,15 +5756,15 @@
             </a:r>
           </a:p>
           <a:p>
-            <a:pPr algn="l">
-              <a:defRPr sz="1600">
+            <a:pPr>
+              <a:defRPr sz="1400">
                 <a:solidFill>
                   <a:srgbClr val="BDC3C7"/>
                 </a:solidFill>
               </a:defRPr>
             </a:pPr>
             <a:r>
-              <a:t>Blue=Normal, Red=Defect, Green band=Q10~Q90 range</a:t>
+              <a:t>Blue=Normal, Red=Defect, Green band=Q10~Q90</a:t>
             </a:r>
           </a:p>
         </p:txBody>
@@ -5638,8 +5785,8 @@
         </p:blipFill>
         <p:spPr>
           <a:xfrm>
-            <a:off x="274320" y="1188720"/>
-            <a:ext cx="11430000" cy="9057977"/>
+            <a:off x="2676887" y="1280160"/>
+            <a:ext cx="6807744" cy="5394959"/>
           </a:xfrm>
           <a:prstGeom prst="rect">
             <a:avLst/>
@@ -5708,11 +5855,11 @@
           </a:fontRef>
         </p:style>
         <p:txBody>
-          <a:bodyPr rtlCol="0" anchor="ctr" wrap="square" lIns="457200" tIns="137160"/>
+          <a:bodyPr rtlCol="0" anchor="ctr" wrap="square" lIns="457200" tIns="109728"/>
           <a:lstStyle/>
           <a:p>
             <a:pPr algn="l">
-              <a:defRPr sz="2800" b="1">
+              <a:defRPr sz="2600" b="1">
                 <a:solidFill>
                   <a:srgbClr val="FFFFFF"/>
                 </a:solidFill>
@@ -5723,15 +5870,15 @@
             </a:r>
           </a:p>
           <a:p>
-            <a:pPr algn="l">
-              <a:defRPr sz="1600">
+            <a:pPr>
+              <a:defRPr sz="1400">
                 <a:solidFill>
                   <a:srgbClr val="BDC3C7"/>
                 </a:solidFill>
               </a:defRPr>
             </a:pPr>
             <a:r>
-              <a:t>Top-5 management targets based on analysis</a:t>
+              <a:t>Top-5 targets based on Reconciled Ranking</a:t>
             </a:r>
           </a:p>
         </p:txBody>
@@ -5746,7 +5893,7 @@
         </p:nvGraphicFramePr>
         <p:xfrm>
           <a:off x="274320" y="1371600"/>
-          <a:ext cx="10972800" cy="3200400"/>
+          <a:ext cx="10515600" cy="2926080"/>
         </p:xfrm>
         <a:graphic>
           <a:graphicData uri="http://schemas.openxmlformats.org/drawingml/2006/table">
@@ -5757,18 +5904,18 @@
               <a:tblGrid>
                 <a:gridCol w="914400"/>
                 <a:gridCol w="1828800"/>
-                <a:gridCol w="2743200"/>
+                <a:gridCol w="2286000"/>
                 <a:gridCol w="2286000"/>
                 <a:gridCol w="3200400"/>
               </a:tblGrid>
-              <a:tr h="533400">
+              <a:tr h="487680">
                 <a:tc>
                   <a:txBody>
                     <a:bodyPr/>
                     <a:lstStyle/>
                     <a:p>
                       <a:pPr algn="ctr">
-                        <a:defRPr sz="1100" b="1">
+                        <a:defRPr sz="1000" b="1">
                           <a:solidFill>
                             <a:srgbClr val="FFFFFF"/>
                           </a:solidFill>
@@ -5791,7 +5938,7 @@
                     <a:lstStyle/>
                     <a:p>
                       <a:pPr algn="ctr">
-                        <a:defRPr sz="1100" b="1">
+                        <a:defRPr sz="1000" b="1">
                           <a:solidFill>
                             <a:srgbClr val="FFFFFF"/>
                           </a:solidFill>
@@ -5814,7 +5961,7 @@
                     <a:lstStyle/>
                     <a:p>
                       <a:pPr algn="ctr">
-                        <a:defRPr sz="1100" b="1">
+                        <a:defRPr sz="1000" b="1">
                           <a:solidFill>
                             <a:srgbClr val="FFFFFF"/>
                           </a:solidFill>
@@ -5837,7 +5984,7 @@
                     <a:lstStyle/>
                     <a:p>
                       <a:pPr algn="ctr">
-                        <a:defRPr sz="1100" b="1">
+                        <a:defRPr sz="1000" b="1">
                           <a:solidFill>
                             <a:srgbClr val="FFFFFF"/>
                           </a:solidFill>
@@ -5860,7 +6007,7 @@
                     <a:lstStyle/>
                     <a:p>
                       <a:pPr algn="ctr">
-                        <a:defRPr sz="1100" b="1">
+                        <a:defRPr sz="1000" b="1">
                           <a:solidFill>
                             <a:srgbClr val="FFFFFF"/>
                           </a:solidFill>
@@ -5878,14 +6025,14 @@
                   </a:tcPr>
                 </a:tc>
               </a:tr>
-              <a:tr h="533400">
-                <a:tc>
-                  <a:txBody>
-                    <a:bodyPr/>
-                    <a:lstStyle/>
-                    <a:p>
-                      <a:pPr>
-                        <a:defRPr sz="1100">
+              <a:tr h="487680">
+                <a:tc>
+                  <a:txBody>
+                    <a:bodyPr/>
+                    <a:lstStyle/>
+                    <a:p>
+                      <a:pPr>
+                        <a:defRPr sz="1000">
                           <a:solidFill>
                             <a:srgbClr val="34495E"/>
                           </a:solidFill>
@@ -5904,7 +6051,7 @@
                     <a:lstStyle/>
                     <a:p>
                       <a:pPr>
-                        <a:defRPr sz="1100">
+                        <a:defRPr sz="1000">
                           <a:solidFill>
                             <a:srgbClr val="34495E"/>
                           </a:solidFill>
@@ -5923,7 +6070,7 @@
                     <a:lstStyle/>
                     <a:p>
                       <a:pPr>
-                        <a:defRPr sz="1100">
+                        <a:defRPr sz="1000">
                           <a:solidFill>
                             <a:srgbClr val="34495E"/>
                           </a:solidFill>
@@ -5942,7 +6089,7 @@
                     <a:lstStyle/>
                     <a:p>
                       <a:pPr>
-                        <a:defRPr sz="1100">
+                        <a:defRPr sz="1000">
                           <a:solidFill>
                             <a:srgbClr val="34495E"/>
                           </a:solidFill>
@@ -5961,7 +6108,7 @@
                     <a:lstStyle/>
                     <a:p>
                       <a:pPr>
-                        <a:defRPr sz="1100">
+                        <a:defRPr sz="1000">
                           <a:solidFill>
                             <a:srgbClr val="34495E"/>
                           </a:solidFill>
@@ -5975,14 +6122,14 @@
                   <a:tcPr/>
                 </a:tc>
               </a:tr>
-              <a:tr h="533400">
-                <a:tc>
-                  <a:txBody>
-                    <a:bodyPr/>
-                    <a:lstStyle/>
-                    <a:p>
-                      <a:pPr>
-                        <a:defRPr sz="1100">
+              <a:tr h="487680">
+                <a:tc>
+                  <a:txBody>
+                    <a:bodyPr/>
+                    <a:lstStyle/>
+                    <a:p>
+                      <a:pPr>
+                        <a:defRPr sz="1000">
                           <a:solidFill>
                             <a:srgbClr val="34495E"/>
                           </a:solidFill>
@@ -6005,7 +6152,7 @@
                     <a:lstStyle/>
                     <a:p>
                       <a:pPr>
-                        <a:defRPr sz="1100">
+                        <a:defRPr sz="1000">
                           <a:solidFill>
                             <a:srgbClr val="34495E"/>
                           </a:solidFill>
@@ -6028,7 +6175,7 @@
                     <a:lstStyle/>
                     <a:p>
                       <a:pPr>
-                        <a:defRPr sz="1100">
+                        <a:defRPr sz="1000">
                           <a:solidFill>
                             <a:srgbClr val="34495E"/>
                           </a:solidFill>
@@ -6051,7 +6198,7 @@
                     <a:lstStyle/>
                     <a:p>
                       <a:pPr>
-                        <a:defRPr sz="1100">
+                        <a:defRPr sz="1000">
                           <a:solidFill>
                             <a:srgbClr val="34495E"/>
                           </a:solidFill>
@@ -6074,7 +6221,7 @@
                     <a:lstStyle/>
                     <a:p>
                       <a:pPr>
-                        <a:defRPr sz="1100">
+                        <a:defRPr sz="1000">
                           <a:solidFill>
                             <a:srgbClr val="34495E"/>
                           </a:solidFill>
@@ -6092,14 +6239,14 @@
                   </a:tcPr>
                 </a:tc>
               </a:tr>
-              <a:tr h="533400">
-                <a:tc>
-                  <a:txBody>
-                    <a:bodyPr/>
-                    <a:lstStyle/>
-                    <a:p>
-                      <a:pPr>
-                        <a:defRPr sz="1100">
+              <a:tr h="487680">
+                <a:tc>
+                  <a:txBody>
+                    <a:bodyPr/>
+                    <a:lstStyle/>
+                    <a:p>
+                      <a:pPr>
+                        <a:defRPr sz="1000">
                           <a:solidFill>
                             <a:srgbClr val="34495E"/>
                           </a:solidFill>
@@ -6118,7 +6265,7 @@
                     <a:lstStyle/>
                     <a:p>
                       <a:pPr>
-                        <a:defRPr sz="1100">
+                        <a:defRPr sz="1000">
                           <a:solidFill>
                             <a:srgbClr val="34495E"/>
                           </a:solidFill>
@@ -6137,14 +6284,14 @@
                     <a:lstStyle/>
                     <a:p>
                       <a:pPr>
-                        <a:defRPr sz="1100">
-                          <a:solidFill>
-                            <a:srgbClr val="34495E"/>
-                          </a:solidFill>
-                        </a:defRPr>
-                      </a:pPr>
-                      <a:r>
-                        <a:t>WASTE_GAS_PRESSURE</a:t>
+                        <a:defRPr sz="1000">
+                          <a:solidFill>
+                            <a:srgbClr val="34495E"/>
+                          </a:solidFill>
+                        </a:defRPr>
+                      </a:pPr>
+                      <a:r>
+                        <a:t>WASTE_GAS_PRESS</a:t>
                       </a:r>
                     </a:p>
                   </a:txBody>
@@ -6156,7 +6303,7 @@
                     <a:lstStyle/>
                     <a:p>
                       <a:pPr>
-                        <a:defRPr sz="1100">
+                        <a:defRPr sz="1000">
                           <a:solidFill>
                             <a:srgbClr val="34495E"/>
                           </a:solidFill>
@@ -6175,7 +6322,7 @@
                     <a:lstStyle/>
                     <a:p>
                       <a:pPr>
-                        <a:defRPr sz="1100">
+                        <a:defRPr sz="1000">
                           <a:solidFill>
                             <a:srgbClr val="34495E"/>
                           </a:solidFill>
@@ -6189,14 +6336,14 @@
                   <a:tcPr/>
                 </a:tc>
               </a:tr>
-              <a:tr h="533400">
-                <a:tc>
-                  <a:txBody>
-                    <a:bodyPr/>
-                    <a:lstStyle/>
-                    <a:p>
-                      <a:pPr>
-                        <a:defRPr sz="1100">
+              <a:tr h="487680">
+                <a:tc>
+                  <a:txBody>
+                    <a:bodyPr/>
+                    <a:lstStyle/>
+                    <a:p>
+                      <a:pPr>
+                        <a:defRPr sz="1000">
                           <a:solidFill>
                             <a:srgbClr val="34495E"/>
                           </a:solidFill>
@@ -6219,7 +6366,7 @@
                     <a:lstStyle/>
                     <a:p>
                       <a:pPr>
-                        <a:defRPr sz="1100">
+                        <a:defRPr sz="1000">
                           <a:solidFill>
                             <a:srgbClr val="34495E"/>
                           </a:solidFill>
@@ -6242,7 +6389,7 @@
                     <a:lstStyle/>
                     <a:p>
                       <a:pPr>
-                        <a:defRPr sz="1100">
+                        <a:defRPr sz="1000">
                           <a:solidFill>
                             <a:srgbClr val="34495E"/>
                           </a:solidFill>
@@ -6265,7 +6412,7 @@
                     <a:lstStyle/>
                     <a:p>
                       <a:pPr>
-                        <a:defRPr sz="1100">
+                        <a:defRPr sz="1000">
                           <a:solidFill>
                             <a:srgbClr val="34495E"/>
                           </a:solidFill>
@@ -6288,7 +6435,7 @@
                     <a:lstStyle/>
                     <a:p>
                       <a:pPr>
-                        <a:defRPr sz="1100">
+                        <a:defRPr sz="1000">
                           <a:solidFill>
                             <a:srgbClr val="34495E"/>
                           </a:solidFill>
@@ -6306,14 +6453,14 @@
                   </a:tcPr>
                 </a:tc>
               </a:tr>
-              <a:tr h="533400">
-                <a:tc>
-                  <a:txBody>
-                    <a:bodyPr/>
-                    <a:lstStyle/>
-                    <a:p>
-                      <a:pPr>
-                        <a:defRPr sz="1100">
+              <a:tr h="487680">
+                <a:tc>
+                  <a:txBody>
+                    <a:bodyPr/>
+                    <a:lstStyle/>
+                    <a:p>
+                      <a:pPr>
+                        <a:defRPr sz="1000">
                           <a:solidFill>
                             <a:srgbClr val="34495E"/>
                           </a:solidFill>
@@ -6332,7 +6479,7 @@
                     <a:lstStyle/>
                     <a:p>
                       <a:pPr>
-                        <a:defRPr sz="1100">
+                        <a:defRPr sz="1000">
                           <a:solidFill>
                             <a:srgbClr val="34495E"/>
                           </a:solidFill>
@@ -6351,7 +6498,7 @@
                     <a:lstStyle/>
                     <a:p>
                       <a:pPr>
-                        <a:defRPr sz="1100">
+                        <a:defRPr sz="1000">
                           <a:solidFill>
                             <a:srgbClr val="34495E"/>
                           </a:solidFill>
@@ -6370,7 +6517,7 @@
                     <a:lstStyle/>
                     <a:p>
                       <a:pPr>
-                        <a:defRPr sz="1100">
+                        <a:defRPr sz="1000">
                           <a:solidFill>
                             <a:srgbClr val="34495E"/>
                           </a:solidFill>
@@ -6389,14 +6536,14 @@
                     <a:lstStyle/>
                     <a:p>
                       <a:pPr>
-                        <a:defRPr sz="1100">
-                          <a:solidFill>
-                            <a:srgbClr val="34495E"/>
-                          </a:solidFill>
-                        </a:defRPr>
-                      </a:pPr>
-                      <a:r>
-                        <a:t>Furnace propagation monitor</a:t>
+                        <a:defRPr sz="1000">
+                          <a:solidFill>
+                            <a:srgbClr val="34495E"/>
+                          </a:solidFill>
+                        </a:defRPr>
+                      </a:pPr>
+                      <a:r>
+                        <a:t>Furnace propagation</a:t>
                       </a:r>
                     </a:p>
                   </a:txBody>
@@ -6415,8 +6562,8 @@
         </p:nvSpPr>
         <p:spPr>
           <a:xfrm>
-            <a:off x="457200" y="4846320"/>
-            <a:ext cx="10972800" cy="1828800"/>
+            <a:off x="457200" y="4572000"/>
+            <a:ext cx="10972800" cy="2011680"/>
           </a:xfrm>
           <a:prstGeom prst="rect">
             <a:avLst/>
@@ -6430,7 +6577,7 @@
           <a:lstStyle/>
           <a:p>
             <a:pPr algn="l">
-              <a:defRPr sz="1300" b="0">
+              <a:defRPr sz="1200" b="0">
                 <a:solidFill>
                   <a:srgbClr val="34495E"/>
                 </a:solidFill>
@@ -6446,24 +6593,24 @@
               </a:defRPr>
             </a:pPr>
             <a:r>
-              <a:t>Items requiring field confirmation:</a:t>
+              <a:t>Field confirmation needed:</a:t>
             </a:r>
           </a:p>
           <a:p>
             <a:pPr lvl="1">
-              <a:defRPr sz="1300" b="0">
+              <a:defRPr sz="1200" b="0">
                 <a:solidFill>
                   <a:srgbClr val="34495E"/>
                 </a:solidFill>
               </a:defRPr>
             </a:pPr>
             <a:r>
-              <a:t>Specific adjustment methods (direction, amount) per equipment</a:t>
+              <a:t>Specific adjustment methods per equipment (direction, amount)</a:t>
             </a:r>
           </a:p>
           <a:p>
             <a:pPr lvl="1">
-              <a:defRPr sz="1300" b="0">
+              <a:defRPr sz="1200" b="0">
                 <a:solidFill>
                   <a:srgbClr val="34495E"/>
                 </a:solidFill>
@@ -6475,14 +6622,35 @@
           </a:p>
           <a:p>
             <a:pPr lvl="1">
-              <a:defRPr sz="1300" b="0">
+              <a:defRPr sz="1200" b="0">
                 <a:solidFill>
                   <a:srgbClr val="34495E"/>
                 </a:solidFill>
               </a:defRPr>
             </a:pPr>
             <a:r>
-              <a:t>Alert system integration method</a:t>
+              <a:t>Alert system integration</a:t>
+            </a:r>
+          </a:p>
+          <a:p>
+            <a:pPr>
+              <a:defRPr sz="800" b="0">
+                <a:solidFill>
+                  <a:srgbClr val="34495E"/>
+                </a:solidFill>
+              </a:defRPr>
+            </a:pPr>
+          </a:p>
+          <a:p>
+            <a:pPr>
+              <a:defRPr sz="1300" b="1">
+                <a:solidFill>
+                  <a:srgbClr val="27AE60"/>
+                </a:solidFill>
+              </a:defRPr>
+            </a:pPr>
+            <a:r>
+              <a:t>Data collection &amp; system design should also reflect these findings</a:t>
             </a:r>
           </a:p>
         </p:txBody>
@@ -6549,11 +6717,11 @@
           </a:fontRef>
         </p:style>
         <p:txBody>
-          <a:bodyPr rtlCol="0" anchor="ctr" wrap="square" lIns="457200" tIns="137160"/>
+          <a:bodyPr rtlCol="0" anchor="ctr" wrap="square" lIns="457200" tIns="109728"/>
           <a:lstStyle/>
           <a:p>
             <a:pPr algn="l">
-              <a:defRPr sz="2800" b="1">
+              <a:defRPr sz="2600" b="1">
                 <a:solidFill>
                   <a:srgbClr val="FFFFFF"/>
                 </a:solidFill>
@@ -6564,8 +6732,8 @@
             </a:r>
           </a:p>
           <a:p>
-            <a:pPr algn="l">
-              <a:defRPr sz="1600">
+            <a:pPr>
+              <a:defRPr sz="1400">
                 <a:solidFill>
                   <a:srgbClr val="BDC3C7"/>
                 </a:solidFill>
@@ -6587,7 +6755,7 @@
         </p:nvGraphicFramePr>
         <p:xfrm>
           <a:off x="274320" y="1371600"/>
-          <a:ext cx="9509760" cy="4114800"/>
+          <a:ext cx="6858000" cy="3200400"/>
         </p:xfrm>
         <a:graphic>
           <a:graphicData uri="http://schemas.openxmlformats.org/drawingml/2006/table">
@@ -6597,19 +6765,19 @@
               </a:tblPr>
               <a:tblGrid>
                 <a:gridCol w="457200"/>
-                <a:gridCol w="3200400"/>
-                <a:gridCol w="1097280"/>
-                <a:gridCol w="1097280"/>
-                <a:gridCol w="3657600"/>
+                <a:gridCol w="2286000"/>
+                <a:gridCol w="914400"/>
+                <a:gridCol w="914400"/>
+                <a:gridCol w="2286000"/>
               </a:tblGrid>
-              <a:tr h="685800">
+              <a:tr h="533400">
                 <a:tc>
                   <a:txBody>
                     <a:bodyPr/>
                     <a:lstStyle/>
                     <a:p>
                       <a:pPr algn="ctr">
-                        <a:defRPr sz="1100" b="1">
+                        <a:defRPr sz="1000" b="1">
                           <a:solidFill>
                             <a:srgbClr val="FFFFFF"/>
                           </a:solidFill>
@@ -6632,7 +6800,7 @@
                     <a:lstStyle/>
                     <a:p>
                       <a:pPr algn="ctr">
-                        <a:defRPr sz="1100" b="1">
+                        <a:defRPr sz="1000" b="1">
                           <a:solidFill>
                             <a:srgbClr val="FFFFFF"/>
                           </a:solidFill>
@@ -6655,7 +6823,7 @@
                     <a:lstStyle/>
                     <a:p>
                       <a:pPr algn="ctr">
-                        <a:defRPr sz="1100" b="1">
+                        <a:defRPr sz="1000" b="1">
                           <a:solidFill>
                             <a:srgbClr val="FFFFFF"/>
                           </a:solidFill>
@@ -6678,7 +6846,7 @@
                     <a:lstStyle/>
                     <a:p>
                       <a:pPr algn="ctr">
-                        <a:defRPr sz="1100" b="1">
+                        <a:defRPr sz="1000" b="1">
                           <a:solidFill>
                             <a:srgbClr val="FFFFFF"/>
                           </a:solidFill>
@@ -6701,7 +6869,7 @@
                     <a:lstStyle/>
                     <a:p>
                       <a:pPr algn="ctr">
-                        <a:defRPr sz="1100" b="1">
+                        <a:defRPr sz="1000" b="1">
                           <a:solidFill>
                             <a:srgbClr val="FFFFFF"/>
                           </a:solidFill>
@@ -6719,14 +6887,14 @@
                   </a:tcPr>
                 </a:tc>
               </a:tr>
-              <a:tr h="685800">
-                <a:tc>
-                  <a:txBody>
-                    <a:bodyPr/>
-                    <a:lstStyle/>
-                    <a:p>
-                      <a:pPr>
-                        <a:defRPr sz="1100">
+              <a:tr h="533400">
+                <a:tc>
+                  <a:txBody>
+                    <a:bodyPr/>
+                    <a:lstStyle/>
+                    <a:p>
+                      <a:pPr>
+                        <a:defRPr sz="1000">
                           <a:solidFill>
                             <a:srgbClr val="34495E"/>
                           </a:solidFill>
@@ -6745,14 +6913,26 @@
                     <a:lstStyle/>
                     <a:p>
                       <a:pPr>
-                        <a:defRPr sz="1100">
-                          <a:solidFill>
-                            <a:srgbClr val="34495E"/>
-                          </a:solidFill>
-                        </a:defRPr>
-                      </a:pPr>
-                      <a:r>
-                        <a:t>OPERATION_STATUS not in CSV</a:t>
+                        <a:defRPr sz="1000">
+                          <a:solidFill>
+                            <a:srgbClr val="34495E"/>
+                          </a:solidFill>
+                        </a:defRPr>
+                      </a:pPr>
+                      <a:r>
+                        <a:t>OPERATION_STATUS</a:t>
+                      </a:r>
+                    </a:p>
+                    <a:p>
+                      <a:pPr>
+                        <a:defRPr sz="1000">
+                          <a:solidFill>
+                            <a:srgbClr val="34495E"/>
+                          </a:solidFill>
+                        </a:defRPr>
+                      </a:pPr>
+                      <a:r>
+                        <a:t>not in CSV</a:t>
                       </a:r>
                     </a:p>
                   </a:txBody>
@@ -6764,7 +6944,7 @@
                     <a:lstStyle/>
                     <a:p>
                       <a:pPr>
-                        <a:defRPr sz="1100">
+                        <a:defRPr sz="1000">
                           <a:solidFill>
                             <a:srgbClr val="34495E"/>
                           </a:solidFill>
@@ -6783,7 +6963,7 @@
                     <a:lstStyle/>
                     <a:p>
                       <a:pPr>
-                        <a:defRPr sz="1100">
+                        <a:defRPr sz="1000">
                           <a:solidFill>
                             <a:srgbClr val="34495E"/>
                           </a:solidFill>
@@ -6802,28 +6982,40 @@
                     <a:lstStyle/>
                     <a:p>
                       <a:pPr>
-                        <a:defRPr sz="1100">
-                          <a:solidFill>
-                            <a:srgbClr val="34495E"/>
-                          </a:solidFill>
-                        </a:defRPr>
-                      </a:pPr>
-                      <a:r>
-                        <a:t>Preprocessing script</a:t>
+                        <a:defRPr sz="1000">
+                          <a:solidFill>
+                            <a:srgbClr val="34495E"/>
+                          </a:solidFill>
+                        </a:defRPr>
+                      </a:pPr>
+                      <a:r>
+                        <a:t>Preprocessing</a:t>
+                      </a:r>
+                    </a:p>
+                    <a:p>
+                      <a:pPr>
+                        <a:defRPr sz="1000">
+                          <a:solidFill>
+                            <a:srgbClr val="34495E"/>
+                          </a:solidFill>
+                        </a:defRPr>
+                      </a:pPr>
+                      <a:r>
+                        <a:t>script</a:t>
                       </a:r>
                     </a:p>
                   </a:txBody>
                   <a:tcPr/>
                 </a:tc>
               </a:tr>
-              <a:tr h="685800">
-                <a:tc>
-                  <a:txBody>
-                    <a:bodyPr/>
-                    <a:lstStyle/>
-                    <a:p>
-                      <a:pPr>
-                        <a:defRPr sz="1100">
+              <a:tr h="533400">
+                <a:tc>
+                  <a:txBody>
+                    <a:bodyPr/>
+                    <a:lstStyle/>
+                    <a:p>
+                      <a:pPr>
+                        <a:defRPr sz="1000">
                           <a:solidFill>
                             <a:srgbClr val="34495E"/>
                           </a:solidFill>
@@ -6846,14 +7038,26 @@
                     <a:lstStyle/>
                     <a:p>
                       <a:pPr>
-                        <a:defRPr sz="1100">
-                          <a:solidFill>
-                            <a:srgbClr val="34495E"/>
-                          </a:solidFill>
-                        </a:defRPr>
-                      </a:pPr>
-                      <a:r>
-                        <a:t>Furnace Setpoint data missing</a:t>
+                        <a:defRPr sz="1000">
+                          <a:solidFill>
+                            <a:srgbClr val="34495E"/>
+                          </a:solidFill>
+                        </a:defRPr>
+                      </a:pPr>
+                      <a:r>
+                        <a:t>Furnace Setpoint</a:t>
+                      </a:r>
+                    </a:p>
+                    <a:p>
+                      <a:pPr>
+                        <a:defRPr sz="1000">
+                          <a:solidFill>
+                            <a:srgbClr val="34495E"/>
+                          </a:solidFill>
+                        </a:defRPr>
+                      </a:pPr>
+                      <a:r>
+                        <a:t>data missing</a:t>
                       </a:r>
                     </a:p>
                   </a:txBody>
@@ -6869,7 +7073,7 @@
                     <a:lstStyle/>
                     <a:p>
                       <a:pPr>
-                        <a:defRPr sz="1100">
+                        <a:defRPr sz="1000">
                           <a:solidFill>
                             <a:srgbClr val="34495E"/>
                           </a:solidFill>
@@ -6892,7 +7096,7 @@
                     <a:lstStyle/>
                     <a:p>
                       <a:pPr>
-                        <a:defRPr sz="1100">
+                        <a:defRPr sz="1000">
                           <a:solidFill>
                             <a:srgbClr val="34495E"/>
                           </a:solidFill>
@@ -6915,14 +7119,26 @@
                     <a:lstStyle/>
                     <a:p>
                       <a:pPr>
-                        <a:defRPr sz="1100">
-                          <a:solidFill>
-                            <a:srgbClr val="34495E"/>
-                          </a:solidFill>
-                        </a:defRPr>
-                      </a:pPr>
-                      <a:r>
-                        <a:t>MES/Level 2 CSV export</a:t>
+                        <a:defRPr sz="1000">
+                          <a:solidFill>
+                            <a:srgbClr val="34495E"/>
+                          </a:solidFill>
+                        </a:defRPr>
+                      </a:pPr>
+                      <a:r>
+                        <a:t>MES/Level 2</a:t>
+                      </a:r>
+                    </a:p>
+                    <a:p>
+                      <a:pPr>
+                        <a:defRPr sz="1000">
+                          <a:solidFill>
+                            <a:srgbClr val="34495E"/>
+                          </a:solidFill>
+                        </a:defRPr>
+                      </a:pPr>
+                      <a:r>
+                        <a:t>CSV export</a:t>
                       </a:r>
                     </a:p>
                   </a:txBody>
@@ -6933,14 +7149,14 @@
                   </a:tcPr>
                 </a:tc>
               </a:tr>
-              <a:tr h="685800">
-                <a:tc>
-                  <a:txBody>
-                    <a:bodyPr/>
-                    <a:lstStyle/>
-                    <a:p>
-                      <a:pPr>
-                        <a:defRPr sz="1100">
+              <a:tr h="533400">
+                <a:tc>
+                  <a:txBody>
+                    <a:bodyPr/>
+                    <a:lstStyle/>
+                    <a:p>
+                      <a:pPr>
+                        <a:defRPr sz="1000">
                           <a:solidFill>
                             <a:srgbClr val="34495E"/>
                           </a:solidFill>
@@ -6959,26 +7175,26 @@
                     <a:lstStyle/>
                     <a:p>
                       <a:pPr>
-                        <a:defRPr sz="1100">
-                          <a:solidFill>
-                            <a:srgbClr val="34495E"/>
-                          </a:solidFill>
-                        </a:defRPr>
-                      </a:pPr>
-                      <a:r>
-                        <a:t>315 analysis: 75 days missing</a:t>
-                      </a:r>
-                    </a:p>
-                    <a:p>
-                      <a:pPr>
-                        <a:defRPr sz="1100">
-                          <a:solidFill>
-                            <a:srgbClr val="34495E"/>
-                          </a:solidFill>
-                        </a:defRPr>
-                      </a:pPr>
-                      <a:r>
-                        <a:t>(Mar-May 2025)</a:t>
+                        <a:defRPr sz="1000">
+                          <a:solidFill>
+                            <a:srgbClr val="34495E"/>
+                          </a:solidFill>
+                        </a:defRPr>
+                      </a:pPr>
+                      <a:r>
+                        <a:t>315 analysis:</a:t>
+                      </a:r>
+                    </a:p>
+                    <a:p>
+                      <a:pPr>
+                        <a:defRPr sz="1000">
+                          <a:solidFill>
+                            <a:srgbClr val="34495E"/>
+                          </a:solidFill>
+                        </a:defRPr>
+                      </a:pPr>
+                      <a:r>
+                        <a:t>75 days missing</a:t>
                       </a:r>
                     </a:p>
                   </a:txBody>
@@ -6990,7 +7206,7 @@
                     <a:lstStyle/>
                     <a:p>
                       <a:pPr>
-                        <a:defRPr sz="1100">
+                        <a:defRPr sz="1000">
                           <a:solidFill>
                             <a:srgbClr val="34495E"/>
                           </a:solidFill>
@@ -7009,7 +7225,7 @@
                     <a:lstStyle/>
                     <a:p>
                       <a:pPr>
-                        <a:defRPr sz="1100">
+                        <a:defRPr sz="1000">
                           <a:solidFill>
                             <a:srgbClr val="34495E"/>
                           </a:solidFill>
@@ -7028,28 +7244,40 @@
                     <a:lstStyle/>
                     <a:p>
                       <a:pPr>
-                        <a:defRPr sz="1100">
-                          <a:solidFill>
-                            <a:srgbClr val="34495E"/>
-                          </a:solidFill>
-                        </a:defRPr>
-                      </a:pPr>
-                      <a:r>
-                        <a:t>Raw data request</a:t>
+                        <a:defRPr sz="1000">
+                          <a:solidFill>
+                            <a:srgbClr val="34495E"/>
+                          </a:solidFill>
+                        </a:defRPr>
+                      </a:pPr>
+                      <a:r>
+                        <a:t>Raw data</a:t>
+                      </a:r>
+                    </a:p>
+                    <a:p>
+                      <a:pPr>
+                        <a:defRPr sz="1000">
+                          <a:solidFill>
+                            <a:srgbClr val="34495E"/>
+                          </a:solidFill>
+                        </a:defRPr>
+                      </a:pPr>
+                      <a:r>
+                        <a:t>request</a:t>
                       </a:r>
                     </a:p>
                   </a:txBody>
                   <a:tcPr/>
                 </a:tc>
               </a:tr>
-              <a:tr h="685800">
-                <a:tc>
-                  <a:txBody>
-                    <a:bodyPr/>
-                    <a:lstStyle/>
-                    <a:p>
-                      <a:pPr>
-                        <a:defRPr sz="1100">
+              <a:tr h="533400">
+                <a:tc>
+                  <a:txBody>
+                    <a:bodyPr/>
+                    <a:lstStyle/>
+                    <a:p>
+                      <a:pPr>
+                        <a:defRPr sz="1000">
                           <a:solidFill>
                             <a:srgbClr val="34495E"/>
                           </a:solidFill>
@@ -7072,14 +7300,26 @@
                     <a:lstStyle/>
                     <a:p>
                       <a:pPr>
-                        <a:defRPr sz="1100">
-                          <a:solidFill>
-                            <a:srgbClr val="34495E"/>
-                          </a:solidFill>
-                        </a:defRPr>
-                      </a:pPr>
-                      <a:r>
-                        <a:t>B5 grade: only 2 defects</a:t>
+                        <a:defRPr sz="1000">
+                          <a:solidFill>
+                            <a:srgbClr val="34495E"/>
+                          </a:solidFill>
+                        </a:defRPr>
+                      </a:pPr>
+                      <a:r>
+                        <a:t>B5 grade:</a:t>
+                      </a:r>
+                    </a:p>
+                    <a:p>
+                      <a:pPr>
+                        <a:defRPr sz="1000">
+                          <a:solidFill>
+                            <a:srgbClr val="34495E"/>
+                          </a:solidFill>
+                        </a:defRPr>
+                      </a:pPr>
+                      <a:r>
+                        <a:t>only 2 defects</a:t>
                       </a:r>
                     </a:p>
                   </a:txBody>
@@ -7095,7 +7335,7 @@
                     <a:lstStyle/>
                     <a:p>
                       <a:pPr>
-                        <a:defRPr sz="1100">
+                        <a:defRPr sz="1000">
                           <a:solidFill>
                             <a:srgbClr val="34495E"/>
                           </a:solidFill>
@@ -7118,7 +7358,7 @@
                     <a:lstStyle/>
                     <a:p>
                       <a:pPr>
-                        <a:defRPr sz="1100">
+                        <a:defRPr sz="1000">
                           <a:solidFill>
                             <a:srgbClr val="34495E"/>
                           </a:solidFill>
@@ -7141,14 +7381,26 @@
                     <a:lstStyle/>
                     <a:p>
                       <a:pPr>
-                        <a:defRPr sz="1100">
-                          <a:solidFill>
-                            <a:srgbClr val="34495E"/>
-                          </a:solidFill>
-                        </a:defRPr>
-                      </a:pPr>
-                      <a:r>
-                        <a:t>Exclude + accumulate 3-6mo</a:t>
+                        <a:defRPr sz="1000">
+                          <a:solidFill>
+                            <a:srgbClr val="34495E"/>
+                          </a:solidFill>
+                        </a:defRPr>
+                      </a:pPr>
+                      <a:r>
+                        <a:t>Exclude +</a:t>
+                      </a:r>
+                    </a:p>
+                    <a:p>
+                      <a:pPr>
+                        <a:defRPr sz="1000">
+                          <a:solidFill>
+                            <a:srgbClr val="34495E"/>
+                          </a:solidFill>
+                        </a:defRPr>
+                      </a:pPr>
+                      <a:r>
+                        <a:t>3-6mo accumulate</a:t>
                       </a:r>
                     </a:p>
                   </a:txBody>
@@ -7159,14 +7411,14 @@
                   </a:tcPr>
                 </a:tc>
               </a:tr>
-              <a:tr h="685800">
-                <a:tc>
-                  <a:txBody>
-                    <a:bodyPr/>
-                    <a:lstStyle/>
-                    <a:p>
-                      <a:pPr>
-                        <a:defRPr sz="1100">
+              <a:tr h="533400">
+                <a:tc>
+                  <a:txBody>
+                    <a:bodyPr/>
+                    <a:lstStyle/>
+                    <a:p>
+                      <a:pPr>
+                        <a:defRPr sz="1000">
                           <a:solidFill>
                             <a:srgbClr val="34495E"/>
                           </a:solidFill>
@@ -7185,14 +7437,26 @@
                     <a:lstStyle/>
                     <a:p>
                       <a:pPr>
-                        <a:defRPr sz="1100">
-                          <a:solidFill>
-                            <a:srgbClr val="34495E"/>
-                          </a:solidFill>
-                        </a:defRPr>
-                      </a:pPr>
-                      <a:r>
-                        <a:t>Daily aggregation lag=0</a:t>
+                        <a:defRPr sz="1000">
+                          <a:solidFill>
+                            <a:srgbClr val="34495E"/>
+                          </a:solidFill>
+                        </a:defRPr>
+                      </a:pPr>
+                      <a:r>
+                        <a:t>Daily lag=0</a:t>
+                      </a:r>
+                    </a:p>
+                    <a:p>
+                      <a:pPr>
+                        <a:defRPr sz="1000">
+                          <a:solidFill>
+                            <a:srgbClr val="34495E"/>
+                          </a:solidFill>
+                        </a:defRPr>
+                      </a:pPr>
+                      <a:r>
+                        <a:t>limitation</a:t>
                       </a:r>
                     </a:p>
                   </a:txBody>
@@ -7204,7 +7468,7 @@
                     <a:lstStyle/>
                     <a:p>
                       <a:pPr>
-                        <a:defRPr sz="1100">
+                        <a:defRPr sz="1000">
                           <a:solidFill>
                             <a:srgbClr val="34495E"/>
                           </a:solidFill>
@@ -7223,7 +7487,7 @@
                     <a:lstStyle/>
                     <a:p>
                       <a:pPr>
-                        <a:defRPr sz="1100">
+                        <a:defRPr sz="1000">
                           <a:solidFill>
                             <a:srgbClr val="34495E"/>
                           </a:solidFill>
@@ -7242,26 +7506,26 @@
                     <a:lstStyle/>
                     <a:p>
                       <a:pPr>
-                        <a:defRPr sz="1100">
-                          <a:solidFill>
-                            <a:srgbClr val="34495E"/>
-                          </a:solidFill>
-                        </a:defRPr>
-                      </a:pPr>
-                      <a:r>
-                        <a:t>1-min interval CCF</a:t>
-                      </a:r>
-                    </a:p>
-                    <a:p>
-                      <a:pPr>
-                        <a:defRPr sz="1100">
-                          <a:solidFill>
-                            <a:srgbClr val="34495E"/>
-                          </a:solidFill>
-                        </a:defRPr>
-                      </a:pPr>
-                      <a:r>
-                        <a:t>(after #1 resolved)</a:t>
+                        <a:defRPr sz="1000">
+                          <a:solidFill>
+                            <a:srgbClr val="34495E"/>
+                          </a:solidFill>
+                        </a:defRPr>
+                      </a:pPr>
+                      <a:r>
+                        <a:t>1-min CCF</a:t>
+                      </a:r>
+                    </a:p>
+                    <a:p>
+                      <a:pPr>
+                        <a:defRPr sz="1000">
+                          <a:solidFill>
+                            <a:srgbClr val="34495E"/>
+                          </a:solidFill>
+                        </a:defRPr>
+                      </a:pPr>
+                      <a:r>
+                        <a:t>(after #1)</a:t>
                       </a:r>
                     </a:p>
                   </a:txBody>
@@ -7288,8 +7552,8 @@
         </p:blipFill>
         <p:spPr>
           <a:xfrm>
-            <a:off x="457200" y="5486400"/>
-            <a:ext cx="5486400" cy="1097280"/>
+            <a:off x="274320" y="4754880"/>
+            <a:ext cx="5669280" cy="1585223"/>
           </a:xfrm>
           <a:prstGeom prst="rect">
             <a:avLst/>
@@ -7312,8 +7576,8 @@
         </p:blipFill>
         <p:spPr>
           <a:xfrm>
-            <a:off x="6217920" y="5486400"/>
-            <a:ext cx="5486400" cy="1097280"/>
+            <a:off x="6881120" y="4754880"/>
+            <a:ext cx="4342879" cy="1828800"/>
           </a:xfrm>
           <a:prstGeom prst="rect">
             <a:avLst/>
@@ -7355,7 +7619,7 @@
         <p:spPr>
           <a:xfrm>
             <a:off x="914400" y="1828800"/>
-            <a:ext cx="10058400" cy="1371600"/>
+            <a:ext cx="10058400" cy="1097280"/>
           </a:xfrm>
           <a:prstGeom prst="rect">
             <a:avLst/>
@@ -7389,8 +7653,8 @@
         </p:nvSpPr>
         <p:spPr>
           <a:xfrm>
-            <a:off x="914400" y="3474720"/>
-            <a:ext cx="10058400" cy="914400"/>
+            <a:off x="914400" y="3200400"/>
+            <a:ext cx="10058400" cy="731520"/>
           </a:xfrm>
           <a:prstGeom prst="rect">
             <a:avLst/>
@@ -7424,8 +7688,8 @@
         </p:nvSpPr>
         <p:spPr>
           <a:xfrm>
-            <a:off x="914400" y="4572000"/>
-            <a:ext cx="10058400" cy="914400"/>
+            <a:off x="914400" y="4389120"/>
+            <a:ext cx="10058400" cy="548640"/>
           </a:xfrm>
           <a:prstGeom prst="rect">
             <a:avLst/>
@@ -7446,7 +7710,7 @@
               </a:defRPr>
             </a:pPr>
             <a:r>
-              <a:t>2026.03.31 | For further inquiries, please contact via phone</a:t>
+              <a:t>2026.03.31</a:t>
             </a:r>
           </a:p>
         </p:txBody>
@@ -7513,11 +7777,11 @@
           </a:fontRef>
         </p:style>
         <p:txBody>
-          <a:bodyPr rtlCol="0" anchor="ctr" wrap="square" lIns="457200" tIns="137160"/>
+          <a:bodyPr rtlCol="0" anchor="ctr" wrap="square" lIns="457200" tIns="109728"/>
           <a:lstStyle/>
           <a:p>
             <a:pPr algn="l">
-              <a:defRPr sz="2800" b="1">
+              <a:defRPr sz="2600" b="1">
                 <a:solidFill>
                   <a:srgbClr val="FFFFFF"/>
                 </a:solidFill>
@@ -7528,15 +7792,15 @@
             </a:r>
           </a:p>
           <a:p>
-            <a:pPr algn="l">
-              <a:defRPr sz="1600">
+            <a:pPr>
+              <a:defRPr sz="1400">
                 <a:solidFill>
                   <a:srgbClr val="BDC3C7"/>
                 </a:solidFill>
               </a:defRPr>
             </a:pPr>
             <a:r>
-              <a:t>Key Findings at a Glance</a:t>
+              <a:t>Key Findings — Direct Answers to Customer Questions</a:t>
             </a:r>
           </a:p>
         </p:txBody>
@@ -7551,7 +7815,7 @@
         </p:nvGraphicFramePr>
         <p:xfrm>
           <a:off x="274320" y="1371600"/>
-          <a:ext cx="10058400" cy="5029200"/>
+          <a:ext cx="9052560" cy="4754880"/>
         </p:xfrm>
         <a:graphic>
           <a:graphicData uri="http://schemas.openxmlformats.org/drawingml/2006/table">
@@ -7561,18 +7825,18 @@
               </a:tblPr>
               <a:tblGrid>
                 <a:gridCol w="457200"/>
-                <a:gridCol w="3200400"/>
-                <a:gridCol w="3200400"/>
-                <a:gridCol w="3200400"/>
+                <a:gridCol w="2743200"/>
+                <a:gridCol w="2926080"/>
+                <a:gridCol w="2926080"/>
               </a:tblGrid>
-              <a:tr h="838200">
+              <a:tr h="792480">
                 <a:tc>
                   <a:txBody>
                     <a:bodyPr/>
                     <a:lstStyle/>
                     <a:p>
                       <a:pPr algn="ctr">
-                        <a:defRPr sz="1100" b="1">
+                        <a:defRPr sz="1000" b="1">
                           <a:solidFill>
                             <a:srgbClr val="FFFFFF"/>
                           </a:solidFill>
@@ -7595,7 +7859,7 @@
                     <a:lstStyle/>
                     <a:p>
                       <a:pPr algn="ctr">
-                        <a:defRPr sz="1100" b="1">
+                        <a:defRPr sz="1000" b="1">
                           <a:solidFill>
                             <a:srgbClr val="FFFFFF"/>
                           </a:solidFill>
@@ -7618,7 +7882,7 @@
                     <a:lstStyle/>
                     <a:p>
                       <a:pPr algn="ctr">
-                        <a:defRPr sz="1100" b="1">
+                        <a:defRPr sz="1000" b="1">
                           <a:solidFill>
                             <a:srgbClr val="FFFFFF"/>
                           </a:solidFill>
@@ -7641,7 +7905,7 @@
                     <a:lstStyle/>
                     <a:p>
                       <a:pPr algn="ctr">
-                        <a:defRPr sz="1100" b="1">
+                        <a:defRPr sz="1000" b="1">
                           <a:solidFill>
                             <a:srgbClr val="FFFFFF"/>
                           </a:solidFill>
@@ -7659,14 +7923,14 @@
                   </a:tcPr>
                 </a:tc>
               </a:tr>
-              <a:tr h="838200">
-                <a:tc>
-                  <a:txBody>
-                    <a:bodyPr/>
-                    <a:lstStyle/>
-                    <a:p>
-                      <a:pPr>
-                        <a:defRPr sz="1100">
+              <a:tr h="792480">
+                <a:tc>
+                  <a:txBody>
+                    <a:bodyPr/>
+                    <a:lstStyle/>
+                    <a:p>
+                      <a:pPr>
+                        <a:defRPr sz="1000">
                           <a:solidFill>
                             <a:srgbClr val="34495E"/>
                           </a:solidFill>
@@ -7685,26 +7949,26 @@
                     <a:lstStyle/>
                     <a:p>
                       <a:pPr>
-                        <a:defRPr sz="1100">
-                          <a:solidFill>
-                            <a:srgbClr val="34495E"/>
-                          </a:solidFill>
-                        </a:defRPr>
-                      </a:pPr>
-                      <a:r>
-                        <a:t>Variability causes defect</a:t>
-                      </a:r>
-                    </a:p>
-                    <a:p>
-                      <a:pPr>
-                        <a:defRPr sz="1100">
-                          <a:solidFill>
-                            <a:srgbClr val="34495E"/>
-                          </a:solidFill>
-                        </a:defRPr>
-                      </a:pPr>
-                      <a:r>
-                        <a:t>or defect causes adjustment?</a:t>
+                        <a:defRPr sz="1000">
+                          <a:solidFill>
+                            <a:srgbClr val="34495E"/>
+                          </a:solidFill>
+                        </a:defRPr>
+                      </a:pPr>
+                      <a:r>
+                        <a:t>Variability first or</a:t>
+                      </a:r>
+                    </a:p>
+                    <a:p>
+                      <a:pPr>
+                        <a:defRPr sz="1000">
+                          <a:solidFill>
+                            <a:srgbClr val="34495E"/>
+                          </a:solidFill>
+                        </a:defRPr>
+                      </a:pPr>
+                      <a:r>
+                        <a:t>defect first?</a:t>
                       </a:r>
                     </a:p>
                   </a:txBody>
@@ -7716,7 +7980,7 @@
                     <a:lstStyle/>
                     <a:p>
                       <a:pPr>
-                        <a:defRPr sz="1100">
+                        <a:defRPr sz="1000">
                           <a:solidFill>
                             <a:srgbClr val="34495E"/>
                           </a:solidFill>
@@ -7728,7 +7992,7 @@
                     </a:p>
                     <a:p>
                       <a:pPr>
-                        <a:defRPr sz="1100">
+                        <a:defRPr sz="1000">
                           <a:solidFill>
                             <a:srgbClr val="34495E"/>
                           </a:solidFill>
@@ -7747,7 +8011,7 @@
                     <a:lstStyle/>
                     <a:p>
                       <a:pPr>
-                        <a:defRPr sz="1100">
+                        <a:defRPr sz="1000">
                           <a:solidFill>
                             <a:srgbClr val="34495E"/>
                           </a:solidFill>
@@ -7759,7 +8023,7 @@
                     </a:p>
                     <a:p>
                       <a:pPr>
-                        <a:defRPr sz="1100">
+                        <a:defRPr sz="1000">
                           <a:solidFill>
                             <a:srgbClr val="34495E"/>
                           </a:solidFill>
@@ -7773,14 +8037,14 @@
                   <a:tcPr/>
                 </a:tc>
               </a:tr>
-              <a:tr h="838200">
-                <a:tc>
-                  <a:txBody>
-                    <a:bodyPr/>
-                    <a:lstStyle/>
-                    <a:p>
-                      <a:pPr>
-                        <a:defRPr sz="1100">
+              <a:tr h="792480">
+                <a:tc>
+                  <a:txBody>
+                    <a:bodyPr/>
+                    <a:lstStyle/>
+                    <a:p>
+                      <a:pPr>
+                        <a:defRPr sz="1000">
                           <a:solidFill>
                             <a:srgbClr val="34495E"/>
                           </a:solidFill>
@@ -7803,7 +8067,7 @@
                     <a:lstStyle/>
                     <a:p>
                       <a:pPr>
-                        <a:defRPr sz="1100">
+                        <a:defRPr sz="1000">
                           <a:solidFill>
                             <a:srgbClr val="34495E"/>
                           </a:solidFill>
@@ -7815,7 +8079,7 @@
                     </a:p>
                     <a:p>
                       <a:pPr>
-                        <a:defRPr sz="1100">
+                        <a:defRPr sz="1000">
                           <a:solidFill>
                             <a:srgbClr val="34495E"/>
                           </a:solidFill>
@@ -7838,7 +8102,7 @@
                     <a:lstStyle/>
                     <a:p>
                       <a:pPr>
-                        <a:defRPr sz="1100">
+                        <a:defRPr sz="1000">
                           <a:solidFill>
                             <a:srgbClr val="34495E"/>
                           </a:solidFill>
@@ -7861,26 +8125,26 @@
                     <a:lstStyle/>
                     <a:p>
                       <a:pPr>
-                        <a:defRPr sz="1100">
-                          <a:solidFill>
-                            <a:srgbClr val="34495E"/>
-                          </a:solidFill>
-                        </a:defRPr>
-                      </a:pPr>
-                      <a:r>
-                        <a:t>Stand 8 vs Furnace</a:t>
-                      </a:r>
-                    </a:p>
-                    <a:p>
-                      <a:pPr>
-                        <a:defRPr sz="1100">
-                          <a:solidFill>
-                            <a:srgbClr val="34495E"/>
-                          </a:solidFill>
-                        </a:defRPr>
-                      </a:pPr>
-                      <a:r>
-                        <a:t>rho=-0.722</a:t>
+                        <a:defRPr sz="1000">
+                          <a:solidFill>
+                            <a:srgbClr val="34495E"/>
+                          </a:solidFill>
+                        </a:defRPr>
+                      </a:pPr>
+                      <a:r>
+                        <a:t>Stand8 vs Furnace</a:t>
+                      </a:r>
+                    </a:p>
+                    <a:p>
+                      <a:pPr>
+                        <a:defRPr sz="1000">
+                          <a:solidFill>
+                            <a:srgbClr val="34495E"/>
+                          </a:solidFill>
+                        </a:defRPr>
+                      </a:pPr>
+                      <a:r>
+                        <a:t>rho = -0.722</a:t>
                       </a:r>
                     </a:p>
                   </a:txBody>
@@ -7891,14 +8155,14 @@
                   </a:tcPr>
                 </a:tc>
               </a:tr>
-              <a:tr h="838200">
-                <a:tc>
-                  <a:txBody>
-                    <a:bodyPr/>
-                    <a:lstStyle/>
-                    <a:p>
-                      <a:pPr>
-                        <a:defRPr sz="1100">
+              <a:tr h="792480">
+                <a:tc>
+                  <a:txBody>
+                    <a:bodyPr/>
+                    <a:lstStyle/>
+                    <a:p>
+                      <a:pPr>
+                        <a:defRPr sz="1000">
                           <a:solidFill>
                             <a:srgbClr val="34495E"/>
                           </a:solidFill>
@@ -7917,14 +8181,26 @@
                     <a:lstStyle/>
                     <a:p>
                       <a:pPr>
-                        <a:defRPr sz="1100">
-                          <a:solidFill>
-                            <a:srgbClr val="34495E"/>
-                          </a:solidFill>
-                        </a:defRPr>
-                      </a:pPr>
-                      <a:r>
-                        <a:t>Management standards?</a:t>
+                        <a:defRPr sz="1000">
+                          <a:solidFill>
+                            <a:srgbClr val="34495E"/>
+                          </a:solidFill>
+                        </a:defRPr>
+                      </a:pPr>
+                      <a:r>
+                        <a:t>Management</a:t>
+                      </a:r>
+                    </a:p>
+                    <a:p>
+                      <a:pPr>
+                        <a:defRPr sz="1000">
+                          <a:solidFill>
+                            <a:srgbClr val="34495E"/>
+                          </a:solidFill>
+                        </a:defRPr>
+                      </a:pPr>
+                      <a:r>
+                        <a:t>standards?</a:t>
                       </a:r>
                     </a:p>
                   </a:txBody>
@@ -7936,26 +8212,26 @@
                     <a:lstStyle/>
                     <a:p>
                       <a:pPr>
-                        <a:defRPr sz="1100">
-                          <a:solidFill>
-                            <a:srgbClr val="34495E"/>
-                          </a:solidFill>
-                        </a:defRPr>
-                      </a:pPr>
-                      <a:r>
-                        <a:t>Provided</a:t>
-                      </a:r>
-                    </a:p>
-                    <a:p>
-                      <a:pPr>
-                        <a:defRPr sz="1100">
-                          <a:solidFill>
-                            <a:srgbClr val="34495E"/>
-                          </a:solidFill>
-                        </a:defRPr>
-                      </a:pPr>
-                      <a:r>
-                        <a:t>(by grade)</a:t>
+                        <a:defRPr sz="1000">
+                          <a:solidFill>
+                            <a:srgbClr val="34495E"/>
+                          </a:solidFill>
+                        </a:defRPr>
+                      </a:pPr>
+                      <a:r>
+                        <a:t>Provided by grade</a:t>
+                      </a:r>
+                    </a:p>
+                    <a:p>
+                      <a:pPr>
+                        <a:defRPr sz="1000">
+                          <a:solidFill>
+                            <a:srgbClr val="34495E"/>
+                          </a:solidFill>
+                        </a:defRPr>
+                      </a:pPr>
+                      <a:r>
+                        <a:t>(Alternative B)</a:t>
                       </a:r>
                     </a:p>
                   </a:txBody>
@@ -7967,7 +8243,7 @@
                     <a:lstStyle/>
                     <a:p>
                       <a:pPr>
-                        <a:defRPr sz="1100">
+                        <a:defRPr sz="1000">
                           <a:solidFill>
                             <a:srgbClr val="34495E"/>
                           </a:solidFill>
@@ -7979,28 +8255,28 @@
                     </a:p>
                     <a:p>
                       <a:pPr>
-                        <a:defRPr sz="1100">
-                          <a:solidFill>
-                            <a:srgbClr val="34495E"/>
-                          </a:solidFill>
-                        </a:defRPr>
-                      </a:pPr>
-                      <a:r>
-                        <a:t>Gap -75.2%</a:t>
+                        <a:defRPr sz="1000">
+                          <a:solidFill>
+                            <a:srgbClr val="34495E"/>
+                          </a:solidFill>
+                        </a:defRPr>
+                      </a:pPr>
+                      <a:r>
+                        <a:t>Gap = -75.2%</a:t>
                       </a:r>
                     </a:p>
                   </a:txBody>
                   <a:tcPr/>
                 </a:tc>
               </a:tr>
-              <a:tr h="838200">
-                <a:tc>
-                  <a:txBody>
-                    <a:bodyPr/>
-                    <a:lstStyle/>
-                    <a:p>
-                      <a:pPr>
-                        <a:defRPr sz="1100">
+              <a:tr h="792480">
+                <a:tc>
+                  <a:txBody>
+                    <a:bodyPr/>
+                    <a:lstStyle/>
+                    <a:p>
+                      <a:pPr>
+                        <a:defRPr sz="1000">
                           <a:solidFill>
                             <a:srgbClr val="34495E"/>
                           </a:solidFill>
@@ -8023,26 +8299,26 @@
                     <a:lstStyle/>
                     <a:p>
                       <a:pPr>
-                        <a:defRPr sz="1100">
-                          <a:solidFill>
-                            <a:srgbClr val="34495E"/>
-                          </a:solidFill>
-                        </a:defRPr>
-                      </a:pPr>
-                      <a:r>
-                        <a:t>Why Stand 14/Block Mill</a:t>
-                      </a:r>
-                    </a:p>
-                    <a:p>
-                      <a:pPr>
-                        <a:defRPr sz="1100">
-                          <a:solidFill>
-                            <a:srgbClr val="34495E"/>
-                          </a:solidFill>
-                        </a:defRPr>
-                      </a:pPr>
-                      <a:r>
-                        <a:t>results are small?</a:t>
+                        <a:defRPr sz="1000">
+                          <a:solidFill>
+                            <a:srgbClr val="34495E"/>
+                          </a:solidFill>
+                        </a:defRPr>
+                      </a:pPr>
+                      <a:r>
+                        <a:t>Why Stand14 /</a:t>
+                      </a:r>
+                    </a:p>
+                    <a:p>
+                      <a:pPr>
+                        <a:defRPr sz="1000">
+                          <a:solidFill>
+                            <a:srgbClr val="34495E"/>
+                          </a:solidFill>
+                        </a:defRPr>
+                      </a:pPr>
+                      <a:r>
+                        <a:t>Block Mill small?</a:t>
                       </a:r>
                     </a:p>
                   </a:txBody>
@@ -8058,26 +8334,26 @@
                     <a:lstStyle/>
                     <a:p>
                       <a:pPr>
-                        <a:defRPr sz="1100">
-                          <a:solidFill>
-                            <a:srgbClr val="34495E"/>
-                          </a:solidFill>
-                        </a:defRPr>
-                      </a:pPr>
-                      <a:r>
-                        <a:t>avg is NOT significant</a:t>
-                      </a:r>
-                    </a:p>
-                    <a:p>
-                      <a:pPr>
-                        <a:defRPr sz="1100">
-                          <a:solidFill>
-                            <a:srgbClr val="34495E"/>
-                          </a:solidFill>
-                        </a:defRPr>
-                      </a:pPr>
-                      <a:r>
-                        <a:t>but std IS significant</a:t>
+                        <a:defRPr sz="1000">
+                          <a:solidFill>
+                            <a:srgbClr val="34495E"/>
+                          </a:solidFill>
+                        </a:defRPr>
+                      </a:pPr>
+                      <a:r>
+                        <a:t>avg NOT significant</a:t>
+                      </a:r>
+                    </a:p>
+                    <a:p>
+                      <a:pPr>
+                        <a:defRPr sz="1000">
+                          <a:solidFill>
+                            <a:srgbClr val="34495E"/>
+                          </a:solidFill>
+                        </a:defRPr>
+                      </a:pPr>
+                      <a:r>
+                        <a:t>std IS significant</a:t>
                       </a:r>
                     </a:p>
                   </a:txBody>
@@ -8093,14 +8369,14 @@
                     <a:lstStyle/>
                     <a:p>
                       <a:pPr>
-                        <a:defRPr sz="1100">
-                          <a:solidFill>
-                            <a:srgbClr val="34495E"/>
-                          </a:solidFill>
-                        </a:defRPr>
-                      </a:pPr>
-                      <a:r>
-                        <a:t>std rho=0.351***</a:t>
+                        <a:defRPr sz="1000">
+                          <a:solidFill>
+                            <a:srgbClr val="34495E"/>
+                          </a:solidFill>
+                        </a:defRPr>
+                      </a:pPr>
+                      <a:r>
+                        <a:t>std rho = 0.351***</a:t>
                       </a:r>
                     </a:p>
                   </a:txBody>
@@ -8111,14 +8387,14 @@
                   </a:tcPr>
                 </a:tc>
               </a:tr>
-              <a:tr h="838200">
-                <a:tc>
-                  <a:txBody>
-                    <a:bodyPr/>
-                    <a:lstStyle/>
-                    <a:p>
-                      <a:pPr>
-                        <a:defRPr sz="1100">
+              <a:tr h="792480">
+                <a:tc>
+                  <a:txBody>
+                    <a:bodyPr/>
+                    <a:lstStyle/>
+                    <a:p>
+                      <a:pPr>
+                        <a:defRPr sz="1000">
                           <a:solidFill>
                             <a:srgbClr val="34495E"/>
                           </a:solidFill>
@@ -8137,26 +8413,26 @@
                     <a:lstStyle/>
                     <a:p>
                       <a:pPr>
-                        <a:defRPr sz="1100">
-                          <a:solidFill>
-                            <a:srgbClr val="34495E"/>
-                          </a:solidFill>
-                        </a:defRPr>
-                      </a:pPr>
-                      <a:r>
-                        <a:t>ML vs Stat ranking</a:t>
-                      </a:r>
-                    </a:p>
-                    <a:p>
-                      <a:pPr>
-                        <a:defRPr sz="1100">
-                          <a:solidFill>
-                            <a:srgbClr val="34495E"/>
-                          </a:solidFill>
-                        </a:defRPr>
-                      </a:pPr>
-                      <a:r>
-                        <a:t>mismatch?</a:t>
+                        <a:defRPr sz="1000">
+                          <a:solidFill>
+                            <a:srgbClr val="34495E"/>
+                          </a:solidFill>
+                        </a:defRPr>
+                      </a:pPr>
+                      <a:r>
+                        <a:t>ML vs Stat</a:t>
+                      </a:r>
+                    </a:p>
+                    <a:p>
+                      <a:pPr>
+                        <a:defRPr sz="1000">
+                          <a:solidFill>
+                            <a:srgbClr val="34495E"/>
+                          </a:solidFill>
+                        </a:defRPr>
+                      </a:pPr>
+                      <a:r>
+                        <a:t>ranking mismatch?</a:t>
                       </a:r>
                     </a:p>
                   </a:txBody>
@@ -8168,7 +8444,7 @@
                     <a:lstStyle/>
                     <a:p>
                       <a:pPr>
-                        <a:defRPr sz="1100">
+                        <a:defRPr sz="1000">
                           <a:solidFill>
                             <a:srgbClr val="34495E"/>
                           </a:solidFill>
@@ -8180,14 +8456,14 @@
                     </a:p>
                     <a:p>
                       <a:pPr>
-                        <a:defRPr sz="1100">
-                          <a:solidFill>
-                            <a:srgbClr val="34495E"/>
-                          </a:solidFill>
-                        </a:defRPr>
-                      </a:pPr>
-                      <a:r>
-                        <a:t>PR3 Torque #1</a:t>
+                        <a:defRPr sz="1000">
+                          <a:solidFill>
+                            <a:srgbClr val="34495E"/>
+                          </a:solidFill>
+                        </a:defRPr>
+                      </a:pPr>
+                      <a:r>
+                        <a:t>PR3 Torque = #1</a:t>
                       </a:r>
                     </a:p>
                   </a:txBody>
@@ -8199,7 +8475,7 @@
                     <a:lstStyle/>
                     <a:p>
                       <a:pPr>
-                        <a:defRPr sz="1100">
+                        <a:defRPr sz="1000">
                           <a:solidFill>
                             <a:srgbClr val="34495E"/>
                           </a:solidFill>
@@ -8211,7 +8487,7 @@
                     </a:p>
                     <a:p>
                       <a:pPr>
-                        <a:defRPr sz="1100">
+                        <a:defRPr sz="1000">
                           <a:solidFill>
                             <a:srgbClr val="34495E"/>
                           </a:solidFill>
@@ -8291,11 +8567,11 @@
           </a:fontRef>
         </p:style>
         <p:txBody>
-          <a:bodyPr rtlCol="0" anchor="ctr" wrap="square" lIns="457200" tIns="137160"/>
+          <a:bodyPr rtlCol="0" anchor="ctr" wrap="square" lIns="457200" tIns="109728"/>
           <a:lstStyle/>
           <a:p>
             <a:pPr algn="l">
-              <a:defRPr sz="2800" b="1">
+              <a:defRPr sz="2600" b="1">
                 <a:solidFill>
                   <a:srgbClr val="FFFFFF"/>
                 </a:solidFill>
@@ -8306,8 +8582,8 @@
             </a:r>
           </a:p>
           <a:p>
-            <a:pPr algn="l">
-              <a:defRPr sz="1600">
+            <a:pPr>
+              <a:defRPr sz="1400">
                 <a:solidFill>
                   <a:srgbClr val="BDC3C7"/>
                 </a:solidFill>
@@ -8335,8 +8611,8 @@
         </p:blipFill>
         <p:spPr>
           <a:xfrm>
-            <a:off x="457200" y="1371600"/>
-            <a:ext cx="10972800" cy="4631206"/>
+            <a:off x="274320" y="1280160"/>
+            <a:ext cx="11612880" cy="4901359"/>
           </a:xfrm>
           <a:prstGeom prst="rect">
             <a:avLst/>
@@ -8405,30 +8681,30 @@
           </a:fontRef>
         </p:style>
         <p:txBody>
-          <a:bodyPr rtlCol="0" anchor="ctr" wrap="square" lIns="457200" tIns="137160"/>
+          <a:bodyPr rtlCol="0" anchor="ctr" wrap="square" lIns="457200" tIns="109728"/>
           <a:lstStyle/>
           <a:p>
             <a:pPr algn="l">
-              <a:defRPr sz="2800" b="1">
+              <a:defRPr sz="2600" b="1">
                 <a:solidFill>
                   <a:srgbClr val="FFFFFF"/>
                 </a:solidFill>
               </a:defRPr>
             </a:pPr>
             <a:r>
-              <a:t>Q5: ML vs Statistical Ranking Reconciliation</a:t>
-            </a:r>
-          </a:p>
-          <a:p>
-            <a:pPr algn="l">
-              <a:defRPr sz="1600">
+              <a:t>Q5: Reconciled Feature Ranking Top-5</a:t>
+            </a:r>
+          </a:p>
+          <a:p>
+            <a:pPr>
+              <a:defRPr sz="1400">
                 <a:solidFill>
                   <a:srgbClr val="BDC3C7"/>
                 </a:solidFill>
               </a:defRPr>
             </a:pPr>
             <a:r>
-              <a:t>MOST IMPORTANT - Reconciled Feature Ranking Top-5</a:t>
+              <a:t>MOST IMPORTANT — Unified ranking for field recommendation</a:t>
             </a:r>
           </a:p>
         </p:txBody>
@@ -8443,7 +8719,7 @@
         </p:nvGraphicFramePr>
         <p:xfrm>
           <a:off x="274320" y="1371600"/>
-          <a:ext cx="9692640" cy="3200400"/>
+          <a:ext cx="9326880" cy="2926080"/>
         </p:xfrm>
         <a:graphic>
           <a:graphicData uri="http://schemas.openxmlformats.org/drawingml/2006/table">
@@ -8453,20 +8729,20 @@
               </a:tblPr>
               <a:tblGrid>
                 <a:gridCol w="640080"/>
+                <a:gridCol w="3474720"/>
+                <a:gridCol w="640080"/>
+                <a:gridCol w="640080"/>
+                <a:gridCol w="731520"/>
                 <a:gridCol w="3200400"/>
-                <a:gridCol w="1097280"/>
-                <a:gridCol w="1097280"/>
-                <a:gridCol w="914400"/>
-                <a:gridCol w="2743200"/>
               </a:tblGrid>
-              <a:tr h="533400">
+              <a:tr h="487680">
                 <a:tc>
                   <a:txBody>
                     <a:bodyPr/>
                     <a:lstStyle/>
                     <a:p>
                       <a:pPr algn="ctr">
-                        <a:defRPr sz="1100" b="1">
+                        <a:defRPr sz="1000" b="1">
                           <a:solidFill>
                             <a:srgbClr val="FFFFFF"/>
                           </a:solidFill>
@@ -8489,7 +8765,7 @@
                     <a:lstStyle/>
                     <a:p>
                       <a:pPr algn="ctr">
-                        <a:defRPr sz="1100" b="1">
+                        <a:defRPr sz="1000" b="1">
                           <a:solidFill>
                             <a:srgbClr val="FFFFFF"/>
                           </a:solidFill>
@@ -8512,14 +8788,14 @@
                     <a:lstStyle/>
                     <a:p>
                       <a:pPr algn="ctr">
-                        <a:defRPr sz="1100" b="1">
+                        <a:defRPr sz="1000" b="1">
                           <a:solidFill>
                             <a:srgbClr val="FFFFFF"/>
                           </a:solidFill>
                         </a:defRPr>
                       </a:pPr>
                       <a:r>
-                        <a:t>Stat Rank</a:t>
+                        <a:t>Stat</a:t>
                       </a:r>
                     </a:p>
                   </a:txBody>
@@ -8535,14 +8811,14 @@
                     <a:lstStyle/>
                     <a:p>
                       <a:pPr algn="ctr">
-                        <a:defRPr sz="1100" b="1">
+                        <a:defRPr sz="1000" b="1">
                           <a:solidFill>
                             <a:srgbClr val="FFFFFF"/>
                           </a:solidFill>
                         </a:defRPr>
                       </a:pPr>
                       <a:r>
-                        <a:t>ML Rank</a:t>
+                        <a:t>ML</a:t>
                       </a:r>
                     </a:p>
                   </a:txBody>
@@ -8558,7 +8834,7 @@
                     <a:lstStyle/>
                     <a:p>
                       <a:pPr algn="ctr">
-                        <a:defRPr sz="1100" b="1">
+                        <a:defRPr sz="1000" b="1">
                           <a:solidFill>
                             <a:srgbClr val="FFFFFF"/>
                           </a:solidFill>
@@ -8581,7 +8857,7 @@
                     <a:lstStyle/>
                     <a:p>
                       <a:pPr algn="ctr">
-                        <a:defRPr sz="1100" b="1">
+                        <a:defRPr sz="1000" b="1">
                           <a:solidFill>
                             <a:srgbClr val="FFFFFF"/>
                           </a:solidFill>
@@ -8599,14 +8875,14 @@
                   </a:tcPr>
                 </a:tc>
               </a:tr>
-              <a:tr h="533400">
-                <a:tc>
-                  <a:txBody>
-                    <a:bodyPr/>
-                    <a:lstStyle/>
-                    <a:p>
-                      <a:pPr>
-                        <a:defRPr sz="1100">
+              <a:tr h="487680">
+                <a:tc>
+                  <a:txBody>
+                    <a:bodyPr/>
+                    <a:lstStyle/>
+                    <a:p>
+                      <a:pPr>
+                        <a:defRPr sz="1000">
                           <a:solidFill>
                             <a:srgbClr val="34495E"/>
                           </a:solidFill>
@@ -8625,7 +8901,7 @@
                     <a:lstStyle/>
                     <a:p>
                       <a:pPr>
-                        <a:defRPr sz="1100">
+                        <a:defRPr sz="1000">
                           <a:solidFill>
                             <a:srgbClr val="34495E"/>
                           </a:solidFill>
@@ -8644,7 +8920,7 @@
                     <a:lstStyle/>
                     <a:p>
                       <a:pPr>
-                        <a:defRPr sz="1100">
+                        <a:defRPr sz="1000">
                           <a:solidFill>
                             <a:srgbClr val="34495E"/>
                           </a:solidFill>
@@ -8663,7 +8939,7 @@
                     <a:lstStyle/>
                     <a:p>
                       <a:pPr>
-                        <a:defRPr sz="1100">
+                        <a:defRPr sz="1000">
                           <a:solidFill>
                             <a:srgbClr val="34495E"/>
                           </a:solidFill>
@@ -8682,7 +8958,7 @@
                     <a:lstStyle/>
                     <a:p>
                       <a:pPr>
-                        <a:defRPr sz="1100">
+                        <a:defRPr sz="1000">
                           <a:solidFill>
                             <a:srgbClr val="34495E"/>
                           </a:solidFill>
@@ -8701,7 +8977,7 @@
                     <a:lstStyle/>
                     <a:p>
                       <a:pPr>
-                        <a:defRPr sz="1100">
+                        <a:defRPr sz="1000">
                           <a:solidFill>
                             <a:srgbClr val="34495E"/>
                           </a:solidFill>
@@ -8715,14 +8991,14 @@
                   <a:tcPr/>
                 </a:tc>
               </a:tr>
-              <a:tr h="533400">
-                <a:tc>
-                  <a:txBody>
-                    <a:bodyPr/>
-                    <a:lstStyle/>
-                    <a:p>
-                      <a:pPr>
-                        <a:defRPr sz="1100">
+              <a:tr h="487680">
+                <a:tc>
+                  <a:txBody>
+                    <a:bodyPr/>
+                    <a:lstStyle/>
+                    <a:p>
+                      <a:pPr>
+                        <a:defRPr sz="1000">
                           <a:solidFill>
                             <a:srgbClr val="34495E"/>
                           </a:solidFill>
@@ -8745,7 +9021,7 @@
                     <a:lstStyle/>
                     <a:p>
                       <a:pPr>
-                        <a:defRPr sz="1100">
+                        <a:defRPr sz="1000">
                           <a:solidFill>
                             <a:srgbClr val="34495E"/>
                           </a:solidFill>
@@ -8768,7 +9044,7 @@
                     <a:lstStyle/>
                     <a:p>
                       <a:pPr>
-                        <a:defRPr sz="1100">
+                        <a:defRPr sz="1000">
                           <a:solidFill>
                             <a:srgbClr val="34495E"/>
                           </a:solidFill>
@@ -8791,7 +9067,7 @@
                     <a:lstStyle/>
                     <a:p>
                       <a:pPr>
-                        <a:defRPr sz="1100">
+                        <a:defRPr sz="1000">
                           <a:solidFill>
                             <a:srgbClr val="34495E"/>
                           </a:solidFill>
@@ -8814,7 +9090,7 @@
                     <a:lstStyle/>
                     <a:p>
                       <a:pPr>
-                        <a:defRPr sz="1100">
+                        <a:defRPr sz="1000">
                           <a:solidFill>
                             <a:srgbClr val="34495E"/>
                           </a:solidFill>
@@ -8837,7 +9113,7 @@
                     <a:lstStyle/>
                     <a:p>
                       <a:pPr>
-                        <a:defRPr sz="1100">
+                        <a:defRPr sz="1000">
                           <a:solidFill>
                             <a:srgbClr val="34495E"/>
                           </a:solidFill>
@@ -8855,14 +9131,14 @@
                   </a:tcPr>
                 </a:tc>
               </a:tr>
-              <a:tr h="533400">
-                <a:tc>
-                  <a:txBody>
-                    <a:bodyPr/>
-                    <a:lstStyle/>
-                    <a:p>
-                      <a:pPr>
-                        <a:defRPr sz="1100">
+              <a:tr h="487680">
+                <a:tc>
+                  <a:txBody>
+                    <a:bodyPr/>
+                    <a:lstStyle/>
+                    <a:p>
+                      <a:pPr>
+                        <a:defRPr sz="1000">
                           <a:solidFill>
                             <a:srgbClr val="34495E"/>
                           </a:solidFill>
@@ -8881,7 +9157,7 @@
                     <a:lstStyle/>
                     <a:p>
                       <a:pPr>
-                        <a:defRPr sz="1100">
+                        <a:defRPr sz="1000">
                           <a:solidFill>
                             <a:srgbClr val="34495E"/>
                           </a:solidFill>
@@ -8900,7 +9176,7 @@
                     <a:lstStyle/>
                     <a:p>
                       <a:pPr>
-                        <a:defRPr sz="1100">
+                        <a:defRPr sz="1000">
                           <a:solidFill>
                             <a:srgbClr val="34495E"/>
                           </a:solidFill>
@@ -8919,7 +9195,7 @@
                     <a:lstStyle/>
                     <a:p>
                       <a:pPr>
-                        <a:defRPr sz="1100">
+                        <a:defRPr sz="1000">
                           <a:solidFill>
                             <a:srgbClr val="34495E"/>
                           </a:solidFill>
@@ -8938,7 +9214,7 @@
                     <a:lstStyle/>
                     <a:p>
                       <a:pPr>
-                        <a:defRPr sz="1100">
+                        <a:defRPr sz="1000">
                           <a:solidFill>
                             <a:srgbClr val="34495E"/>
                           </a:solidFill>
@@ -8957,7 +9233,7 @@
                     <a:lstStyle/>
                     <a:p>
                       <a:pPr>
-                        <a:defRPr sz="1100">
+                        <a:defRPr sz="1000">
                           <a:solidFill>
                             <a:srgbClr val="34495E"/>
                           </a:solidFill>
@@ -8971,14 +9247,14 @@
                   <a:tcPr/>
                 </a:tc>
               </a:tr>
-              <a:tr h="533400">
-                <a:tc>
-                  <a:txBody>
-                    <a:bodyPr/>
-                    <a:lstStyle/>
-                    <a:p>
-                      <a:pPr>
-                        <a:defRPr sz="1100">
+              <a:tr h="487680">
+                <a:tc>
+                  <a:txBody>
+                    <a:bodyPr/>
+                    <a:lstStyle/>
+                    <a:p>
+                      <a:pPr>
+                        <a:defRPr sz="1000">
                           <a:solidFill>
                             <a:srgbClr val="34495E"/>
                           </a:solidFill>
@@ -9001,7 +9277,7 @@
                     <a:lstStyle/>
                     <a:p>
                       <a:pPr>
-                        <a:defRPr sz="1100">
+                        <a:defRPr sz="1000">
                           <a:solidFill>
                             <a:srgbClr val="34495E"/>
                           </a:solidFill>
@@ -9024,7 +9300,7 @@
                     <a:lstStyle/>
                     <a:p>
                       <a:pPr>
-                        <a:defRPr sz="1100">
+                        <a:defRPr sz="1000">
                           <a:solidFill>
                             <a:srgbClr val="34495E"/>
                           </a:solidFill>
@@ -9047,7 +9323,7 @@
                     <a:lstStyle/>
                     <a:p>
                       <a:pPr>
-                        <a:defRPr sz="1100">
+                        <a:defRPr sz="1000">
                           <a:solidFill>
                             <a:srgbClr val="34495E"/>
                           </a:solidFill>
@@ -9070,7 +9346,7 @@
                     <a:lstStyle/>
                     <a:p>
                       <a:pPr>
-                        <a:defRPr sz="1100">
+                        <a:defRPr sz="1000">
                           <a:solidFill>
                             <a:srgbClr val="34495E"/>
                           </a:solidFill>
@@ -9093,7 +9369,7 @@
                     <a:lstStyle/>
                     <a:p>
                       <a:pPr>
-                        <a:defRPr sz="1100">
+                        <a:defRPr sz="1000">
                           <a:solidFill>
                             <a:srgbClr val="34495E"/>
                           </a:solidFill>
@@ -9111,14 +9387,14 @@
                   </a:tcPr>
                 </a:tc>
               </a:tr>
-              <a:tr h="533400">
-                <a:tc>
-                  <a:txBody>
-                    <a:bodyPr/>
-                    <a:lstStyle/>
-                    <a:p>
-                      <a:pPr>
-                        <a:defRPr sz="1100">
+              <a:tr h="487680">
+                <a:tc>
+                  <a:txBody>
+                    <a:bodyPr/>
+                    <a:lstStyle/>
+                    <a:p>
+                      <a:pPr>
+                        <a:defRPr sz="1000">
                           <a:solidFill>
                             <a:srgbClr val="34495E"/>
                           </a:solidFill>
@@ -9137,7 +9413,7 @@
                     <a:lstStyle/>
                     <a:p>
                       <a:pPr>
-                        <a:defRPr sz="1100">
+                        <a:defRPr sz="1000">
                           <a:solidFill>
                             <a:srgbClr val="34495E"/>
                           </a:solidFill>
@@ -9156,7 +9432,7 @@
                     <a:lstStyle/>
                     <a:p>
                       <a:pPr>
-                        <a:defRPr sz="1100">
+                        <a:defRPr sz="1000">
                           <a:solidFill>
                             <a:srgbClr val="34495E"/>
                           </a:solidFill>
@@ -9175,7 +9451,7 @@
                     <a:lstStyle/>
                     <a:p>
                       <a:pPr>
-                        <a:defRPr sz="1100">
+                        <a:defRPr sz="1000">
                           <a:solidFill>
                             <a:srgbClr val="34495E"/>
                           </a:solidFill>
@@ -9194,7 +9470,7 @@
                     <a:lstStyle/>
                     <a:p>
                       <a:pPr>
-                        <a:defRPr sz="1100">
+                        <a:defRPr sz="1000">
                           <a:solidFill>
                             <a:srgbClr val="34495E"/>
                           </a:solidFill>
@@ -9213,7 +9489,7 @@
                     <a:lstStyle/>
                     <a:p>
                       <a:pPr>
-                        <a:defRPr sz="1100">
+                        <a:defRPr sz="1000">
                           <a:solidFill>
                             <a:srgbClr val="34495E"/>
                           </a:solidFill>
@@ -9239,8 +9515,8 @@
         </p:nvSpPr>
         <p:spPr>
           <a:xfrm>
-            <a:off x="457200" y="4846320"/>
-            <a:ext cx="10972800" cy="1828800"/>
+            <a:off x="457200" y="4572000"/>
+            <a:ext cx="10972800" cy="2011680"/>
           </a:xfrm>
           <a:prstGeom prst="rect">
             <a:avLst/>
@@ -9282,19 +9558,31 @@
               </a:defRPr>
             </a:pPr>
             <a:r>
-              <a:t>FB Slave Torque: Stat rank 10 but ML rank 1 — ML captures nonlinear effect</a:t>
+              <a:t>FB Slave Torque: Stat rank 10 -&gt; ML rank 1 — ML captures nonlinear effect</a:t>
             </a:r>
           </a:p>
           <a:p>
             <a:pPr>
-              <a:defRPr sz="1200" b="0">
+              <a:defRPr sz="1100" b="0">
                 <a:solidFill>
                   <a:srgbClr val="7F8C8D"/>
                 </a:solidFill>
               </a:defRPr>
             </a:pPr>
             <a:r>
-              <a:t>Formula: Score = 0.4 x Stat(normalized) + 0.6 x ML(normalized)</a:t>
+              <a:t>Score = 0.4 x Stat(normalized) + 0.6 x ML(normalized)</a:t>
+            </a:r>
+          </a:p>
+          <a:p>
+            <a:pPr>
+              <a:defRPr sz="1100" b="0">
+                <a:solidFill>
+                  <a:srgbClr val="7F8C8D"/>
+                </a:solidFill>
+              </a:defRPr>
+            </a:pPr>
+            <a:r>
+              <a:t>ML weight 0.6 reason: controls confounding, consistent with RUN filter results, no reverse causality errors</a:t>
             </a:r>
           </a:p>
         </p:txBody>
@@ -9361,11 +9649,11 @@
           </a:fontRef>
         </p:style>
         <p:txBody>
-          <a:bodyPr rtlCol="0" anchor="ctr" wrap="square" lIns="457200" tIns="137160"/>
+          <a:bodyPr rtlCol="0" anchor="ctr" wrap="square" lIns="457200" tIns="109728"/>
           <a:lstStyle/>
           <a:p>
             <a:pPr algn="l">
-              <a:defRPr sz="2800" b="1">
+              <a:defRPr sz="2600" b="1">
                 <a:solidFill>
                   <a:srgbClr val="FFFFFF"/>
                 </a:solidFill>
@@ -9376,8 +9664,8 @@
             </a:r>
           </a:p>
           <a:p>
-            <a:pPr algn="l">
-              <a:defRPr sz="1600">
+            <a:pPr>
+              <a:defRPr sz="1400">
                 <a:solidFill>
                   <a:srgbClr val="BDC3C7"/>
                 </a:solidFill>
@@ -9405,8 +9693,8 @@
         </p:blipFill>
         <p:spPr>
           <a:xfrm>
-            <a:off x="274320" y="1280160"/>
-            <a:ext cx="11430000" cy="8130562"/>
+            <a:off x="2288624" y="1280160"/>
+            <a:ext cx="7584271" cy="5394959"/>
           </a:xfrm>
           <a:prstGeom prst="rect">
             <a:avLst/>
@@ -9475,11 +9763,11 @@
           </a:fontRef>
         </p:style>
         <p:txBody>
-          <a:bodyPr rtlCol="0" anchor="ctr" wrap="square" lIns="457200" tIns="137160"/>
+          <a:bodyPr rtlCol="0" anchor="ctr" wrap="square" lIns="457200" tIns="109728"/>
           <a:lstStyle/>
           <a:p>
             <a:pPr algn="l">
-              <a:defRPr sz="2800" b="1">
+              <a:defRPr sz="2600" b="1">
                 <a:solidFill>
                   <a:srgbClr val="FFFFFF"/>
                 </a:solidFill>
@@ -9490,8 +9778,8 @@
             </a:r>
           </a:p>
           <a:p>
-            <a:pPr algn="l">
-              <a:defRPr sz="1600">
+            <a:pPr>
+              <a:defRPr sz="1400">
                 <a:solidFill>
                   <a:srgbClr val="BDC3C7"/>
                 </a:solidFill>
@@ -9520,7 +9808,7 @@
         <p:spPr>
           <a:xfrm>
             <a:off x="274320" y="1280160"/>
-            <a:ext cx="5486400" cy="4488528"/>
+            <a:ext cx="5486400" cy="4488527"/>
           </a:xfrm>
           <a:prstGeom prst="rect">
             <a:avLst/>
@@ -9537,7 +9825,7 @@
         </p:nvGraphicFramePr>
         <p:xfrm>
           <a:off x="6217920" y="1371600"/>
-          <a:ext cx="5669280" cy="2286000"/>
+          <a:ext cx="4754880" cy="2194560"/>
         </p:xfrm>
         <a:graphic>
           <a:graphicData uri="http://schemas.openxmlformats.org/drawingml/2006/table">
@@ -9546,21 +9834,21 @@
                 <a:tableStyleId>{5C22544A-7EE6-4342-B048-85BDC9FD1C3A}</a:tableStyleId>
               </a:tblPr>
               <a:tblGrid>
-                <a:gridCol w="1645920"/>
-                <a:gridCol w="731520"/>
-                <a:gridCol w="731520"/>
-                <a:gridCol w="731520"/>
-                <a:gridCol w="731520"/>
+                <a:gridCol w="1463040"/>
+                <a:gridCol w="548640"/>
+                <a:gridCol w="548640"/>
+                <a:gridCol w="548640"/>
+                <a:gridCol w="548640"/>
                 <a:gridCol w="1097280"/>
               </a:tblGrid>
-              <a:tr h="571500">
+              <a:tr h="438912">
                 <a:tc>
                   <a:txBody>
                     <a:bodyPr/>
                     <a:lstStyle/>
                     <a:p>
                       <a:pPr algn="ctr">
-                        <a:defRPr sz="1100" b="1">
+                        <a:defRPr sz="1000" b="1">
                           <a:solidFill>
                             <a:srgbClr val="FFFFFF"/>
                           </a:solidFill>
@@ -9583,14 +9871,14 @@
                     <a:lstStyle/>
                     <a:p>
                       <a:pPr algn="ctr">
-                        <a:defRPr sz="1100" b="1">
+                        <a:defRPr sz="1000" b="1">
                           <a:solidFill>
                             <a:srgbClr val="FFFFFF"/>
                           </a:solidFill>
                         </a:defRPr>
                       </a:pPr>
                       <a:r>
-                        <a:t>Overall</a:t>
+                        <a:t>All</a:t>
                       </a:r>
                     </a:p>
                   </a:txBody>
@@ -9606,7 +9894,7 @@
                     <a:lstStyle/>
                     <a:p>
                       <a:pPr algn="ctr">
-                        <a:defRPr sz="1100" b="1">
+                        <a:defRPr sz="1000" b="1">
                           <a:solidFill>
                             <a:srgbClr val="FFFFFF"/>
                           </a:solidFill>
@@ -9629,7 +9917,7 @@
                     <a:lstStyle/>
                     <a:p>
                       <a:pPr algn="ctr">
-                        <a:defRPr sz="1100" b="1">
+                        <a:defRPr sz="1000" b="1">
                           <a:solidFill>
                             <a:srgbClr val="FFFFFF"/>
                           </a:solidFill>
@@ -9652,7 +9940,7 @@
                     <a:lstStyle/>
                     <a:p>
                       <a:pPr algn="ctr">
-                        <a:defRPr sz="1100" b="1">
+                        <a:defRPr sz="1000" b="1">
                           <a:solidFill>
                             <a:srgbClr val="FFFFFF"/>
                           </a:solidFill>
@@ -9675,7 +9963,7 @@
                     <a:lstStyle/>
                     <a:p>
                       <a:pPr algn="ctr">
-                        <a:defRPr sz="1100" b="1">
+                        <a:defRPr sz="1000" b="1">
                           <a:solidFill>
                             <a:srgbClr val="FFFFFF"/>
                           </a:solidFill>
@@ -9693,14 +9981,14 @@
                   </a:tcPr>
                 </a:tc>
               </a:tr>
-              <a:tr h="571500">
-                <a:tc>
-                  <a:txBody>
-                    <a:bodyPr/>
-                    <a:lstStyle/>
-                    <a:p>
-                      <a:pPr>
-                        <a:defRPr sz="1100">
+              <a:tr h="438912">
+                <a:tc>
+                  <a:txBody>
+                    <a:bodyPr/>
+                    <a:lstStyle/>
+                    <a:p>
+                      <a:pPr>
+                        <a:defRPr sz="1000">
                           <a:solidFill>
                             <a:srgbClr val="34495E"/>
                           </a:solidFill>
@@ -9719,7 +10007,7 @@
                     <a:lstStyle/>
                     <a:p>
                       <a:pPr>
-                        <a:defRPr sz="1100">
+                        <a:defRPr sz="1000">
                           <a:solidFill>
                             <a:srgbClr val="34495E"/>
                           </a:solidFill>
@@ -9738,7 +10026,7 @@
                     <a:lstStyle/>
                     <a:p>
                       <a:pPr>
-                        <a:defRPr sz="1100">
+                        <a:defRPr sz="1000">
                           <a:solidFill>
                             <a:srgbClr val="34495E"/>
                           </a:solidFill>
@@ -9757,7 +10045,7 @@
                     <a:lstStyle/>
                     <a:p>
                       <a:pPr>
-                        <a:defRPr sz="1100">
+                        <a:defRPr sz="1000">
                           <a:solidFill>
                             <a:srgbClr val="34495E"/>
                           </a:solidFill>
@@ -9776,7 +10064,7 @@
                     <a:lstStyle/>
                     <a:p>
                       <a:pPr>
-                        <a:defRPr sz="1100">
+                        <a:defRPr sz="1000">
                           <a:solidFill>
                             <a:srgbClr val="34495E"/>
                           </a:solidFill>
@@ -9795,7 +10083,7 @@
                     <a:lstStyle/>
                     <a:p>
                       <a:pPr>
-                        <a:defRPr sz="1100">
+                        <a:defRPr sz="1000">
                           <a:solidFill>
                             <a:srgbClr val="34495E"/>
                           </a:solidFill>
@@ -9809,14 +10097,14 @@
                   <a:tcPr/>
                 </a:tc>
               </a:tr>
-              <a:tr h="571500">
-                <a:tc>
-                  <a:txBody>
-                    <a:bodyPr/>
-                    <a:lstStyle/>
-                    <a:p>
-                      <a:pPr>
-                        <a:defRPr sz="1100">
+              <a:tr h="438912">
+                <a:tc>
+                  <a:txBody>
+                    <a:bodyPr/>
+                    <a:lstStyle/>
+                    <a:p>
+                      <a:pPr>
+                        <a:defRPr sz="1000">
                           <a:solidFill>
                             <a:srgbClr val="34495E"/>
                           </a:solidFill>
@@ -9839,7 +10127,7 @@
                     <a:lstStyle/>
                     <a:p>
                       <a:pPr>
-                        <a:defRPr sz="1100">
+                        <a:defRPr sz="1000">
                           <a:solidFill>
                             <a:srgbClr val="34495E"/>
                           </a:solidFill>
@@ -9862,7 +10150,7 @@
                     <a:lstStyle/>
                     <a:p>
                       <a:pPr>
-                        <a:defRPr sz="1100">
+                        <a:defRPr sz="1000">
                           <a:solidFill>
                             <a:srgbClr val="34495E"/>
                           </a:solidFill>
@@ -9885,7 +10173,7 @@
                     <a:lstStyle/>
                     <a:p>
                       <a:pPr>
-                        <a:defRPr sz="1100">
+                        <a:defRPr sz="1000">
                           <a:solidFill>
                             <a:srgbClr val="34495E"/>
                           </a:solidFill>
@@ -9908,7 +10196,7 @@
                     <a:lstStyle/>
                     <a:p>
                       <a:pPr>
-                        <a:defRPr sz="1100">
+                        <a:defRPr sz="1000">
                           <a:solidFill>
                             <a:srgbClr val="34495E"/>
                           </a:solidFill>
@@ -9931,7 +10219,7 @@
                     <a:lstStyle/>
                     <a:p>
                       <a:pPr>
-                        <a:defRPr sz="1100">
+                        <a:defRPr sz="1000">
                           <a:solidFill>
                             <a:srgbClr val="34495E"/>
                           </a:solidFill>
@@ -9949,21 +10237,21 @@
                   </a:tcPr>
                 </a:tc>
               </a:tr>
-              <a:tr h="571500">
-                <a:tc>
-                  <a:txBody>
-                    <a:bodyPr/>
-                    <a:lstStyle/>
-                    <a:p>
-                      <a:pPr>
-                        <a:defRPr sz="1100">
-                          <a:solidFill>
-                            <a:srgbClr val="34495E"/>
-                          </a:solidFill>
-                        </a:defRPr>
-                      </a:pPr>
-                      <a:r>
-                        <a:t>Stand 8</a:t>
+              <a:tr h="438912">
+                <a:tc>
+                  <a:txBody>
+                    <a:bodyPr/>
+                    <a:lstStyle/>
+                    <a:p>
+                      <a:pPr>
+                        <a:defRPr sz="1000">
+                          <a:solidFill>
+                            <a:srgbClr val="34495E"/>
+                          </a:solidFill>
+                        </a:defRPr>
+                      </a:pPr>
+                      <a:r>
+                        <a:t>Stand 8 Torque</a:t>
                       </a:r>
                     </a:p>
                   </a:txBody>
@@ -9975,7 +10263,7 @@
                     <a:lstStyle/>
                     <a:p>
                       <a:pPr>
-                        <a:defRPr sz="1100">
+                        <a:defRPr sz="1000">
                           <a:solidFill>
                             <a:srgbClr val="34495E"/>
                           </a:solidFill>
@@ -9994,7 +10282,7 @@
                     <a:lstStyle/>
                     <a:p>
                       <a:pPr>
-                        <a:defRPr sz="1100">
+                        <a:defRPr sz="1000">
                           <a:solidFill>
                             <a:srgbClr val="34495E"/>
                           </a:solidFill>
@@ -10013,7 +10301,7 @@
                     <a:lstStyle/>
                     <a:p>
                       <a:pPr>
-                        <a:defRPr sz="1100">
+                        <a:defRPr sz="1000">
                           <a:solidFill>
                             <a:srgbClr val="34495E"/>
                           </a:solidFill>
@@ -10032,7 +10320,7 @@
                     <a:lstStyle/>
                     <a:p>
                       <a:pPr>
-                        <a:defRPr sz="1100">
+                        <a:defRPr sz="1000">
                           <a:solidFill>
                             <a:srgbClr val="34495E"/>
                           </a:solidFill>
@@ -10051,7 +10339,7 @@
                     <a:lstStyle/>
                     <a:p>
                       <a:pPr>
-                        <a:defRPr sz="1100">
+                        <a:defRPr sz="1000">
                           <a:solidFill>
                             <a:srgbClr val="34495E"/>
                           </a:solidFill>
@@ -10063,6 +10351,146 @@
                     </a:p>
                   </a:txBody>
                   <a:tcPr/>
+                </a:tc>
+              </a:tr>
+              <a:tr h="438912">
+                <a:tc>
+                  <a:txBody>
+                    <a:bodyPr/>
+                    <a:lstStyle/>
+                    <a:p>
+                      <a:pPr>
+                        <a:defRPr sz="1000">
+                          <a:solidFill>
+                            <a:srgbClr val="34495E"/>
+                          </a:solidFill>
+                        </a:defRPr>
+                      </a:pPr>
+                      <a:r>
+                        <a:t>FB Slave Torque</a:t>
+                      </a:r>
+                    </a:p>
+                  </a:txBody>
+                  <a:tcPr>
+                    <a:solidFill>
+                      <a:srgbClr val="EBF5FB"/>
+                    </a:solidFill>
+                  </a:tcPr>
+                </a:tc>
+                <a:tc>
+                  <a:txBody>
+                    <a:bodyPr/>
+                    <a:lstStyle/>
+                    <a:p>
+                      <a:pPr>
+                        <a:defRPr sz="1000">
+                          <a:solidFill>
+                            <a:srgbClr val="34495E"/>
+                          </a:solidFill>
+                        </a:defRPr>
+                      </a:pPr>
+                      <a:r>
+                        <a:t>4th</a:t>
+                      </a:r>
+                    </a:p>
+                  </a:txBody>
+                  <a:tcPr>
+                    <a:solidFill>
+                      <a:srgbClr val="EBF5FB"/>
+                    </a:solidFill>
+                  </a:tcPr>
+                </a:tc>
+                <a:tc>
+                  <a:txBody>
+                    <a:bodyPr/>
+                    <a:lstStyle/>
+                    <a:p>
+                      <a:pPr>
+                        <a:defRPr sz="1000">
+                          <a:solidFill>
+                            <a:srgbClr val="34495E"/>
+                          </a:solidFill>
+                        </a:defRPr>
+                      </a:pPr>
+                      <a:r>
+                        <a:t>3rd</a:t>
+                      </a:r>
+                    </a:p>
+                  </a:txBody>
+                  <a:tcPr>
+                    <a:solidFill>
+                      <a:srgbClr val="EBF5FB"/>
+                    </a:solidFill>
+                  </a:tcPr>
+                </a:tc>
+                <a:tc>
+                  <a:txBody>
+                    <a:bodyPr/>
+                    <a:lstStyle/>
+                    <a:p>
+                      <a:pPr>
+                        <a:defRPr sz="1000">
+                          <a:solidFill>
+                            <a:srgbClr val="34495E"/>
+                          </a:solidFill>
+                        </a:defRPr>
+                      </a:pPr>
+                      <a:r>
+                        <a:t>6th</a:t>
+                      </a:r>
+                    </a:p>
+                  </a:txBody>
+                  <a:tcPr>
+                    <a:solidFill>
+                      <a:srgbClr val="EBF5FB"/>
+                    </a:solidFill>
+                  </a:tcPr>
+                </a:tc>
+                <a:tc>
+                  <a:txBody>
+                    <a:bodyPr/>
+                    <a:lstStyle/>
+                    <a:p>
+                      <a:pPr>
+                        <a:defRPr sz="1000">
+                          <a:solidFill>
+                            <a:srgbClr val="34495E"/>
+                          </a:solidFill>
+                        </a:defRPr>
+                      </a:pPr>
+                      <a:r>
+                        <a:t>6th</a:t>
+                      </a:r>
+                    </a:p>
+                  </a:txBody>
+                  <a:tcPr>
+                    <a:solidFill>
+                      <a:srgbClr val="EBF5FB"/>
+                    </a:solidFill>
+                  </a:tcPr>
+                </a:tc>
+                <a:tc>
+                  <a:txBody>
+                    <a:bodyPr/>
+                    <a:lstStyle/>
+                    <a:p>
+                      <a:pPr>
+                        <a:defRPr sz="1000">
+                          <a:solidFill>
+                            <a:srgbClr val="34495E"/>
+                          </a:solidFill>
+                        </a:defRPr>
+                      </a:pPr>
+                      <a:r>
+                        <a:t>Consistent</a:t>
+                      </a:r>
+                    </a:p>
+                  </a:txBody>
+                  <a:tcPr>
+                    <a:solidFill>
+                      <a:srgbClr val="EBF5FB"/>
+                    </a:solidFill>
+                  </a:tcPr>
                 </a:tc>
               </a:tr>
             </a:tbl>
@@ -10077,7 +10505,7 @@
         </p:nvSpPr>
         <p:spPr>
           <a:xfrm>
-            <a:off x="6217920" y="3840480"/>
+            <a:off x="6217920" y="3749039"/>
             <a:ext cx="5486400" cy="2743200"/>
           </a:xfrm>
           <a:prstGeom prst="rect">
@@ -10092,7 +10520,7 @@
           <a:lstStyle/>
           <a:p>
             <a:pPr algn="l">
-              <a:defRPr sz="1300" b="0">
+              <a:defRPr sz="1200" b="0">
                 <a:solidFill>
                   <a:srgbClr val="34495E"/>
                 </a:solidFill>
@@ -10101,26 +10529,26 @@
           </a:p>
           <a:p>
             <a:pPr>
-              <a:defRPr sz="1400" b="1">
+              <a:defRPr sz="1300" b="1">
                 <a:solidFill>
                   <a:srgbClr val="27AE60"/>
                 </a:solidFill>
               </a:defRPr>
             </a:pPr>
             <a:r>
-              <a:t>PR3 Torque converges as #1 regardless of grade</a:t>
+              <a:t>PR3 Torque: #1 regardless of grade — most reliable tag</a:t>
             </a:r>
           </a:p>
           <a:p>
             <a:pPr>
-              <a:defRPr sz="1300" b="0">
+              <a:defRPr sz="1200" b="0">
                 <a:solidFill>
                   <a:srgbClr val="34495E"/>
                 </a:solidFill>
               </a:defRPr>
             </a:pPr>
             <a:r>
-              <a:t>MAIN_GAS_FLOW: strongest for D4 grade (rho=-0.185)</a:t>
+              <a:t>MAIN_GAS_FLOW: strongest for D4 (rho=-0.185)</a:t>
             </a:r>
           </a:p>
           <a:p>
@@ -10132,19 +10560,19 @@
               </a:defRPr>
             </a:pPr>
             <a:r>
-              <a:t>B5: only 2 defects — excluded from analysis</a:t>
+              <a:t>B5: only 2 defects — excluded from grade analysis</a:t>
             </a:r>
           </a:p>
           <a:p>
             <a:pPr>
-              <a:defRPr sz="1200" b="0">
+              <a:defRPr sz="1100" b="0">
                 <a:solidFill>
                   <a:srgbClr val="7F8C8D"/>
                 </a:solidFill>
               </a:defRPr>
             </a:pPr>
             <a:r>
-              <a:t>Data: 4,952 coils matched with IBA (100% match rate)</a:t>
+              <a:t>Coil-IBA matching: 4,952 coils, 100% match rate</a:t>
             </a:r>
           </a:p>
         </p:txBody>
@@ -10211,11 +10639,11 @@
           </a:fontRef>
         </p:style>
         <p:txBody>
-          <a:bodyPr rtlCol="0" anchor="ctr" wrap="square" lIns="457200" tIns="137160"/>
+          <a:bodyPr rtlCol="0" anchor="ctr" wrap="square" lIns="457200" tIns="109728"/>
           <a:lstStyle/>
           <a:p>
             <a:pPr algn="l">
-              <a:defRPr sz="2800" b="1">
+              <a:defRPr sz="2600" b="1">
                 <a:solidFill>
                   <a:srgbClr val="FFFFFF"/>
                 </a:solidFill>
@@ -10226,8 +10654,8 @@
             </a:r>
           </a:p>
           <a:p>
-            <a:pPr algn="l">
-              <a:defRPr sz="1600">
+            <a:pPr>
+              <a:defRPr sz="1400">
                 <a:solidFill>
                   <a:srgbClr val="BDC3C7"/>
                 </a:solidFill>
@@ -10256,7 +10684,7 @@
         <p:spPr>
           <a:xfrm>
             <a:off x="274320" y="1280160"/>
-            <a:ext cx="5760720" cy="3813571"/>
+            <a:ext cx="5486400" cy="3631972"/>
           </a:xfrm>
           <a:prstGeom prst="rect">
             <a:avLst/>
@@ -10273,7 +10701,7 @@
         </p:nvGraphicFramePr>
         <p:xfrm>
           <a:off x="6217920" y="1371600"/>
-          <a:ext cx="5669280" cy="4114800"/>
+          <a:ext cx="5029200" cy="3474720"/>
         </p:xfrm>
         <a:graphic>
           <a:graphicData uri="http://schemas.openxmlformats.org/drawingml/2006/table">
@@ -10282,19 +10710,19 @@
                 <a:tableStyleId>{5C22544A-7EE6-4342-B048-85BDC9FD1C3A}</a:tableStyleId>
               </a:tblPr>
               <a:tblGrid>
-                <a:gridCol w="1371600"/>
-                <a:gridCol w="640080"/>
-                <a:gridCol w="1828800"/>
-                <a:gridCol w="1828800"/>
+                <a:gridCol w="1188720"/>
+                <a:gridCol w="548640"/>
+                <a:gridCol w="1645920"/>
+                <a:gridCol w="1645920"/>
               </a:tblGrid>
-              <a:tr h="822960">
+              <a:tr h="694944">
                 <a:tc>
                   <a:txBody>
                     <a:bodyPr/>
                     <a:lstStyle/>
                     <a:p>
                       <a:pPr algn="ctr">
-                        <a:defRPr sz="1100" b="1">
+                        <a:defRPr sz="1000" b="1">
                           <a:solidFill>
                             <a:srgbClr val="FFFFFF"/>
                           </a:solidFill>
@@ -10317,7 +10745,7 @@
                     <a:lstStyle/>
                     <a:p>
                       <a:pPr algn="ctr">
-                        <a:defRPr sz="1100" b="1">
+                        <a:defRPr sz="1000" b="1">
                           <a:solidFill>
                             <a:srgbClr val="FFFFFF"/>
                           </a:solidFill>
@@ -10340,7 +10768,7 @@
                     <a:lstStyle/>
                     <a:p>
                       <a:pPr algn="ctr">
-                        <a:defRPr sz="1100" b="1">
+                        <a:defRPr sz="1000" b="1">
                           <a:solidFill>
                             <a:srgbClr val="FFFFFF"/>
                           </a:solidFill>
@@ -10363,7 +10791,7 @@
                     <a:lstStyle/>
                     <a:p>
                       <a:pPr algn="ctr">
-                        <a:defRPr sz="1100" b="1">
+                        <a:defRPr sz="1000" b="1">
                           <a:solidFill>
                             <a:srgbClr val="FFFFFF"/>
                           </a:solidFill>
@@ -10381,21 +10809,21 @@
                   </a:tcPr>
                 </a:tc>
               </a:tr>
-              <a:tr h="822960">
-                <a:tc>
-                  <a:txBody>
-                    <a:bodyPr/>
-                    <a:lstStyle/>
-                    <a:p>
-                      <a:pPr>
-                        <a:defRPr sz="1100">
-                          <a:solidFill>
-                            <a:srgbClr val="34495E"/>
-                          </a:solidFill>
-                        </a:defRPr>
-                      </a:pPr>
-                      <a:r>
-                        <a:t>A (Consensus)</a:t>
+              <a:tr h="694944">
+                <a:tc>
+                  <a:txBody>
+                    <a:bodyPr/>
+                    <a:lstStyle/>
+                    <a:p>
+                      <a:pPr>
+                        <a:defRPr sz="1000">
+                          <a:solidFill>
+                            <a:srgbClr val="34495E"/>
+                          </a:solidFill>
+                        </a:defRPr>
+                      </a:pPr>
+                      <a:r>
+                        <a:t>A Consensus</a:t>
                       </a:r>
                     </a:p>
                   </a:txBody>
@@ -10407,7 +10835,7 @@
                     <a:lstStyle/>
                     <a:p>
                       <a:pPr>
-                        <a:defRPr sz="1100">
+                        <a:defRPr sz="1000">
                           <a:solidFill>
                             <a:srgbClr val="34495E"/>
                           </a:solidFill>
@@ -10426,19 +10854,19 @@
                     <a:lstStyle/>
                     <a:p>
                       <a:pPr>
-                        <a:defRPr sz="1100">
-                          <a:solidFill>
-                            <a:srgbClr val="34495E"/>
-                          </a:solidFill>
-                        </a:defRPr>
-                      </a:pPr>
-                      <a:r>
-                        <a:t>Both methods agree,</a:t>
-                      </a:r>
-                    </a:p>
-                    <a:p>
-                      <a:pPr>
-                        <a:defRPr sz="1100">
+                        <a:defRPr sz="1000">
+                          <a:solidFill>
+                            <a:srgbClr val="34495E"/>
+                          </a:solidFill>
+                        </a:defRPr>
+                      </a:pPr>
+                      <a:r>
+                        <a:t>Both agree,</a:t>
+                      </a:r>
+                    </a:p>
+                    <a:p>
+                      <a:pPr>
+                        <a:defRPr sz="1000">
                           <a:solidFill>
                             <a:srgbClr val="34495E"/>
                           </a:solidFill>
@@ -10457,7 +10885,7 @@
                     <a:lstStyle/>
                     <a:p>
                       <a:pPr>
-                        <a:defRPr sz="1100">
+                        <a:defRPr sz="1000">
                           <a:solidFill>
                             <a:srgbClr val="34495E"/>
                           </a:solidFill>
@@ -10471,21 +10899,21 @@
                   <a:tcPr/>
                 </a:tc>
               </a:tr>
-              <a:tr h="822960">
-                <a:tc>
-                  <a:txBody>
-                    <a:bodyPr/>
-                    <a:lstStyle/>
-                    <a:p>
-                      <a:pPr>
-                        <a:defRPr sz="1100">
-                          <a:solidFill>
-                            <a:srgbClr val="34495E"/>
-                          </a:solidFill>
-                        </a:defRPr>
-                      </a:pPr>
-                      <a:r>
-                        <a:t>B (Stat Alarm)</a:t>
+              <a:tr h="694944">
+                <a:tc>
+                  <a:txBody>
+                    <a:bodyPr/>
+                    <a:lstStyle/>
+                    <a:p>
+                      <a:pPr>
+                        <a:defRPr sz="1000">
+                          <a:solidFill>
+                            <a:srgbClr val="34495E"/>
+                          </a:solidFill>
+                        </a:defRPr>
+                      </a:pPr>
+                      <a:r>
+                        <a:t>B Stat Alarm</a:t>
                       </a:r>
                     </a:p>
                   </a:txBody>
@@ -10501,7 +10929,7 @@
                     <a:lstStyle/>
                     <a:p>
                       <a:pPr>
-                        <a:defRPr sz="1100">
+                        <a:defRPr sz="1000">
                           <a:solidFill>
                             <a:srgbClr val="34495E"/>
                           </a:solidFill>
@@ -10524,19 +10952,19 @@
                     <a:lstStyle/>
                     <a:p>
                       <a:pPr>
-                        <a:defRPr sz="1100">
-                          <a:solidFill>
-                            <a:srgbClr val="34495E"/>
-                          </a:solidFill>
-                        </a:defRPr>
-                      </a:pPr>
-                      <a:r>
-                        <a:t>Stat only says risk,</a:t>
-                      </a:r>
-                    </a:p>
-                    <a:p>
-                      <a:pPr>
-                        <a:defRPr sz="1100">
+                        <a:defRPr sz="1000">
+                          <a:solidFill>
+                            <a:srgbClr val="34495E"/>
+                          </a:solidFill>
+                        </a:defRPr>
+                      </a:pPr>
+                      <a:r>
+                        <a:t>Stat only risk,</a:t>
+                      </a:r>
+                    </a:p>
+                    <a:p>
+                      <a:pPr>
+                        <a:defRPr sz="1000">
                           <a:solidFill>
                             <a:srgbClr val="34495E"/>
                           </a:solidFill>
@@ -10559,7 +10987,7 @@
                     <a:lstStyle/>
                     <a:p>
                       <a:pPr>
-                        <a:defRPr sz="1100">
+                        <a:defRPr sz="1000">
                           <a:solidFill>
                             <a:srgbClr val="34495E"/>
                           </a:solidFill>
@@ -10571,7 +10999,7 @@
                     </a:p>
                     <a:p>
                       <a:pPr>
-                        <a:defRPr sz="1100">
+                        <a:defRPr sz="1000">
                           <a:solidFill>
                             <a:srgbClr val="34495E"/>
                           </a:solidFill>
@@ -10589,21 +11017,21 @@
                   </a:tcPr>
                 </a:tc>
               </a:tr>
-              <a:tr h="822960">
-                <a:tc>
-                  <a:txBody>
-                    <a:bodyPr/>
-                    <a:lstStyle/>
-                    <a:p>
-                      <a:pPr>
-                        <a:defRPr sz="1100">
-                          <a:solidFill>
-                            <a:srgbClr val="34495E"/>
-                          </a:solidFill>
-                        </a:defRPr>
-                      </a:pPr>
-                      <a:r>
-                        <a:t>C (ML Superior)</a:t>
+              <a:tr h="694944">
+                <a:tc>
+                  <a:txBody>
+                    <a:bodyPr/>
+                    <a:lstStyle/>
+                    <a:p>
+                      <a:pPr>
+                        <a:defRPr sz="1000">
+                          <a:solidFill>
+                            <a:srgbClr val="34495E"/>
+                          </a:solidFill>
+                        </a:defRPr>
+                      </a:pPr>
+                      <a:r>
+                        <a:t>C ML Superior</a:t>
                       </a:r>
                     </a:p>
                   </a:txBody>
@@ -10615,7 +11043,7 @@
                     <a:lstStyle/>
                     <a:p>
                       <a:pPr>
-                        <a:defRPr sz="1100">
+                        <a:defRPr sz="1000">
                           <a:solidFill>
                             <a:srgbClr val="34495E"/>
                           </a:solidFill>
@@ -10634,7 +11062,7 @@
                     <a:lstStyle/>
                     <a:p>
                       <a:pPr>
-                        <a:defRPr sz="1100">
+                        <a:defRPr sz="1000">
                           <a:solidFill>
                             <a:srgbClr val="34495E"/>
                           </a:solidFill>
@@ -10646,7 +11074,7 @@
                     </a:p>
                     <a:p>
                       <a:pPr>
-                        <a:defRPr sz="1100">
+                        <a:defRPr sz="1000">
                           <a:solidFill>
                             <a:srgbClr val="34495E"/>
                           </a:solidFill>
@@ -10665,7 +11093,7 @@
                     <a:lstStyle/>
                     <a:p>
                       <a:pPr>
-                        <a:defRPr sz="1100">
+                        <a:defRPr sz="1000">
                           <a:solidFill>
                             <a:srgbClr val="34495E"/>
                           </a:solidFill>
@@ -10677,7 +11105,7 @@
                     </a:p>
                     <a:p>
                       <a:pPr>
-                        <a:defRPr sz="1100">
+                        <a:defRPr sz="1000">
                           <a:solidFill>
                             <a:srgbClr val="34495E"/>
                           </a:solidFill>
@@ -10691,21 +11119,21 @@
                   <a:tcPr/>
                 </a:tc>
               </a:tr>
-              <a:tr h="822960">
-                <a:tc>
-                  <a:txBody>
-                    <a:bodyPr/>
-                    <a:lstStyle/>
-                    <a:p>
-                      <a:pPr>
-                        <a:defRPr sz="1100">
-                          <a:solidFill>
-                            <a:srgbClr val="34495E"/>
-                          </a:solidFill>
-                        </a:defRPr>
-                      </a:pPr>
-                      <a:r>
-                        <a:t>D (Undetected)</a:t>
+              <a:tr h="694944">
+                <a:tc>
+                  <a:txBody>
+                    <a:bodyPr/>
+                    <a:lstStyle/>
+                    <a:p>
+                      <a:pPr>
+                        <a:defRPr sz="1000">
+                          <a:solidFill>
+                            <a:srgbClr val="34495E"/>
+                          </a:solidFill>
+                        </a:defRPr>
+                      </a:pPr>
+                      <a:r>
+                        <a:t>D Undetected</a:t>
                       </a:r>
                     </a:p>
                   </a:txBody>
@@ -10721,7 +11149,7 @@
                     <a:lstStyle/>
                     <a:p>
                       <a:pPr>
-                        <a:defRPr sz="1100">
+                        <a:defRPr sz="1000">
                           <a:solidFill>
                             <a:srgbClr val="34495E"/>
                           </a:solidFill>
@@ -10744,7 +11172,7 @@
                     <a:lstStyle/>
                     <a:p>
                       <a:pPr>
-                        <a:defRPr sz="1100">
+                        <a:defRPr sz="1000">
                           <a:solidFill>
                             <a:srgbClr val="34495E"/>
                           </a:solidFill>
@@ -10756,7 +11184,7 @@
                     </a:p>
                     <a:p>
                       <a:pPr>
-                        <a:defRPr sz="1100">
+                        <a:defRPr sz="1000">
                           <a:solidFill>
                             <a:srgbClr val="34495E"/>
                           </a:solidFill>
@@ -10779,7 +11207,7 @@
                     <a:lstStyle/>
                     <a:p>
                       <a:pPr>
-                        <a:defRPr sz="1100">
+                        <a:defRPr sz="1000">
                           <a:solidFill>
                             <a:srgbClr val="34495E"/>
                           </a:solidFill>
@@ -10791,7 +11219,7 @@
                     </a:p>
                     <a:p>
                       <a:pPr>
-                        <a:defRPr sz="1100">
+                        <a:defRPr sz="1000">
                           <a:solidFill>
                             <a:srgbClr val="34495E"/>
                           </a:solidFill>
@@ -10821,8 +11249,8 @@
         </p:nvSpPr>
         <p:spPr>
           <a:xfrm>
-            <a:off x="6217920" y="5669280"/>
-            <a:ext cx="5486400" cy="914400"/>
+            <a:off x="6217920" y="5029200"/>
+            <a:ext cx="5486400" cy="1554480"/>
           </a:xfrm>
           <a:prstGeom prst="rect">
             <a:avLst/>
@@ -10836,7 +11264,7 @@
           <a:lstStyle/>
           <a:p>
             <a:pPr algn="l">
-              <a:defRPr sz="1300" b="0">
+              <a:defRPr sz="1200" b="0">
                 <a:solidFill>
                   <a:srgbClr val="34495E"/>
                 </a:solidFill>
@@ -10852,7 +11280,7 @@
               </a:defRPr>
             </a:pPr>
             <a:r>
-              <a:t>Using Stat alone: 14% false alarm rate (18/127 days)</a:t>
+              <a:t>Stat alone: 14% false alarm rate (18/127 days)</a:t>
             </a:r>
           </a:p>
           <a:p>
@@ -10864,7 +11292,19 @@
               </a:defRPr>
             </a:pPr>
             <a:r>
-              <a:t>Combining both: 0% undetected (Type D = 0)</a:t>
+              <a:t>Combined: 0% undetected (Type D = 0)</a:t>
+            </a:r>
+          </a:p>
+          <a:p>
+            <a:pPr>
+              <a:defRPr sz="1200" b="0">
+                <a:solidFill>
+                  <a:srgbClr val="7F8C8D"/>
+                </a:solidFill>
+              </a:defRPr>
+            </a:pPr>
+            <a:r>
+              <a:t>"Stat and ML answer different questions"</a:t>
             </a:r>
           </a:p>
         </p:txBody>
@@ -10931,30 +11371,30 @@
           </a:fontRef>
         </p:style>
         <p:txBody>
-          <a:bodyPr rtlCol="0" anchor="ctr" wrap="square" lIns="457200" tIns="137160"/>
+          <a:bodyPr rtlCol="0" anchor="ctr" wrap="square" lIns="457200" tIns="109728"/>
           <a:lstStyle/>
           <a:p>
             <a:pPr algn="l">
-              <a:defRPr sz="2800" b="1">
+              <a:defRPr sz="2600" b="1">
                 <a:solidFill>
                   <a:srgbClr val="FFFFFF"/>
                 </a:solidFill>
               </a:defRPr>
             </a:pPr>
             <a:r>
-              <a:t>Q5: SHAP — ML Decision Process Transparency</a:t>
-            </a:r>
-          </a:p>
-          <a:p>
-            <a:pPr algn="l">
-              <a:defRPr sz="1600">
+              <a:t>Q5: SHAP — ML Decision Transparency</a:t>
+            </a:r>
+          </a:p>
+          <a:p>
+            <a:pPr>
+              <a:defRPr sz="1400">
                 <a:solidFill>
                   <a:srgbClr val="BDC3C7"/>
                 </a:solidFill>
               </a:defRPr>
             </a:pPr>
             <a:r>
-              <a:t>How the ML model makes predictions (sensor tags only)</a:t>
+              <a:t>Sensor tags only (defect features excluded)</a:t>
             </a:r>
           </a:p>
         </p:txBody>
@@ -10976,7 +11416,7 @@
         <p:spPr>
           <a:xfrm>
             <a:off x="274320" y="1280160"/>
-            <a:ext cx="5760720" cy="4369998"/>
+            <a:ext cx="5669280" cy="4300632"/>
           </a:xfrm>
           <a:prstGeom prst="rect">
             <a:avLst/>
@@ -11000,7 +11440,7 @@
         <p:spPr>
           <a:xfrm>
             <a:off x="6217920" y="1280160"/>
-            <a:ext cx="5760720" cy="3268101"/>
+            <a:ext cx="5669280" cy="3216226"/>
           </a:xfrm>
           <a:prstGeom prst="rect">
             <a:avLst/>
@@ -11069,30 +11509,30 @@
           </a:fontRef>
         </p:style>
         <p:txBody>
-          <a:bodyPr rtlCol="0" anchor="ctr" wrap="square" lIns="457200" tIns="137160"/>
+          <a:bodyPr rtlCol="0" anchor="ctr" wrap="square" lIns="457200" tIns="109728"/>
           <a:lstStyle/>
           <a:p>
             <a:pPr algn="l">
-              <a:defRPr sz="2800" b="1">
+              <a:defRPr sz="2600" b="1">
                 <a:solidFill>
                   <a:srgbClr val="FFFFFF"/>
                 </a:solidFill>
               </a:defRPr>
             </a:pPr>
             <a:r>
-              <a:t>Q1+Q2: Causality Analysis — Forward vs Reverse</a:t>
-            </a:r>
-          </a:p>
-          <a:p>
-            <a:pPr algn="l">
-              <a:defRPr sz="1600">
+              <a:t>Q1+Q2: Causality — Forward vs Reverse</a:t>
+            </a:r>
+          </a:p>
+          <a:p>
+            <a:pPr>
+              <a:defRPr sz="1400">
                 <a:solidFill>
                   <a:srgbClr val="BDC3C7"/>
                 </a:solidFill>
               </a:defRPr>
             </a:pPr>
             <a:r>
-              <a:t>Furnace leads, Torque follows</a:t>
+              <a:t>3 forward confirmed + 3 reverse confirmed</a:t>
             </a:r>
           </a:p>
         </p:txBody>
@@ -11107,7 +11547,7 @@
         </p:nvGraphicFramePr>
         <p:xfrm>
           <a:off x="274320" y="1371600"/>
-          <a:ext cx="10058400" cy="4114800"/>
+          <a:ext cx="9144000" cy="4572000"/>
         </p:xfrm>
         <a:graphic>
           <a:graphicData uri="http://schemas.openxmlformats.org/drawingml/2006/table">
@@ -11116,19 +11556,19 @@
                 <a:tableStyleId>{5C22544A-7EE6-4342-B048-85BDC9FD1C3A}</a:tableStyleId>
               </a:tblPr>
               <a:tblGrid>
-                <a:gridCol w="3200400"/>
-                <a:gridCol w="1371600"/>
-                <a:gridCol w="3200400"/>
+                <a:gridCol w="2743200"/>
+                <a:gridCol w="1188720"/>
+                <a:gridCol w="2926080"/>
                 <a:gridCol w="2286000"/>
               </a:tblGrid>
-              <a:tr h="587828">
+              <a:tr h="653142">
                 <a:tc>
                   <a:txBody>
                     <a:bodyPr/>
                     <a:lstStyle/>
                     <a:p>
                       <a:pPr algn="ctr">
-                        <a:defRPr sz="1100" b="1">
+                        <a:defRPr sz="1000" b="1">
                           <a:solidFill>
                             <a:srgbClr val="FFFFFF"/>
                           </a:solidFill>
@@ -11151,7 +11591,7 @@
                     <a:lstStyle/>
                     <a:p>
                       <a:pPr algn="ctr">
-                        <a:defRPr sz="1100" b="1">
+                        <a:defRPr sz="1000" b="1">
                           <a:solidFill>
                             <a:srgbClr val="FFFFFF"/>
                           </a:solidFill>
@@ -11174,7 +11614,7 @@
                     <a:lstStyle/>
                     <a:p>
                       <a:pPr algn="ctr">
-                        <a:defRPr sz="1100" b="1">
+                        <a:defRPr sz="1000" b="1">
                           <a:solidFill>
                             <a:srgbClr val="FFFFFF"/>
                           </a:solidFill>
@@ -11197,7 +11637,7 @@
                     <a:lstStyle/>
                     <a:p>
                       <a:pPr algn="ctr">
-                        <a:defRPr sz="1100" b="1">
+                        <a:defRPr sz="1000" b="1">
                           <a:solidFill>
                             <a:srgbClr val="FFFFFF"/>
                           </a:solidFill>
@@ -11215,21 +11655,33 @@
                   </a:tcPr>
                 </a:tc>
               </a:tr>
-              <a:tr h="587828">
-                <a:tc>
-                  <a:txBody>
-                    <a:bodyPr/>
-                    <a:lstStyle/>
-                    <a:p>
-                      <a:pPr>
-                        <a:defRPr sz="1100">
-                          <a:solidFill>
-                            <a:srgbClr val="34495E"/>
-                          </a:solidFill>
-                        </a:defRPr>
-                      </a:pPr>
-                      <a:r>
-                        <a:t>PR3 Torque deficit -&gt; Torsion</a:t>
+              <a:tr h="653142">
+                <a:tc>
+                  <a:txBody>
+                    <a:bodyPr/>
+                    <a:lstStyle/>
+                    <a:p>
+                      <a:pPr>
+                        <a:defRPr sz="1000">
+                          <a:solidFill>
+                            <a:srgbClr val="34495E"/>
+                          </a:solidFill>
+                        </a:defRPr>
+                      </a:pPr>
+                      <a:r>
+                        <a:t>PR3 Torque deficit</a:t>
+                      </a:r>
+                    </a:p>
+                    <a:p>
+                      <a:pPr>
+                        <a:defRPr sz="1000">
+                          <a:solidFill>
+                            <a:srgbClr val="34495E"/>
+                          </a:solidFill>
+                        </a:defRPr>
+                      </a:pPr>
+                      <a:r>
+                        <a:t>-&gt; Torsion defect</a:t>
                       </a:r>
                     </a:p>
                   </a:txBody>
@@ -11241,7 +11693,7 @@
                     <a:lstStyle/>
                     <a:p>
                       <a:pPr>
-                        <a:defRPr sz="1100">
+                        <a:defRPr sz="1000">
                           <a:solidFill>
                             <a:srgbClr val="34495E"/>
                           </a:solidFill>
@@ -11260,14 +11712,26 @@
                     <a:lstStyle/>
                     <a:p>
                       <a:pPr>
-                        <a:defRPr sz="1100">
-                          <a:solidFill>
-                            <a:srgbClr val="34495E"/>
-                          </a:solidFill>
-                        </a:defRPr>
-                      </a:pPr>
-                      <a:r>
-                        <a:t>RUN p=0.000011, OR=15.7</a:t>
+                        <a:defRPr sz="1000">
+                          <a:solidFill>
+                            <a:srgbClr val="34495E"/>
+                          </a:solidFill>
+                        </a:defRPr>
+                      </a:pPr>
+                      <a:r>
+                        <a:t>RUN p=0.000011</a:t>
+                      </a:r>
+                    </a:p>
+                    <a:p>
+                      <a:pPr>
+                        <a:defRPr sz="1000">
+                          <a:solidFill>
+                            <a:srgbClr val="34495E"/>
+                          </a:solidFill>
+                        </a:defRPr>
+                      </a:pPr>
+                      <a:r>
+                        <a:t>OR=15.7</a:t>
                       </a:r>
                     </a:p>
                   </a:txBody>
@@ -11279,7 +11743,7 @@
                     <a:lstStyle/>
                     <a:p>
                       <a:pPr>
-                        <a:defRPr sz="1100">
+                        <a:defRPr sz="1000">
                           <a:solidFill>
                             <a:srgbClr val="34495E"/>
                           </a:solidFill>
@@ -11293,21 +11757,33 @@
                   <a:tcPr/>
                 </a:tc>
               </a:tr>
-              <a:tr h="587828">
-                <a:tc>
-                  <a:txBody>
-                    <a:bodyPr/>
-                    <a:lstStyle/>
-                    <a:p>
-                      <a:pPr>
-                        <a:defRPr sz="1100">
-                          <a:solidFill>
-                            <a:srgbClr val="34495E"/>
-                          </a:solidFill>
-                        </a:defRPr>
-                      </a:pPr>
-                      <a:r>
-                        <a:t>Furnace Pressure drop -&gt; Defect</a:t>
+              <a:tr h="653142">
+                <a:tc>
+                  <a:txBody>
+                    <a:bodyPr/>
+                    <a:lstStyle/>
+                    <a:p>
+                      <a:pPr>
+                        <a:defRPr sz="1000">
+                          <a:solidFill>
+                            <a:srgbClr val="34495E"/>
+                          </a:solidFill>
+                        </a:defRPr>
+                      </a:pPr>
+                      <a:r>
+                        <a:t>Furnace Pressure drop</a:t>
+                      </a:r>
+                    </a:p>
+                    <a:p>
+                      <a:pPr>
+                        <a:defRPr sz="1000">
+                          <a:solidFill>
+                            <a:srgbClr val="34495E"/>
+                          </a:solidFill>
+                        </a:defRPr>
+                      </a:pPr>
+                      <a:r>
+                        <a:t>-&gt; Defect</a:t>
                       </a:r>
                     </a:p>
                   </a:txBody>
@@ -11323,7 +11799,7 @@
                     <a:lstStyle/>
                     <a:p>
                       <a:pPr>
-                        <a:defRPr sz="1100">
+                        <a:defRPr sz="1000">
                           <a:solidFill>
                             <a:srgbClr val="34495E"/>
                           </a:solidFill>
@@ -11346,14 +11822,26 @@
                     <a:lstStyle/>
                     <a:p>
                       <a:pPr>
-                        <a:defRPr sz="1100">
-                          <a:solidFill>
-                            <a:srgbClr val="34495E"/>
-                          </a:solidFill>
-                        </a:defRPr>
-                      </a:pPr>
-                      <a:r>
-                        <a:t>RUN p=0.000021, all grades</a:t>
+                        <a:defRPr sz="1000">
+                          <a:solidFill>
+                            <a:srgbClr val="34495E"/>
+                          </a:solidFill>
+                        </a:defRPr>
+                      </a:pPr>
+                      <a:r>
+                        <a:t>RUN p=0.000021</a:t>
+                      </a:r>
+                    </a:p>
+                    <a:p>
+                      <a:pPr>
+                        <a:defRPr sz="1000">
+                          <a:solidFill>
+                            <a:srgbClr val="34495E"/>
+                          </a:solidFill>
+                        </a:defRPr>
+                      </a:pPr>
+                      <a:r>
+                        <a:t>All grades consistent</a:t>
                       </a:r>
                     </a:p>
                   </a:txBody>
@@ -11369,7 +11857,7 @@
                     <a:lstStyle/>
                     <a:p>
                       <a:pPr>
-                        <a:defRPr sz="1100">
+                        <a:defRPr sz="1000">
                           <a:solidFill>
                             <a:srgbClr val="34495E"/>
                           </a:solidFill>
@@ -11387,21 +11875,33 @@
                   </a:tcPr>
                 </a:tc>
               </a:tr>
-              <a:tr h="587828">
-                <a:tc>
-                  <a:txBody>
-                    <a:bodyPr/>
-                    <a:lstStyle/>
-                    <a:p>
-                      <a:pPr>
-                        <a:defRPr sz="1100">
-                          <a:solidFill>
-                            <a:srgbClr val="34495E"/>
-                          </a:solidFill>
-                        </a:defRPr>
-                      </a:pPr>
-                      <a:r>
-                        <a:t>TRANS/IDLE -&gt; Coiling defect</a:t>
+              <a:tr h="653142">
+                <a:tc>
+                  <a:txBody>
+                    <a:bodyPr/>
+                    <a:lstStyle/>
+                    <a:p>
+                      <a:pPr>
+                        <a:defRPr sz="1000">
+                          <a:solidFill>
+                            <a:srgbClr val="34495E"/>
+                          </a:solidFill>
+                        </a:defRPr>
+                      </a:pPr>
+                      <a:r>
+                        <a:t>TRANS/IDLE state</a:t>
+                      </a:r>
+                    </a:p>
+                    <a:p>
+                      <a:pPr>
+                        <a:defRPr sz="1000">
+                          <a:solidFill>
+                            <a:srgbClr val="34495E"/>
+                          </a:solidFill>
+                        </a:defRPr>
+                      </a:pPr>
+                      <a:r>
+                        <a:t>-&gt; Coiling defect</a:t>
                       </a:r>
                     </a:p>
                   </a:txBody>
@@ -11413,7 +11913,7 @@
                     <a:lstStyle/>
                     <a:p>
                       <a:pPr>
-                        <a:defRPr sz="1100">
+                        <a:defRPr sz="1000">
                           <a:solidFill>
                             <a:srgbClr val="34495E"/>
                           </a:solidFill>
@@ -11432,14 +11932,26 @@
                     <a:lstStyle/>
                     <a:p>
                       <a:pPr>
-                        <a:defRPr sz="1100">
-                          <a:solidFill>
-                            <a:srgbClr val="34495E"/>
-                          </a:solidFill>
-                        </a:defRPr>
-                      </a:pPr>
-                      <a:r>
-                        <a:t>Defect rate 5.5x higher</a:t>
+                        <a:defRPr sz="1000">
+                          <a:solidFill>
+                            <a:srgbClr val="34495E"/>
+                          </a:solidFill>
+                        </a:defRPr>
+                      </a:pPr>
+                      <a:r>
+                        <a:t>Defect rate 5.5x</a:t>
+                      </a:r>
+                    </a:p>
+                    <a:p>
+                      <a:pPr>
+                        <a:defRPr sz="1000">
+                          <a:solidFill>
+                            <a:srgbClr val="34495E"/>
+                          </a:solidFill>
+                        </a:defRPr>
+                      </a:pPr>
+                      <a:r>
+                        <a:t>higher in non-RUN</a:t>
                       </a:r>
                     </a:p>
                   </a:txBody>
@@ -11451,7 +11963,7 @@
                     <a:lstStyle/>
                     <a:p>
                       <a:pPr>
-                        <a:defRPr sz="1100">
+                        <a:defRPr sz="1000">
                           <a:solidFill>
                             <a:srgbClr val="34495E"/>
                           </a:solidFill>
@@ -11465,21 +11977,33 @@
                   <a:tcPr/>
                 </a:tc>
               </a:tr>
-              <a:tr h="587828">
-                <a:tc>
-                  <a:txBody>
-                    <a:bodyPr/>
-                    <a:lstStyle/>
-                    <a:p>
-                      <a:pPr>
-                        <a:defRPr sz="1100">
-                          <a:solidFill>
-                            <a:srgbClr val="34495E"/>
-                          </a:solidFill>
-                        </a:defRPr>
-                      </a:pPr>
-                      <a:r>
-                        <a:t>Stand Torque variation -&gt; Defect</a:t>
+              <a:tr h="653142">
+                <a:tc>
+                  <a:txBody>
+                    <a:bodyPr/>
+                    <a:lstStyle/>
+                    <a:p>
+                      <a:pPr>
+                        <a:defRPr sz="1000">
+                          <a:solidFill>
+                            <a:srgbClr val="34495E"/>
+                          </a:solidFill>
+                        </a:defRPr>
+                      </a:pPr>
+                      <a:r>
+                        <a:t>Stand Torque variation</a:t>
+                      </a:r>
+                    </a:p>
+                    <a:p>
+                      <a:pPr>
+                        <a:defRPr sz="1000">
+                          <a:solidFill>
+                            <a:srgbClr val="34495E"/>
+                          </a:solidFill>
+                        </a:defRPr>
+                      </a:pPr>
+                      <a:r>
+                        <a:t>-&gt; Defect</a:t>
                       </a:r>
                     </a:p>
                   </a:txBody>
@@ -11495,7 +12019,7 @@
                     <a:lstStyle/>
                     <a:p>
                       <a:pPr>
-                        <a:defRPr sz="1100">
+                        <a:defRPr sz="1000">
                           <a:solidFill>
                             <a:srgbClr val="34495E"/>
                           </a:solidFill>
@@ -11518,14 +12042,26 @@
                     <a:lstStyle/>
                     <a:p>
                       <a:pPr>
-                        <a:defRPr sz="1100">
-                          <a:solidFill>
-                            <a:srgbClr val="34495E"/>
-                          </a:solidFill>
-                        </a:defRPr>
-                      </a:pPr>
-                      <a:r>
-                        <a:t>RUN filter: 0.0% gap (p=0.259)</a:t>
+                        <a:defRPr sz="1000">
+                          <a:solidFill>
+                            <a:srgbClr val="34495E"/>
+                          </a:solidFill>
+                        </a:defRPr>
+                      </a:pPr>
+                      <a:r>
+                        <a:t>RUN: 0.0% gap</a:t>
+                      </a:r>
+                    </a:p>
+                    <a:p>
+                      <a:pPr>
+                        <a:defRPr sz="1000">
+                          <a:solidFill>
+                            <a:srgbClr val="34495E"/>
+                          </a:solidFill>
+                        </a:defRPr>
+                      </a:pPr>
+                      <a:r>
+                        <a:t>p=0.259</a:t>
                       </a:r>
                     </a:p>
                   </a:txBody>
@@ -11541,14 +12077,26 @@
                     <a:lstStyle/>
                     <a:p>
                       <a:pPr>
-                        <a:defRPr sz="1100">
-                          <a:solidFill>
-                            <a:srgbClr val="34495E"/>
-                          </a:solidFill>
-                        </a:defRPr>
-                      </a:pPr>
-                      <a:r>
-                        <a:t>Reverse causality</a:t>
+                        <a:defRPr sz="1000">
+                          <a:solidFill>
+                            <a:srgbClr val="34495E"/>
+                          </a:solidFill>
+                        </a:defRPr>
+                      </a:pPr>
+                      <a:r>
+                        <a:t>Reverse</a:t>
+                      </a:r>
+                    </a:p>
+                    <a:p>
+                      <a:pPr>
+                        <a:defRPr sz="1000">
+                          <a:solidFill>
+                            <a:srgbClr val="34495E"/>
+                          </a:solidFill>
+                        </a:defRPr>
+                      </a:pPr>
+                      <a:r>
+                        <a:t>causality</a:t>
                       </a:r>
                     </a:p>
                   </a:txBody>
@@ -11559,21 +12107,33 @@
                   </a:tcPr>
                 </a:tc>
               </a:tr>
-              <a:tr h="587828">
-                <a:tc>
-                  <a:txBody>
-                    <a:bodyPr/>
-                    <a:lstStyle/>
-                    <a:p>
-                      <a:pPr>
-                        <a:defRPr sz="1100">
-                          <a:solidFill>
-                            <a:srgbClr val="34495E"/>
-                          </a:solidFill>
-                        </a:defRPr>
-                      </a:pPr>
-                      <a:r>
-                        <a:t>Billet Temp +32.5C -&gt; Defect</a:t>
+              <a:tr h="653142">
+                <a:tc>
+                  <a:txBody>
+                    <a:bodyPr/>
+                    <a:lstStyle/>
+                    <a:p>
+                      <a:pPr>
+                        <a:defRPr sz="1000">
+                          <a:solidFill>
+                            <a:srgbClr val="34495E"/>
+                          </a:solidFill>
+                        </a:defRPr>
+                      </a:pPr>
+                      <a:r>
+                        <a:t>Billet Temp +32.5C</a:t>
+                      </a:r>
+                    </a:p>
+                    <a:p>
+                      <a:pPr>
+                        <a:defRPr sz="1000">
+                          <a:solidFill>
+                            <a:srgbClr val="34495E"/>
+                          </a:solidFill>
+                        </a:defRPr>
+                      </a:pPr>
+                      <a:r>
+                        <a:t>-&gt; Defect</a:t>
                       </a:r>
                     </a:p>
                   </a:txBody>
@@ -11585,7 +12145,7 @@
                     <a:lstStyle/>
                     <a:p>
                       <a:pPr>
-                        <a:defRPr sz="1100">
+                        <a:defRPr sz="1000">
                           <a:solidFill>
                             <a:srgbClr val="34495E"/>
                           </a:solidFill>
@@ -11604,14 +12164,26 @@
                     <a:lstStyle/>
                     <a:p>
                       <a:pPr>
-                        <a:defRPr sz="1100">
-                          <a:solidFill>
-                            <a:srgbClr val="34495E"/>
-                          </a:solidFill>
-                        </a:defRPr>
-                      </a:pPr>
-                      <a:r>
-                        <a:t>Coil-level: p=0.877</a:t>
+                        <a:defRPr sz="1000">
+                          <a:solidFill>
+                            <a:srgbClr val="34495E"/>
+                          </a:solidFill>
+                        </a:defRPr>
+                      </a:pPr>
+                      <a:r>
+                        <a:t>Coil-level:</a:t>
+                      </a:r>
+                    </a:p>
+                    <a:p>
+                      <a:pPr>
+                        <a:defRPr sz="1000">
+                          <a:solidFill>
+                            <a:srgbClr val="34495E"/>
+                          </a:solidFill>
+                        </a:defRPr>
+                      </a:pPr>
+                      <a:r>
+                        <a:t>p=0.877</a:t>
                       </a:r>
                     </a:p>
                   </a:txBody>
@@ -11623,35 +12195,59 @@
                     <a:lstStyle/>
                     <a:p>
                       <a:pPr>
-                        <a:defRPr sz="1100">
-                          <a:solidFill>
-                            <a:srgbClr val="34495E"/>
-                          </a:solidFill>
-                        </a:defRPr>
-                      </a:pPr>
-                      <a:r>
-                        <a:t>Reverse causality</a:t>
+                        <a:defRPr sz="1000">
+                          <a:solidFill>
+                            <a:srgbClr val="34495E"/>
+                          </a:solidFill>
+                        </a:defRPr>
+                      </a:pPr>
+                      <a:r>
+                        <a:t>Reverse</a:t>
+                      </a:r>
+                    </a:p>
+                    <a:p>
+                      <a:pPr>
+                        <a:defRPr sz="1000">
+                          <a:solidFill>
+                            <a:srgbClr val="34495E"/>
+                          </a:solidFill>
+                        </a:defRPr>
+                      </a:pPr>
+                      <a:r>
+                        <a:t>causality</a:t>
                       </a:r>
                     </a:p>
                   </a:txBody>
                   <a:tcPr/>
                 </a:tc>
               </a:tr>
-              <a:tr h="587832">
-                <a:tc>
-                  <a:txBody>
-                    <a:bodyPr/>
-                    <a:lstStyle/>
-                    <a:p>
-                      <a:pPr>
-                        <a:defRPr sz="1100">
-                          <a:solidFill>
-                            <a:srgbClr val="34495E"/>
-                          </a:solidFill>
-                        </a:defRPr>
-                      </a:pPr>
-                      <a:r>
-                        <a:t>Furnace Upper Temp -&gt; Defect</a:t>
+              <a:tr h="653148">
+                <a:tc>
+                  <a:txBody>
+                    <a:bodyPr/>
+                    <a:lstStyle/>
+                    <a:p>
+                      <a:pPr>
+                        <a:defRPr sz="1000">
+                          <a:solidFill>
+                            <a:srgbClr val="34495E"/>
+                          </a:solidFill>
+                        </a:defRPr>
+                      </a:pPr>
+                      <a:r>
+                        <a:t>Furnace Upper Temp</a:t>
+                      </a:r>
+                    </a:p>
+                    <a:p>
+                      <a:pPr>
+                        <a:defRPr sz="1000">
+                          <a:solidFill>
+                            <a:srgbClr val="34495E"/>
+                          </a:solidFill>
+                        </a:defRPr>
+                      </a:pPr>
+                      <a:r>
+                        <a:t>-&gt; Defect</a:t>
                       </a:r>
                     </a:p>
                   </a:txBody>
@@ -11667,7 +12263,7 @@
                     <a:lstStyle/>
                     <a:p>
                       <a:pPr>
-                        <a:defRPr sz="1100">
+                        <a:defRPr sz="1000">
                           <a:solidFill>
                             <a:srgbClr val="34495E"/>
                           </a:solidFill>
@@ -11690,14 +12286,26 @@
                     <a:lstStyle/>
                     <a:p>
                       <a:pPr>
-                        <a:defRPr sz="1100">
-                          <a:solidFill>
-                            <a:srgbClr val="34495E"/>
-                          </a:solidFill>
-                        </a:defRPr>
-                      </a:pPr>
-                      <a:r>
-                        <a:t>Coil-level: p=0.174</a:t>
+                        <a:defRPr sz="1000">
+                          <a:solidFill>
+                            <a:srgbClr val="34495E"/>
+                          </a:solidFill>
+                        </a:defRPr>
+                      </a:pPr>
+                      <a:r>
+                        <a:t>Coil-level:</a:t>
+                      </a:r>
+                    </a:p>
+                    <a:p>
+                      <a:pPr>
+                        <a:defRPr sz="1000">
+                          <a:solidFill>
+                            <a:srgbClr val="34495E"/>
+                          </a:solidFill>
+                        </a:defRPr>
+                      </a:pPr>
+                      <a:r>
+                        <a:t>p=0.174</a:t>
                       </a:r>
                     </a:p>
                   </a:txBody>
@@ -11713,14 +12321,26 @@
                     <a:lstStyle/>
                     <a:p>
                       <a:pPr>
-                        <a:defRPr sz="1100">
-                          <a:solidFill>
-                            <a:srgbClr val="34495E"/>
-                          </a:solidFill>
-                        </a:defRPr>
-                      </a:pPr>
-                      <a:r>
-                        <a:t>Reverse causality</a:t>
+                        <a:defRPr sz="1000">
+                          <a:solidFill>
+                            <a:srgbClr val="34495E"/>
+                          </a:solidFill>
+                        </a:defRPr>
+                      </a:pPr>
+                      <a:r>
+                        <a:t>Reverse</a:t>
+                      </a:r>
+                    </a:p>
+                    <a:p>
+                      <a:pPr>
+                        <a:defRPr sz="1000">
+                          <a:solidFill>
+                            <a:srgbClr val="34495E"/>
+                          </a:solidFill>
+                        </a:defRPr>
+                      </a:pPr>
+                      <a:r>
+                        <a:t>causality</a:t>
                       </a:r>
                     </a:p>
                   </a:txBody>
@@ -11743,8 +12363,8 @@
         </p:nvSpPr>
         <p:spPr>
           <a:xfrm>
-            <a:off x="457200" y="5760720"/>
-            <a:ext cx="10972800" cy="914400"/>
+            <a:off x="457200" y="6126480"/>
+            <a:ext cx="10972800" cy="548640"/>
           </a:xfrm>
           <a:prstGeom prst="rect">
             <a:avLst/>
@@ -11758,7 +12378,7 @@
           <a:lstStyle/>
           <a:p>
             <a:pPr algn="l">
-              <a:defRPr sz="1300" b="0">
+              <a:defRPr sz="1200" b="0">
                 <a:solidFill>
                   <a:srgbClr val="34495E"/>
                 </a:solidFill>
@@ -11767,14 +12387,14 @@
           </a:p>
           <a:p>
             <a:pPr>
-              <a:defRPr sz="1400" b="1">
+              <a:defRPr sz="1300" b="1">
                 <a:solidFill>
                   <a:srgbClr val="2C7BE5"/>
                 </a:solidFill>
               </a:defRPr>
             </a:pPr>
             <a:r>
-              <a:t>RUN filter is the key tool: separates true signals from false signals caused by line stops</a:t>
+              <a:t>KEY: RUN filter (normal operation only) is the decisive tool for separating true vs false signals</a:t>
             </a:r>
           </a:p>
         </p:txBody>

--- a/0330_additional/0330_DH_Steel_IBA_Analysis_Report.pptx
+++ b/0330_additional/0330_DH_Steel_IBA_Analysis_Report.pptx
@@ -8597,22 +8597,22 @@
       </p:sp>
       <p:pic>
         <p:nvPicPr>
-          <p:cNvPr id="3" name="Picture 2" descr="dashboard_completion.png"/>
+          <p:cNvPr id="3" name="Picture 2" descr="customer_requirements_table.png"/>
           <p:cNvPicPr>
             <a:picLocks noChangeAspect="1"/>
           </p:cNvPicPr>
           <p:nvPr/>
         </p:nvPicPr>
         <p:blipFill>
-          <a:blip r:embed="rId2"/>
+          <a:blip r:embed="rId3"/>
           <a:stretch>
             <a:fillRect/>
           </a:stretch>
         </p:blipFill>
         <p:spPr>
           <a:xfrm>
-            <a:off x="274320" y="1280160"/>
-            <a:ext cx="11612880" cy="4901359"/>
+            <a:off x="457200" y="2286000"/>
+            <a:ext cx="11277295" cy="3607385"/>
           </a:xfrm>
           <a:prstGeom prst="rect">
             <a:avLst/>

--- a/0330_additional/0330_DH_Steel_IBA_Analysis_Report.pptx
+++ b/0330_additional/0330_DH_Steel_IBA_Analysis_Report.pptx
@@ -8595,30 +8595,550 @@
           </a:p>
         </p:txBody>
       </p:sp>
-      <p:pic>
-        <p:nvPicPr>
-          <p:cNvPr id="3" name="Picture 2" descr="customer_requirements_table.png"/>
-          <p:cNvPicPr>
-            <a:picLocks noChangeAspect="1"/>
-          </p:cNvPicPr>
+      <p:graphicFrame>
+        <p:nvGraphicFramePr>
+          <p:cNvPr id="3" name="Table 2"/>
+          <p:cNvGraphicFramePr>
+            <a:graphicFrameLocks noGrp="1"/>
+          </p:cNvGraphicFramePr>
           <p:nvPr/>
-        </p:nvPicPr>
-        <p:blipFill>
-          <a:blip r:embed="rId3"/>
-          <a:stretch>
-            <a:fillRect/>
-          </a:stretch>
-        </p:blipFill>
-        <p:spPr>
-          <a:xfrm>
-            <a:off x="457200" y="2286000"/>
-            <a:ext cx="11277295" cy="3607385"/>
-          </a:xfrm>
-          <a:prstGeom prst="rect">
-            <a:avLst/>
-          </a:prstGeom>
-        </p:spPr>
-      </p:pic>
+        </p:nvGraphicFramePr>
+        <p:xfrm>
+          <a:off x="380847" y="1828800"/>
+          <a:ext cx="11430000" cy="3657600"/>
+        </p:xfrm>
+        <a:graphic>
+          <a:graphicData uri="http://schemas.openxmlformats.org/drawingml/2006/table">
+            <a:tbl>
+              <a:tblPr firstRow="1" bandRow="1">
+                <a:tableStyleId>{5C22544A-7EE6-4342-B048-85BDC9FD1C3A}</a:tableStyleId>
+              </a:tblPr>
+              <a:tblGrid>
+                <a:gridCol w="640080"/>
+                <a:gridCol w="4572000"/>
+                <a:gridCol w="914400"/>
+                <a:gridCol w="5303520"/>
+              </a:tblGrid>
+              <a:tr h="609600">
+                <a:tc>
+                  <a:txBody>
+                    <a:bodyPr/>
+                    <a:lstStyle/>
+                    <a:p>
+                      <a:pPr algn="ctr">
+                        <a:defRPr sz="1100" b="1">
+                          <a:solidFill>
+                            <a:srgbClr val="FFFFFF"/>
+                          </a:solidFill>
+                        </a:defRPr>
+                      </a:pPr>
+                      <a:r>
+                        <a:t>#</a:t>
+                      </a:r>
+                    </a:p>
+                  </a:txBody>
+                  <a:tcPr marL="73152" marR="73152" marT="36576" marB="36576">
+                    <a:solidFill>
+                      <a:srgbClr val="1B2A4A"/>
+                    </a:solidFill>
+                  </a:tcPr>
+                </a:tc>
+                <a:tc>
+                  <a:txBody>
+                    <a:bodyPr/>
+                    <a:lstStyle/>
+                    <a:p>
+                      <a:pPr algn="ctr">
+                        <a:defRPr sz="1100" b="1">
+                          <a:solidFill>
+                            <a:srgbClr val="FFFFFF"/>
+                          </a:solidFill>
+                        </a:defRPr>
+                      </a:pPr>
+                      <a:r>
+                        <a:t>Requirement</a:t>
+                      </a:r>
+                    </a:p>
+                  </a:txBody>
+                  <a:tcPr marL="73152" marR="73152" marT="36576" marB="36576">
+                    <a:solidFill>
+                      <a:srgbClr val="1B2A4A"/>
+                    </a:solidFill>
+                  </a:tcPr>
+                </a:tc>
+                <a:tc>
+                  <a:txBody>
+                    <a:bodyPr/>
+                    <a:lstStyle/>
+                    <a:p>
+                      <a:pPr algn="ctr">
+                        <a:defRPr sz="1100" b="1">
+                          <a:solidFill>
+                            <a:srgbClr val="FFFFFF"/>
+                          </a:solidFill>
+                        </a:defRPr>
+                      </a:pPr>
+                      <a:r>
+                        <a:t>Done</a:t>
+                      </a:r>
+                    </a:p>
+                  </a:txBody>
+                  <a:tcPr marL="73152" marR="73152" marT="36576" marB="36576">
+                    <a:solidFill>
+                      <a:srgbClr val="1B2A4A"/>
+                    </a:solidFill>
+                  </a:tcPr>
+                </a:tc>
+                <a:tc>
+                  <a:txBody>
+                    <a:bodyPr/>
+                    <a:lstStyle/>
+                    <a:p>
+                      <a:pPr algn="ctr">
+                        <a:defRPr sz="1100" b="1">
+                          <a:solidFill>
+                            <a:srgbClr val="FFFFFF"/>
+                          </a:solidFill>
+                        </a:defRPr>
+                      </a:pPr>
+                      <a:r>
+                        <a:t>Key Deliverables</a:t>
+                      </a:r>
+                    </a:p>
+                  </a:txBody>
+                  <a:tcPr marL="73152" marR="73152" marT="36576" marB="36576">
+                    <a:solidFill>
+                      <a:srgbClr val="1B2A4A"/>
+                    </a:solidFill>
+                  </a:tcPr>
+                </a:tc>
+              </a:tr>
+              <a:tr h="609600">
+                <a:tc>
+                  <a:txBody>
+                    <a:bodyPr/>
+                    <a:lstStyle/>
+                    <a:p>
+                      <a:pPr algn="ctr">
+                        <a:defRPr sz="1100">
+                          <a:solidFill>
+                            <a:srgbClr val="34495E"/>
+                          </a:solidFill>
+                        </a:defRPr>
+                      </a:pPr>
+                      <a:r>
+                        <a:t>5</a:t>
+                      </a:r>
+                    </a:p>
+                  </a:txBody>
+                  <a:tcPr marL="73152" marR="73152" marT="36576" marB="36576"/>
+                </a:tc>
+                <a:tc>
+                  <a:txBody>
+                    <a:bodyPr/>
+                    <a:lstStyle/>
+                    <a:p>
+                      <a:pPr>
+                        <a:defRPr sz="1100">
+                          <a:solidFill>
+                            <a:srgbClr val="34495E"/>
+                          </a:solidFill>
+                        </a:defRPr>
+                      </a:pPr>
+                      <a:r>
+                        <a:t>ML vs Stat Ranking Reconciliation (Most Important)</a:t>
+                      </a:r>
+                    </a:p>
+                  </a:txBody>
+                  <a:tcPr marL="73152" marR="73152" marT="36576" marB="36576"/>
+                </a:tc>
+                <a:tc>
+                  <a:txBody>
+                    <a:bodyPr/>
+                    <a:lstStyle/>
+                    <a:p>
+                      <a:pPr algn="ctr">
+                        <a:defRPr sz="1100">
+                          <a:solidFill>
+                            <a:srgbClr val="34495E"/>
+                          </a:solidFill>
+                        </a:defRPr>
+                      </a:pPr>
+                      <a:r>
+                        <a:t>95%</a:t>
+                      </a:r>
+                    </a:p>
+                  </a:txBody>
+                  <a:tcPr marL="73152" marR="73152" marT="36576" marB="36576"/>
+                </a:tc>
+                <a:tc>
+                  <a:txBody>
+                    <a:bodyPr/>
+                    <a:lstStyle/>
+                    <a:p>
+                      <a:pPr>
+                        <a:defRPr sz="1100">
+                          <a:solidFill>
+                            <a:srgbClr val="34495E"/>
+                          </a:solidFill>
+                        </a:defRPr>
+                      </a:pPr>
+                      <a:r>
+                        <a:t>Reconciled Ranking, 11 Counter-examples, SHAP x3</a:t>
+                      </a:r>
+                    </a:p>
+                  </a:txBody>
+                  <a:tcPr marL="73152" marR="73152" marT="36576" marB="36576"/>
+                </a:tc>
+              </a:tr>
+              <a:tr h="609600">
+                <a:tc>
+                  <a:txBody>
+                    <a:bodyPr/>
+                    <a:lstStyle/>
+                    <a:p>
+                      <a:pPr algn="ctr">
+                        <a:defRPr sz="1100">
+                          <a:solidFill>
+                            <a:srgbClr val="34495E"/>
+                          </a:solidFill>
+                        </a:defRPr>
+                      </a:pPr>
+                      <a:r>
+                        <a:t>1+2</a:t>
+                      </a:r>
+                    </a:p>
+                  </a:txBody>
+                  <a:tcPr marL="73152" marR="73152" marT="36576" marB="36576">
+                    <a:solidFill>
+                      <a:srgbClr val="EBF5FB"/>
+                    </a:solidFill>
+                  </a:tcPr>
+                </a:tc>
+                <a:tc>
+                  <a:txBody>
+                    <a:bodyPr/>
+                    <a:lstStyle/>
+                    <a:p>
+                      <a:pPr>
+                        <a:defRPr sz="1100">
+                          <a:solidFill>
+                            <a:srgbClr val="34495E"/>
+                          </a:solidFill>
+                        </a:defRPr>
+                      </a:pPr>
+                      <a:r>
+                        <a:t>Causality + Furnace vs Torque Priority</a:t>
+                      </a:r>
+                    </a:p>
+                  </a:txBody>
+                  <a:tcPr marL="73152" marR="73152" marT="36576" marB="36576">
+                    <a:solidFill>
+                      <a:srgbClr val="EBF5FB"/>
+                    </a:solidFill>
+                  </a:tcPr>
+                </a:tc>
+                <a:tc>
+                  <a:txBody>
+                    <a:bodyPr/>
+                    <a:lstStyle/>
+                    <a:p>
+                      <a:pPr algn="ctr">
+                        <a:defRPr sz="1100">
+                          <a:solidFill>
+                            <a:srgbClr val="34495E"/>
+                          </a:solidFill>
+                        </a:defRPr>
+                      </a:pPr>
+                      <a:r>
+                        <a:t>85%</a:t>
+                      </a:r>
+                    </a:p>
+                  </a:txBody>
+                  <a:tcPr marL="73152" marR="73152" marT="36576" marB="36576">
+                    <a:solidFill>
+                      <a:srgbClr val="EBF5FB"/>
+                    </a:solidFill>
+                  </a:tcPr>
+                </a:tc>
+                <a:tc>
+                  <a:txBody>
+                    <a:bodyPr/>
+                    <a:lstStyle/>
+                    <a:p>
+                      <a:pPr>
+                        <a:defRPr sz="1100">
+                          <a:solidFill>
+                            <a:srgbClr val="34495E"/>
+                          </a:solidFill>
+                        </a:defRPr>
+                      </a:pPr>
+                      <a:r>
+                        <a:t>CCF 10 pairs, Stand 8 Analysis, Process Flow</a:t>
+                      </a:r>
+                    </a:p>
+                  </a:txBody>
+                  <a:tcPr marL="73152" marR="73152" marT="36576" marB="36576">
+                    <a:solidFill>
+                      <a:srgbClr val="EBF5FB"/>
+                    </a:solidFill>
+                  </a:tcPr>
+                </a:tc>
+              </a:tr>
+              <a:tr h="609600">
+                <a:tc>
+                  <a:txBody>
+                    <a:bodyPr/>
+                    <a:lstStyle/>
+                    <a:p>
+                      <a:pPr algn="ctr">
+                        <a:defRPr sz="1100">
+                          <a:solidFill>
+                            <a:srgbClr val="34495E"/>
+                          </a:solidFill>
+                        </a:defRPr>
+                      </a:pPr>
+                      <a:r>
+                        <a:t>4</a:t>
+                      </a:r>
+                    </a:p>
+                  </a:txBody>
+                  <a:tcPr marL="73152" marR="73152" marT="36576" marB="36576"/>
+                </a:tc>
+                <a:tc>
+                  <a:txBody>
+                    <a:bodyPr/>
+                    <a:lstStyle/>
+                    <a:p>
+                      <a:pPr>
+                        <a:defRPr sz="1100">
+                          <a:solidFill>
+                            <a:srgbClr val="34495E"/>
+                          </a:solidFill>
+                        </a:defRPr>
+                      </a:pPr>
+                      <a:r>
+                        <a:t>Stand 14 &amp; Block Mill Re-examination</a:t>
+                      </a:r>
+                    </a:p>
+                  </a:txBody>
+                  <a:tcPr marL="73152" marR="73152" marT="36576" marB="36576"/>
+                </a:tc>
+                <a:tc>
+                  <a:txBody>
+                    <a:bodyPr/>
+                    <a:lstStyle/>
+                    <a:p>
+                      <a:pPr algn="ctr">
+                        <a:defRPr sz="1100">
+                          <a:solidFill>
+                            <a:srgbClr val="34495E"/>
+                          </a:solidFill>
+                        </a:defRPr>
+                      </a:pPr>
+                      <a:r>
+                        <a:t>90%</a:t>
+                      </a:r>
+                    </a:p>
+                  </a:txBody>
+                  <a:tcPr marL="73152" marR="73152" marT="36576" marB="36576"/>
+                </a:tc>
+                <a:tc>
+                  <a:txBody>
+                    <a:bodyPr/>
+                    <a:lstStyle/>
+                    <a:p>
+                      <a:pPr>
+                        <a:defRPr sz="1100">
+                          <a:solidFill>
+                            <a:srgbClr val="34495E"/>
+                          </a:solidFill>
+                        </a:defRPr>
+                      </a:pPr>
+                      <a:r>
+                        <a:t>avg/std Separation, Defect Type Correlation</a:t>
+                      </a:r>
+                    </a:p>
+                  </a:txBody>
+                  <a:tcPr marL="73152" marR="73152" marT="36576" marB="36576"/>
+                </a:tc>
+              </a:tr>
+              <a:tr h="609600">
+                <a:tc>
+                  <a:txBody>
+                    <a:bodyPr/>
+                    <a:lstStyle/>
+                    <a:p>
+                      <a:pPr algn="ctr">
+                        <a:defRPr sz="1100">
+                          <a:solidFill>
+                            <a:srgbClr val="34495E"/>
+                          </a:solidFill>
+                        </a:defRPr>
+                      </a:pPr>
+                      <a:r>
+                        <a:t>3</a:t>
+                      </a:r>
+                    </a:p>
+                  </a:txBody>
+                  <a:tcPr marL="73152" marR="73152" marT="36576" marB="36576">
+                    <a:solidFill>
+                      <a:srgbClr val="EBF5FB"/>
+                    </a:solidFill>
+                  </a:tcPr>
+                </a:tc>
+                <a:tc>
+                  <a:txBody>
+                    <a:bodyPr/>
+                    <a:lstStyle/>
+                    <a:p>
+                      <a:pPr>
+                        <a:defRPr sz="1100">
+                          <a:solidFill>
+                            <a:srgbClr val="34495E"/>
+                          </a:solidFill>
+                        </a:defRPr>
+                      </a:pPr>
+                      <a:r>
+                        <a:t>Setpoint Gap + Management Standards</a:t>
+                      </a:r>
+                    </a:p>
+                  </a:txBody>
+                  <a:tcPr marL="73152" marR="73152" marT="36576" marB="36576">
+                    <a:solidFill>
+                      <a:srgbClr val="EBF5FB"/>
+                    </a:solidFill>
+                  </a:tcPr>
+                </a:tc>
+                <a:tc>
+                  <a:txBody>
+                    <a:bodyPr/>
+                    <a:lstStyle/>
+                    <a:p>
+                      <a:pPr algn="ctr">
+                        <a:defRPr sz="1100">
+                          <a:solidFill>
+                            <a:srgbClr val="34495E"/>
+                          </a:solidFill>
+                        </a:defRPr>
+                      </a:pPr>
+                      <a:r>
+                        <a:t>60%</a:t>
+                      </a:r>
+                    </a:p>
+                  </a:txBody>
+                  <a:tcPr marL="73152" marR="73152" marT="36576" marB="36576">
+                    <a:solidFill>
+                      <a:srgbClr val="EBF5FB"/>
+                    </a:solidFill>
+                  </a:tcPr>
+                </a:tc>
+                <a:tc>
+                  <a:txBody>
+                    <a:bodyPr/>
+                    <a:lstStyle/>
+                    <a:p>
+                      <a:pPr>
+                        <a:defRPr sz="1100">
+                          <a:solidFill>
+                            <a:srgbClr val="34495E"/>
+                          </a:solidFill>
+                        </a:defRPr>
+                      </a:pPr>
+                      <a:r>
+                        <a:t>Alternative B (Measurement-based), Setpoint N/A</a:t>
+                      </a:r>
+                    </a:p>
+                  </a:txBody>
+                  <a:tcPr marL="73152" marR="73152" marT="36576" marB="36576">
+                    <a:solidFill>
+                      <a:srgbClr val="EBF5FB"/>
+                    </a:solidFill>
+                  </a:tcPr>
+                </a:tc>
+              </a:tr>
+              <a:tr h="609600">
+                <a:tc>
+                  <a:txBody>
+                    <a:bodyPr/>
+                    <a:lstStyle/>
+                    <a:p>
+                      <a:pPr algn="ctr">
+                        <a:defRPr sz="1100">
+                          <a:solidFill>
+                            <a:srgbClr val="34495E"/>
+                          </a:solidFill>
+                        </a:defRPr>
+                      </a:pPr>
+                      <a:r>
+                        <a:t>Add</a:t>
+                      </a:r>
+                    </a:p>
+                  </a:txBody>
+                  <a:tcPr marL="73152" marR="73152" marT="36576" marB="36576"/>
+                </a:tc>
+                <a:tc>
+                  <a:txBody>
+                    <a:bodyPr/>
+                    <a:lstStyle/>
+                    <a:p>
+                      <a:pPr>
+                        <a:defRPr sz="1100">
+                          <a:solidFill>
+                            <a:srgbClr val="34495E"/>
+                          </a:solidFill>
+                        </a:defRPr>
+                      </a:pPr>
+                      <a:r>
+                        <a:t>Process Flow Direction + Stand 8</a:t>
+                      </a:r>
+                    </a:p>
+                  </a:txBody>
+                  <a:tcPr marL="73152" marR="73152" marT="36576" marB="36576"/>
+                </a:tc>
+                <a:tc>
+                  <a:txBody>
+                    <a:bodyPr/>
+                    <a:lstStyle/>
+                    <a:p>
+                      <a:pPr algn="ctr">
+                        <a:defRPr sz="1100">
+                          <a:solidFill>
+                            <a:srgbClr val="34495E"/>
+                          </a:solidFill>
+                        </a:defRPr>
+                      </a:pPr>
+                      <a:r>
+                        <a:t>80%</a:t>
+                      </a:r>
+                    </a:p>
+                  </a:txBody>
+                  <a:tcPr marL="73152" marR="73152" marT="36576" marB="36576"/>
+                </a:tc>
+                <a:tc>
+                  <a:txBody>
+                    <a:bodyPr/>
+                    <a:lstStyle/>
+                    <a:p>
+                      <a:pPr>
+                        <a:defRPr sz="1100">
+                          <a:solidFill>
+                            <a:srgbClr val="34495E"/>
+                          </a:solidFill>
+                        </a:defRPr>
+                      </a:pPr>
+                      <a:r>
+                        <a:t>Physical Lag Estimation, Reverse Hypothesis</a:t>
+                      </a:r>
+                    </a:p>
+                  </a:txBody>
+                  <a:tcPr marL="73152" marR="73152" marT="36576" marB="36576"/>
+                </a:tc>
+              </a:tr>
+            </a:tbl>
+          </a:graphicData>
+        </a:graphic>
+      </p:graphicFrame>
     </p:spTree>
   </p:cSld>
   <p:clrMapOvr>
